--- a/docs/latex/StablecoinArbitrage_GSS2026/poster/poster_filled.pptx
+++ b/docs/latex/StablecoinArbitrage_GSS2026/poster/poster_filled.pptx
@@ -14299,11 +14299,11 @@
             <a:lstStyle/>
             <a:p>
               <a:pPr marL="285750" indent="-285750">
-                <a:buSzPts val="3200"/>
+                <a:buSzPts val="2900"/>
                 <a:buChar char="•"/>
               </a:pPr>
               <a:r>
-                <a:rPr lang="en-US" sz="3060" dirty="0">
+                <a:rPr lang="en-US" sz="2700" dirty="0">
                   <a:solidFill>
                     <a:schemeClr val="dk1"/>
                   </a:solidFill>
@@ -14312,16 +14312,16 @@
                   <a:cs typeface="Times"/>
                   <a:sym typeface="Times"/>
                 </a:rPr>
-                <a:t>Cross-exchange stablecoin arbitrage exploits price gaps across centralized exchanges (CEX).</a:t>
+                <a:t>Cross-exchange stablecoin arbitrage exploits price gaps between centralized exchanges (CEX).</a:t>
               </a:r>
             </a:p>
             <a:p>
               <a:pPr marL="285750" indent="-285750">
-                <a:buSzPts val="3200"/>
+                <a:buSzPts val="2900"/>
                 <a:buChar char="•"/>
               </a:pPr>
               <a:r>
-                <a:rPr lang="en-US" sz="3060" dirty="0">
+                <a:rPr lang="en-US" sz="2700" dirty="0">
                   <a:solidFill>
                     <a:schemeClr val="dk1"/>
                   </a:solidFill>
@@ -14330,16 +14330,34 @@
                   <a:cs typeface="Times"/>
                   <a:sym typeface="Times"/>
                 </a:rPr>
-                <a:t>Existing approaches detect negative cycles but ignore execution costs (fees, slippage, transfer delays, venue risk).</a:t>
+                <a:t>Existing work focuses on negative-cycle detection: it finds opportunities but ignores execution costs.</a:t>
               </a:r>
             </a:p>
             <a:p>
               <a:pPr marL="285750" indent="-285750">
-                <a:buSzPts val="3200"/>
+                <a:buSzPts val="2900"/>
                 <a:buChar char="•"/>
               </a:pPr>
               <a:r>
-                <a:rPr lang="en-US" sz="3060" dirty="0">
+                <a:rPr lang="en-US" sz="2700" dirty="0">
+                  <a:solidFill>
+                    <a:schemeClr val="dk1"/>
+                  </a:solidFill>
+                  <a:latin typeface="Times"/>
+                  <a:ea typeface="Times"/>
+                  <a:cs typeface="Times"/>
+                  <a:sym typeface="Times"/>
+                </a:rPr>
+                <a:t>Real costs matter: trading fees, withdrawal/gas fees, order-book slippage, blockchain transfer time, and venue reliability.</a:t>
+              </a:r>
+            </a:p>
+            <a:p>
+              <a:pPr marL="285750" indent="-285750">
+                <a:buSzPts val="2900"/>
+                <a:buChar char="•"/>
+              </a:pPr>
+              <a:r>
+                <a:rPr lang="en-US" sz="2700" dirty="0">
                   <a:solidFill>
                     <a:schemeClr val="dk1"/>
                   </a:solidFill>
@@ -14353,11 +14371,11 @@
             </a:p>
             <a:p>
               <a:pPr marL="285750" indent="-285750">
-                <a:buSzPts val="3200"/>
+                <a:buSzPts val="2900"/>
                 <a:buChar char="•"/>
               </a:pPr>
               <a:r>
-                <a:rPr lang="en-US" sz="3060" dirty="0">
+                <a:rPr lang="en-US" sz="2700" dirty="0">
                   <a:solidFill>
                     <a:schemeClr val="dk1"/>
                   </a:solidFill>
@@ -14366,16 +14384,16 @@
                   <a:cs typeface="Times"/>
                   <a:sym typeface="Times"/>
                 </a:rPr>
-                <a:t>Goal: plan executable, profitable trade-and-transfer paths in real time.</a:t>
+                <a:t>Goal: plan executable, profitable trade-and-transfer paths under live market conditions.</a:t>
               </a:r>
             </a:p>
             <a:p>
               <a:pPr marL="285750" indent="-285750">
-                <a:buSzPts val="3200"/>
+                <a:buSzPts val="2900"/>
                 <a:buChar char="•"/>
               </a:pPr>
               <a:r>
-                <a:rPr lang="en-US" sz="3060" dirty="0">
+                <a:rPr lang="en-US" sz="2700" dirty="0">
                   <a:solidFill>
                     <a:schemeClr val="dk1"/>
                   </a:solidFill>
@@ -14384,7 +14402,7 @@
                   <a:cs typeface="Times"/>
                   <a:sym typeface="Times"/>
                 </a:rPr>
-                <a:t>Key questions: which heuristics help? how do they shape A* expansions and profit?</a:t>
+                <a:t>Research questions: which heuristics help? how do they shape A* expansions vs. profit?</a:t>
               </a:r>
             </a:p>
             <a:p>
@@ -14581,7 +14599,7 @@
                   <a:cs typeface="Trebuchet MS"/>
                   <a:sym typeface="Trebuchet MS"/>
                 </a:rPr>
-                <a:t>Motivation</a:t>
+                <a:t>Motivation &amp; Problem</a:t>
               </a:r>
               <a:endParaRPr sz="1339" dirty="0"/>
             </a:p>
@@ -14616,11 +14634,11 @@
           <a:lstStyle/>
           <a:p>
             <a:pPr marL="285750" indent="-285750">
-              <a:buSzPts val="2940"/>
+              <a:buSzPts val="2900"/>
               <a:buChar char="•"/>
             </a:pPr>
             <a:r>
-              <a:rPr lang="en-US" sz="2800" dirty="0">
+              <a:rPr lang="en-US" sz="2700" dirty="0">
                 <a:solidFill>
                   <a:schemeClr val="dk1"/>
                 </a:solidFill>
@@ -14634,11 +14652,11 @@
           </a:p>
           <a:p>
             <a:pPr marL="285750" indent="-285750">
-              <a:buSzPts val="2940"/>
+              <a:buSzPts val="2900"/>
               <a:buChar char="•"/>
             </a:pPr>
             <a:r>
-              <a:rPr lang="en-US" sz="2800" dirty="0">
+              <a:rPr lang="en-US" sz="2700" dirty="0">
                 <a:solidFill>
                   <a:schemeClr val="dk1"/>
                 </a:solidFill>
@@ -14647,16 +14665,16 @@
                 <a:cs typeface="Times"/>
                 <a:sym typeface="Times"/>
               </a:rPr>
-              <a:t>Edge weight w(e) = -log r(e). Effective rate r(e) absorbs taker fees, withdrawal/gas fees, transfer time, and exchange-reliability risk.</a:t>
+              <a:t>Edge weight w(e) = -log r(e). Effective rate r(e) bundles taker fees, withdrawal/gas fees, transfer time, and exchange-reliability risk.</a:t>
             </a:r>
           </a:p>
           <a:p>
             <a:pPr marL="285750" indent="-285750">
-              <a:buSzPts val="2940"/>
+              <a:buSzPts val="2900"/>
               <a:buChar char="•"/>
             </a:pPr>
             <a:r>
-              <a:rPr lang="en-US" sz="2800" dirty="0">
+              <a:rPr lang="en-US" sz="2700" dirty="0">
                 <a:solidFill>
                   <a:schemeClr val="dk1"/>
                 </a:solidFill>
@@ -14665,16 +14683,16 @@
                 <a:cs typeface="Times"/>
                 <a:sym typeface="Times"/>
               </a:rPr>
-              <a:t>Open-path goal: any node with final USD value &gt; start. No closed cycle required.</a:t>
+              <a:t>Open-path goal: any node where final USD value &gt; start. No closed cycle required (USD-pegged stablecoins).</a:t>
             </a:r>
           </a:p>
           <a:p>
             <a:pPr marL="285750" indent="-285750">
-              <a:buSzPts val="2940"/>
+              <a:buSzPts val="2900"/>
               <a:buChar char="•"/>
             </a:pPr>
             <a:r>
-              <a:rPr lang="en-US" sz="2800" dirty="0">
+              <a:rPr lang="en-US" sz="2700" dirty="0">
                 <a:solidFill>
                   <a:schemeClr val="dk1"/>
                 </a:solidFill>
@@ -14683,43 +14701,87 @@
                 <a:cs typeface="Times"/>
                 <a:sym typeface="Times"/>
               </a:rPr>
-              <a:t>A* with f(n) = g(n) + h(n). h is a domain guidance penalty.</a:t>
+              <a:t>A* search with f(n) = g(n) + h(n). h is a domain guidance penalty, not an admissible lower bound.</a:t>
             </a:r>
           </a:p>
           <a:p>
-            <a:pPr marL="285750" indent="-285750">
-              <a:buSzPts val="2940"/>
-              <a:buChar char="•"/>
+            <a:pPr>
+              <a:buNone/>
+            </a:pPr>
+            <a:endParaRPr sz="1200"/>
+          </a:p>
+          <a:p>
+            <a:pPr>
+              <a:buNone/>
             </a:pPr>
             <a:r>
-              <a:rPr lang="en-US" sz="2800" dirty="0">
+              <a:rPr lang="en-US" sz="2400" b="1" dirty="0">
                 <a:solidFill>
                   <a:schemeClr val="dk1"/>
+                </a:solidFill>
+                <a:latin typeface="Courier New"/>
+                <a:ea typeface="Courier New"/>
+                <a:cs typeface="Courier New"/>
+                <a:sym typeface="Courier New"/>
+              </a:rPr>
+              <a:t>w(e) = -log r(e),    f(n) = g(n) + h(n)</a:t>
+            </a:r>
+          </a:p>
+          <a:p>
+            <a:pPr>
+              <a:buNone/>
+            </a:pPr>
+            <a:r>
+              <a:rPr lang="en-US" sz="2400" b="1" dirty="0">
+                <a:solidFill>
+                  <a:schemeClr val="dk1"/>
+                </a:solidFill>
+                <a:latin typeface="Courier New"/>
+                <a:ea typeface="Courier New"/>
+                <a:cs typeface="Courier New"/>
+                <a:sym typeface="Courier New"/>
+              </a:rPr>
+              <a:t>h_2 = lambda_slip * max(0, slippage_bps - theta)</a:t>
+            </a:r>
+          </a:p>
+          <a:p>
+            <a:pPr>
+              <a:buNone/>
+            </a:pPr>
+            <a:r>
+              <a:rPr lang="en-US" sz="2400" b="1" dirty="0">
+                <a:solidFill>
+                  <a:schemeClr val="dk1"/>
+                </a:solidFill>
+                <a:latin typeface="Courier New"/>
+                <a:ea typeface="Courier New"/>
+                <a:cs typeface="Courier New"/>
+                <a:sym typeface="Courier New"/>
+              </a:rPr>
+              <a:t>slippage_bps = (VWAP(Q) - P_mid) / P_mid * 10000</a:t>
+            </a:r>
+          </a:p>
+          <a:p>
+            <a:pPr>
+              <a:buNone/>
+            </a:pPr>
+            <a:endParaRPr sz="1200"/>
+          </a:p>
+          <a:p>
+            <a:pPr algn="ctr">
+              <a:buNone/>
+            </a:pPr>
+            <a:r>
+              <a:rPr lang="en-US" sz="2400" b="1" i="1" dirty="0">
+                <a:solidFill>
+                  <a:srgbClr val="0070C0"/>
                 </a:solidFill>
                 <a:latin typeface="Times"/>
                 <a:ea typeface="Times"/>
                 <a:cs typeface="Times"/>
                 <a:sym typeface="Times"/>
               </a:rPr>
-              <a:t>Novel slippage heuristic h_2 = lambda * max(0, slippage_bps - theta), with slippage from live order-book VWAP vs. mid-price.</a:t>
-            </a:r>
-          </a:p>
-          <a:p>
-            <a:pPr marL="285750" indent="-285750">
-              <a:buSzPts val="2940"/>
-              <a:buChar char="•"/>
-            </a:pPr>
-            <a:r>
-              <a:rPr lang="en-US" sz="2800" dirty="0">
-                <a:solidFill>
-                  <a:schemeClr val="dk1"/>
-                </a:solidFill>
-                <a:latin typeface="Times"/>
-                <a:ea typeface="Times"/>
-                <a:cs typeface="Times"/>
-                <a:sym typeface="Times"/>
-              </a:rPr>
-              <a:t>h_2 prunes high-impact routes early while keeping low-impact ones: same profit, fewer expansions.</a:t>
+              <a:t>Slippage-aware guidance prunes high-impact routes early, keeps low-impact ones intact: same profit as Dijkstra with 29% fewer expansions.</a:t>
             </a:r>
           </a:p>
           <a:p>
@@ -15312,11 +15374,11 @@
             <a:lstStyle/>
             <a:p>
               <a:pPr marL="285750" indent="-285750">
-                <a:buSzPts val="3200"/>
+                <a:buSzPts val="2900"/>
                 <a:buChar char="•"/>
               </a:pPr>
               <a:r>
-                <a:rPr lang="en-US" sz="3060" dirty="0">
+                <a:rPr lang="en-US" sz="2700" dirty="0">
                   <a:solidFill>
                     <a:schemeClr val="dk1"/>
                   </a:solidFill>
@@ -15325,16 +15387,16 @@
                   <a:cs typeface="Times"/>
                   <a:sym typeface="Times"/>
                 </a:rPr>
-                <a:t>h_1 (liquidity): penalize shallow books from 24h volume, order size, and time remaining.</a:t>
+                <a:t>Three guidance heuristics, each capturing a distinct execution risk dimension.</a:t>
               </a:r>
             </a:p>
             <a:p>
               <a:pPr marL="285750" indent="-285750">
-                <a:buSzPts val="3200"/>
+                <a:buSzPts val="2900"/>
                 <a:buChar char="•"/>
               </a:pPr>
               <a:r>
-                <a:rPr lang="en-US" sz="3060" dirty="0">
+                <a:rPr lang="en-US" sz="2700" dirty="0">
                   <a:solidFill>
                     <a:schemeClr val="dk1"/>
                   </a:solidFill>
@@ -15343,16 +15405,16 @@
                   <a:cs typeface="Times"/>
                   <a:sym typeface="Times"/>
                 </a:rPr>
-                <a:t>h_3 (chain congestion + reliability): chain transfer time + static venue reliability score.</a:t>
+                <a:t>h_1 (liquidity): penalize shallow books from 24h volume, order size, and remaining time window.</a:t>
               </a:r>
             </a:p>
             <a:p>
               <a:pPr marL="285750" indent="-285750">
-                <a:buSzPts val="3200"/>
+                <a:buSzPts val="2900"/>
                 <a:buChar char="•"/>
               </a:pPr>
               <a:r>
-                <a:rPr lang="en-US" sz="3060" dirty="0">
+                <a:rPr lang="en-US" sz="2700" dirty="0">
                   <a:solidFill>
                     <a:schemeClr val="dk1"/>
                   </a:solidFill>
@@ -15361,16 +15423,16 @@
                   <a:cs typeface="Times"/>
                   <a:sym typeface="Times"/>
                 </a:rPr>
-                <a:t>Parallel multi-start: k=3 random A* launches; gains robustness, not per-search expansions.</a:t>
+                <a:t>h_3 (chain congestion + reliability): chain transfer time plus a static venue reliability score.</a:t>
               </a:r>
             </a:p>
             <a:p>
               <a:pPr marL="285750" indent="-285750">
-                <a:buSzPts val="3200"/>
+                <a:buSzPts val="2900"/>
                 <a:buChar char="•"/>
               </a:pPr>
               <a:r>
-                <a:rPr lang="en-US" sz="3060" dirty="0">
+                <a:rPr lang="en-US" sz="2700" dirty="0">
                   <a:solidFill>
                     <a:schemeClr val="dk1"/>
                   </a:solidFill>
@@ -15379,16 +15441,16 @@
                   <a:cs typeface="Times"/>
                   <a:sym typeface="Times"/>
                 </a:rPr>
-                <a:t>Baselines: Dijkstra (h=0), Bellman-Ford, and 1-/2-hop enumeration.</a:t>
+                <a:t>Parallel multi-start (k=3): random A* launches; trades robustness for repeated cost.</a:t>
               </a:r>
             </a:p>
             <a:p>
               <a:pPr marL="285750" indent="-285750">
-                <a:buSzPts val="3200"/>
+                <a:buSzPts val="2900"/>
                 <a:buChar char="•"/>
               </a:pPr>
               <a:r>
-                <a:rPr lang="en-US" sz="3060" dirty="0">
+                <a:rPr lang="en-US" sz="2700" dirty="0">
                   <a:solidFill>
                     <a:schemeClr val="dk1"/>
                   </a:solidFill>
@@ -15397,7 +15459,25 @@
                   <a:cs typeface="Times"/>
                   <a:sym typeface="Times"/>
                 </a:rPr>
-                <a:t>All heuristics act as guidance penalties (not admissible lower bounds).</a:t>
+                <a:t>Baselines: Dijkstra (h=0), Bellman-Ford negative-cycle, 1-hop, and 2-hop enumeration.</a:t>
+              </a:r>
+            </a:p>
+            <a:p>
+              <a:pPr marL="285750" indent="-285750">
+                <a:buSzPts val="2900"/>
+                <a:buChar char="•"/>
+              </a:pPr>
+              <a:r>
+                <a:rPr lang="en-US" sz="2700" dirty="0">
+                  <a:solidFill>
+                    <a:schemeClr val="dk1"/>
+                  </a:solidFill>
+                  <a:latin typeface="Times"/>
+                  <a:ea typeface="Times"/>
+                  <a:cs typeface="Times"/>
+                  <a:sym typeface="Times"/>
+                </a:rPr>
+                <a:t>All heuristics act as guidance penalties, not admissible lower bounds.</a:t>
               </a:r>
             </a:p>
             <a:p>
@@ -15594,7 +15674,7 @@
                   <a:cs typeface="Trebuchet MS"/>
                   <a:sym typeface="Trebuchet MS"/>
                 </a:rPr>
-                <a:t>Other Heuristics &amp; Baselines</a:t>
+                <a:t>Heuristics &amp; Baselines</a:t>
               </a:r>
               <a:endParaRPr sz="1339"/>
             </a:p>
@@ -15641,11 +15721,11 @@
             <a:lstStyle/>
             <a:p>
               <a:pPr marL="285750" indent="-285750">
-                <a:buSzPts val="3200"/>
+                <a:buSzPts val="2900"/>
                 <a:buChar char="•"/>
               </a:pPr>
               <a:r>
-                <a:rPr lang="en-US" sz="3060" dirty="0">
+                <a:rPr lang="en-US" sz="2700" dirty="0">
                   <a:solidFill>
                     <a:schemeClr val="dk1"/>
                   </a:solidFill>
@@ -15659,11 +15739,11 @@
             </a:p>
             <a:p>
               <a:pPr marL="285750" indent="-285750">
-                <a:buSzPts val="3200"/>
+                <a:buSzPts val="2900"/>
                 <a:buChar char="•"/>
               </a:pPr>
               <a:r>
-                <a:rPr lang="en-US" sz="3060" dirty="0">
+                <a:rPr lang="en-US" sz="2700" dirty="0">
                   <a:solidFill>
                     <a:schemeClr val="dk1"/>
                   </a:solidFill>
@@ -15672,16 +15752,16 @@
                   <a:cs typeface="Times"/>
                   <a:sym typeface="Times"/>
                 </a:rPr>
-                <a:t>9 stablecoin symbols; nodes = (exchange, coin); edges = intra-exchange trades + same-coin transfers.</a:t>
+                <a:t>9 stablecoin symbols across the venues (USDT, USDC, DAI, TUSD, FDUSD, BUSD, PYUSD, USDP, GUSD).</a:t>
               </a:r>
             </a:p>
             <a:p>
               <a:pPr marL="285750" indent="-285750">
-                <a:buSzPts val="3200"/>
+                <a:buSzPts val="2900"/>
                 <a:buChar char="•"/>
               </a:pPr>
               <a:r>
-                <a:rPr lang="en-US" sz="3060" dirty="0">
+                <a:rPr lang="en-US" sz="2700" dirty="0">
                   <a:solidFill>
                     <a:schemeClr val="dk1"/>
                   </a:solidFill>
@@ -15690,16 +15770,34 @@
                   <a:cs typeface="Times"/>
                   <a:sym typeface="Times"/>
                 </a:rPr>
-                <a:t>Cached graphs up to 41 nodes / 864 edges; live snapshots every 5 minutes.</a:t>
+                <a:t>Nodes = (exchange, coin); edges = intra-exchange trades and same-coin cross-exchange transfers.</a:t>
               </a:r>
             </a:p>
             <a:p>
               <a:pPr marL="285750" indent="-285750">
-                <a:buSzPts val="3200"/>
+                <a:buSzPts val="2900"/>
                 <a:buChar char="•"/>
               </a:pPr>
               <a:r>
-                <a:rPr lang="en-US" sz="3060" dirty="0">
+                <a:rPr lang="en-US" sz="2700" dirty="0">
+                  <a:solidFill>
+                    <a:schemeClr val="dk1"/>
+                  </a:solidFill>
+                  <a:latin typeface="Times"/>
+                  <a:ea typeface="Times"/>
+                  <a:cs typeface="Times"/>
+                  <a:sym typeface="Times"/>
+                </a:rPr>
+                <a:t>Graphs grow from 4 to 12 exchanges; cached snapshots up to 41 nodes / 864 edges.</a:t>
+              </a:r>
+            </a:p>
+            <a:p>
+              <a:pPr marL="285750" indent="-285750">
+                <a:buSzPts val="2900"/>
+                <a:buChar char="•"/>
+              </a:pPr>
+              <a:r>
+                <a:rPr lang="en-US" sz="2700" dirty="0">
                   <a:solidFill>
                     <a:schemeClr val="dk1"/>
                   </a:solidFill>
@@ -15713,11 +15811,11 @@
             </a:p>
             <a:p>
               <a:pPr marL="285750" indent="-285750">
-                <a:buSzPts val="3200"/>
+                <a:buSzPts val="2900"/>
                 <a:buChar char="•"/>
               </a:pPr>
               <a:r>
-                <a:rPr lang="en-US" sz="3060" dirty="0">
+                <a:rPr lang="en-US" sz="2700" dirty="0">
                   <a:solidFill>
                     <a:schemeClr val="dk1"/>
                   </a:solidFill>
@@ -15970,11 +16068,11 @@
             <a:lstStyle/>
             <a:p>
               <a:pPr marL="285750" indent="-285750">
-                <a:buSzPts val="3200"/>
+                <a:buSzPts val="2900"/>
                 <a:buChar char="•"/>
               </a:pPr>
               <a:r>
-                <a:rPr lang="en-US" sz="3060" dirty="0">
+                <a:rPr lang="en-US" sz="2700" dirty="0">
                   <a:solidFill>
                     <a:schemeClr val="dk1"/>
                   </a:solidFill>
@@ -15983,16 +16081,16 @@
                   <a:cs typeface="Times"/>
                   <a:sym typeface="Times"/>
                 </a:rPr>
-                <a:t>h_2 expands 29% fewer nodes than Dijkstra while matching profit within 1% ($10k, cached).</a:t>
+                <a:t>h_2 expands 29% fewer nodes than Dijkstra while matching profit within 1% (cached, $10k).</a:t>
               </a:r>
             </a:p>
             <a:p>
               <a:pPr marL="285750" indent="-285750">
-                <a:buSzPts val="3200"/>
+                <a:buSzPts val="2900"/>
                 <a:buChar char="•"/>
               </a:pPr>
               <a:r>
-                <a:rPr lang="en-US" sz="3060" dirty="0">
+                <a:rPr lang="en-US" sz="2700" dirty="0">
                   <a:solidFill>
                     <a:schemeClr val="dk1"/>
                   </a:solidFill>
@@ -16001,16 +16099,16 @@
                   <a:cs typeface="Times"/>
                   <a:sym typeface="Times"/>
                 </a:rPr>
-                <a:t>h_1 and h_3 expand 58-87% more nodes and earn 30-33% less profit: penalties over-steer search.</a:t>
+                <a:t>h_1 and h_3 expand 58-87% MORE nodes and earn 30-33% LESS profit: penalties over-steer search.</a:t>
               </a:r>
             </a:p>
             <a:p>
               <a:pPr marL="285750" indent="-285750">
-                <a:buSzPts val="3200"/>
+                <a:buSzPts val="2900"/>
                 <a:buChar char="•"/>
               </a:pPr>
               <a:r>
-                <a:rPr lang="en-US" sz="3060" dirty="0">
+                <a:rPr lang="en-US" sz="2700" dirty="0">
                   <a:solidFill>
                     <a:schemeClr val="dk1"/>
                   </a:solidFill>
@@ -16024,11 +16122,11 @@
             </a:p>
             <a:p>
               <a:pPr marL="285750" indent="-285750">
-                <a:buSzPts val="3200"/>
+                <a:buSzPts val="2900"/>
                 <a:buChar char="•"/>
               </a:pPr>
               <a:r>
-                <a:rPr lang="en-US" sz="3060" dirty="0">
+                <a:rPr lang="en-US" sz="2700" dirty="0">
                   <a:solidFill>
                     <a:schemeClr val="dk1"/>
                   </a:solidFill>
@@ -16038,6 +16136,24 @@
                   <a:sym typeface="Times"/>
                 </a:rPr>
                 <a:t>Quote staleness: 99.6% of paths remain profitable up to 120 s of delay.</a:t>
+              </a:r>
+            </a:p>
+            <a:p>
+              <a:pPr marL="285750" indent="-285750">
+                <a:buSzPts val="2900"/>
+                <a:buChar char="•"/>
+              </a:pPr>
+              <a:r>
+                <a:rPr lang="en-US" sz="2700" dirty="0">
+                  <a:solidFill>
+                    <a:schemeClr val="dk1"/>
+                  </a:solidFill>
+                  <a:latin typeface="Times"/>
+                  <a:ea typeface="Times"/>
+                  <a:cs typeface="Times"/>
+                  <a:sym typeface="Times"/>
+                </a:rPr>
+                <a:t>Slippage-aware guidance follows the same optimal routes with less wasted exploration.</a:t>
               </a:r>
             </a:p>
             <a:p>
@@ -16051,7 +16167,7 @@
                 <a:buNone/>
               </a:pPr>
               <a:r>
-                <a:rPr lang="en-US" sz="2400" b="1" dirty="0">
+                <a:rPr lang="en-US" sz="2200" b="1" dirty="0">
                   <a:solidFill>
                     <a:schemeClr val="dk1"/>
                   </a:solidFill>
@@ -16060,7 +16176,7 @@
                   <a:cs typeface="Courier New"/>
                   <a:sym typeface="Courier New"/>
                 </a:rPr>
-                <a:t>Heuristic    Succ.   Profit    Exp.    Δ</a:t>
+                <a:t>Heuristic     Succ.   Profit    Exp.    Δ</a:t>
               </a:r>
             </a:p>
             <a:p>
@@ -16068,7 +16184,7 @@
                 <a:buNone/>
               </a:pPr>
               <a:r>
-                <a:rPr lang="en-US" sz="2400" dirty="0">
+                <a:rPr lang="en-US" sz="2200" dirty="0">
                   <a:solidFill>
                     <a:schemeClr val="dk1"/>
                   </a:solidFill>
@@ -16085,7 +16201,7 @@
                 <a:buNone/>
               </a:pPr>
               <a:r>
-                <a:rPr lang="en-US" sz="2400" dirty="0">
+                <a:rPr lang="en-US" sz="2200" dirty="0">
                   <a:solidFill>
                     <a:schemeClr val="dk1"/>
                   </a:solidFill>
@@ -16102,7 +16218,7 @@
                 <a:buNone/>
               </a:pPr>
               <a:r>
-                <a:rPr lang="en-US" sz="2400" dirty="0">
+                <a:rPr lang="en-US" sz="2200" dirty="0">
                   <a:solidFill>
                     <a:schemeClr val="dk1"/>
                   </a:solidFill>
@@ -16119,7 +16235,7 @@
                 <a:buNone/>
               </a:pPr>
               <a:r>
-                <a:rPr lang="en-US" sz="2400" dirty="0">
+                <a:rPr lang="en-US" sz="2200" dirty="0">
                   <a:solidFill>
                     <a:schemeClr val="dk1"/>
                   </a:solidFill>
@@ -16325,7 +16441,7 @@
                   <a:cs typeface="Trebuchet MS"/>
                   <a:sym typeface="Trebuchet MS"/>
                 </a:rPr>
-                <a:t>Results</a:t>
+                <a:t>Results &amp; Robustness</a:t>
               </a:r>
               <a:endParaRPr sz="1339" dirty="0"/>
             </a:p>
@@ -16393,7 +16509,7 @@
                 <a:cs typeface="Times"/>
                 <a:sym typeface="Times"/>
               </a:rPr>
-              <a:t>Canadian AI 2026  |  GSS Paper ID 306</a:t>
+              <a:t>Canadian AI 2026  |  GSS Paper ID 306  |  36 x 24 in</a:t>
             </a:r>
             <a:endParaRPr sz="1148" dirty="0">
               <a:solidFill>
@@ -16469,9 +16585,52 @@
           </a:prstGeom>
         </p:spPr>
       </p:pic>
+      <p:sp>
+        <p:nvSpPr>
+          <p:cNvPr id="200" name="Caption 200"/>
+          <p:cNvSpPr txBox="1"/>
+          <p:nvPr/>
+        </p:nvSpPr>
+        <p:spPr>
+          <a:xfrm>
+            <a:off x="1400000" y="7140000"/>
+            <a:ext cx="8900000" cy="360000"/>
+          </a:xfrm>
+          <a:prstGeom prst="rect">
+            <a:avLst/>
+          </a:prstGeom>
+          <a:noFill/>
+          <a:ln>
+            <a:noFill/>
+          </a:ln>
+        </p:spPr>
+        <p:txBody>
+          <a:bodyPr wrap="square" anchor="ctr" anchorCtr="0">
+            <a:noAutofit/>
+          </a:bodyPr>
+          <a:lstStyle/>
+          <a:p>
+            <a:pPr algn="ctr">
+              <a:buNone/>
+            </a:pPr>
+            <a:r>
+              <a:rPr lang="en-US" sz="1900" i="1" dirty="0">
+                <a:solidFill>
+                  <a:srgbClr val="555555"/>
+                </a:solidFill>
+                <a:latin typeface="Times"/>
+                <a:ea typeface="Times"/>
+                <a:cs typeface="Times"/>
+                <a:sym typeface="Times"/>
+              </a:rPr>
+              <a:t>Success rate by heuristic</a:t>
+            </a:r>
+          </a:p>
+        </p:txBody>
+      </p:sp>
       <p:pic>
         <p:nvPicPr>
-          <p:cNvPr id="200" name="FullGraph"/>
+          <p:cNvPr id="201" name="fig04_success_rate"/>
           <p:cNvPicPr>
             <a:picLocks noChangeAspect="1"/>
           </p:cNvPicPr>
@@ -16485,17 +16644,60 @@
         </p:blipFill>
         <p:spPr>
           <a:xfrm>
-            <a:off x="11300000" y="11300000"/>
-            <a:ext cx="9500000" cy="4700000"/>
+            <a:off x="1400000" y="7500000"/>
+            <a:ext cx="8900000" cy="2200000"/>
           </a:xfrm>
           <a:prstGeom prst="rect">
             <a:avLst/>
           </a:prstGeom>
         </p:spPr>
       </p:pic>
+      <p:sp>
+        <p:nvSpPr>
+          <p:cNvPr id="202" name="Caption 202"/>
+          <p:cNvSpPr txBox="1"/>
+          <p:nvPr/>
+        </p:nvSpPr>
+        <p:spPr>
+          <a:xfrm>
+            <a:off x="1400000" y="13940000"/>
+            <a:ext cx="8900000" cy="360000"/>
+          </a:xfrm>
+          <a:prstGeom prst="rect">
+            <a:avLst/>
+          </a:prstGeom>
+          <a:noFill/>
+          <a:ln>
+            <a:noFill/>
+          </a:ln>
+        </p:spPr>
+        <p:txBody>
+          <a:bodyPr wrap="square" anchor="ctr" anchorCtr="0">
+            <a:noAutofit/>
+          </a:bodyPr>
+          <a:lstStyle/>
+          <a:p>
+            <a:pPr algn="ctr">
+              <a:buNone/>
+            </a:pPr>
+            <a:r>
+              <a:rPr lang="en-US" sz="1900" i="1" dirty="0">
+                <a:solidFill>
+                  <a:srgbClr val="555555"/>
+                </a:solidFill>
+                <a:latin typeface="Times"/>
+                <a:ea typeface="Times"/>
+                <a:cs typeface="Times"/>
+                <a:sym typeface="Times"/>
+              </a:rPr>
+              <a:t>Node expansions per heuristic (cached graph)</a:t>
+            </a:r>
+          </a:p>
+        </p:txBody>
+      </p:sp>
       <p:pic>
         <p:nvPicPr>
-          <p:cNvPr id="201" name="CameraReadySuccesfulPathProfit"/>
+          <p:cNvPr id="203" name="fig01_node_expansion_bar"/>
           <p:cNvPicPr>
             <a:picLocks noChangeAspect="1"/>
           </p:cNvPicPr>
@@ -16509,17 +16711,60 @@
         </p:blipFill>
         <p:spPr>
           <a:xfrm>
-            <a:off x="11300000" y="16400000"/>
-            <a:ext cx="9500000" cy="4700000"/>
+            <a:off x="1400000" y="14300000"/>
+            <a:ext cx="8900000" cy="2200000"/>
           </a:xfrm>
           <a:prstGeom prst="rect">
             <a:avLst/>
           </a:prstGeom>
         </p:spPr>
       </p:pic>
+      <p:sp>
+        <p:nvSpPr>
+          <p:cNvPr id="204" name="Caption 204"/>
+          <p:cNvSpPr txBox="1"/>
+          <p:nvPr/>
+        </p:nvSpPr>
+        <p:spPr>
+          <a:xfrm>
+            <a:off x="22400000" y="7140000"/>
+            <a:ext cx="8900000" cy="360000"/>
+          </a:xfrm>
+          <a:prstGeom prst="rect">
+            <a:avLst/>
+          </a:prstGeom>
+          <a:noFill/>
+          <a:ln>
+            <a:noFill/>
+          </a:ln>
+        </p:spPr>
+        <p:txBody>
+          <a:bodyPr wrap="square" anchor="ctr" anchorCtr="0">
+            <a:noAutofit/>
+          </a:bodyPr>
+          <a:lstStyle/>
+          <a:p>
+            <a:pPr algn="ctr">
+              <a:buNone/>
+            </a:pPr>
+            <a:r>
+              <a:rPr lang="en-US" sz="1900" i="1" dirty="0">
+                <a:solidFill>
+                  <a:srgbClr val="555555"/>
+                </a:solidFill>
+                <a:latin typeface="Times"/>
+                <a:ea typeface="Times"/>
+                <a:cs typeface="Times"/>
+                <a:sym typeface="Times"/>
+              </a:rPr>
+              <a:t>Expansions vs. graph size (4-12 exchanges)</a:t>
+            </a:r>
+          </a:p>
+        </p:txBody>
+      </p:sp>
       <p:pic>
         <p:nvPicPr>
-          <p:cNvPr id="202" name="fig08_graph_scaling_expansions"/>
+          <p:cNvPr id="205" name="fig08_graph_scaling_expansions"/>
           <p:cNvPicPr>
             <a:picLocks noChangeAspect="1"/>
           </p:cNvPicPr>
@@ -16533,17 +16778,60 @@
         </p:blipFill>
         <p:spPr>
           <a:xfrm>
-            <a:off x="22100000" y="7000000"/>
-            <a:ext cx="9500000" cy="2700000"/>
+            <a:off x="22400000" y="7500000"/>
+            <a:ext cx="8900000" cy="2200000"/>
           </a:xfrm>
           <a:prstGeom prst="rect">
             <a:avLst/>
           </a:prstGeom>
         </p:spPr>
       </p:pic>
+      <p:sp>
+        <p:nvSpPr>
+          <p:cNvPr id="206" name="Caption 206"/>
+          <p:cNvSpPr txBox="1"/>
+          <p:nvPr/>
+        </p:nvSpPr>
+        <p:spPr>
+          <a:xfrm>
+            <a:off x="22400000" y="13940000"/>
+            <a:ext cx="8900000" cy="360000"/>
+          </a:xfrm>
+          <a:prstGeom prst="rect">
+            <a:avLst/>
+          </a:prstGeom>
+          <a:noFill/>
+          <a:ln>
+            <a:noFill/>
+          </a:ln>
+        </p:spPr>
+        <p:txBody>
+          <a:bodyPr wrap="square" anchor="ctr" anchorCtr="0">
+            <a:noAutofit/>
+          </a:bodyPr>
+          <a:lstStyle/>
+          <a:p>
+            <a:pPr algn="ctr">
+              <a:buNone/>
+            </a:pPr>
+            <a:r>
+              <a:rPr lang="en-US" sz="1900" i="1" dirty="0">
+                <a:solidFill>
+                  <a:srgbClr val="555555"/>
+                </a:solidFill>
+                <a:latin typeface="Times"/>
+                <a:ea typeface="Times"/>
+                <a:cs typeface="Times"/>
+                <a:sym typeface="Times"/>
+              </a:rPr>
+              <a:t>Overnight (7,200 runs): profit, success, expansions</a:t>
+            </a:r>
+          </a:p>
+        </p:txBody>
+      </p:sp>
       <p:pic>
         <p:nvPicPr>
-          <p:cNvPr id="203" name="fig11_overnight_heuristic_comparison"/>
+          <p:cNvPr id="207" name="fig11_overnight_heuristic_comparison"/>
           <p:cNvPicPr>
             <a:picLocks noChangeAspect="1"/>
           </p:cNvPicPr>
@@ -16557,8 +16845,142 @@
         </p:blipFill>
         <p:spPr>
           <a:xfrm>
-            <a:off x="22100000" y="13700000"/>
-            <a:ext cx="9500000" cy="2700000"/>
+            <a:off x="22400000" y="14300000"/>
+            <a:ext cx="8900000" cy="2200000"/>
+          </a:xfrm>
+          <a:prstGeom prst="rect">
+            <a:avLst/>
+          </a:prstGeom>
+        </p:spPr>
+      </p:pic>
+      <p:sp>
+        <p:nvSpPr>
+          <p:cNvPr id="208" name="Caption 208"/>
+          <p:cNvSpPr txBox="1"/>
+          <p:nvPr/>
+        </p:nvSpPr>
+        <p:spPr>
+          <a:xfrm>
+            <a:off x="11300000" y="13040000"/>
+            <a:ext cx="9500000" cy="360000"/>
+          </a:xfrm>
+          <a:prstGeom prst="rect">
+            <a:avLst/>
+          </a:prstGeom>
+          <a:noFill/>
+          <a:ln>
+            <a:noFill/>
+          </a:ln>
+        </p:spPr>
+        <p:txBody>
+          <a:bodyPr wrap="square" anchor="ctr" anchorCtr="0">
+            <a:noAutofit/>
+          </a:bodyPr>
+          <a:lstStyle/>
+          <a:p>
+            <a:pPr algn="ctr">
+              <a:buNone/>
+            </a:pPr>
+            <a:r>
+              <a:rPr lang="en-US" sz="1900" i="1" dirty="0">
+                <a:solidFill>
+                  <a:srgbClr val="555555"/>
+                </a:solidFill>
+                <a:latin typeface="Times"/>
+                <a:ea typeface="Times"/>
+                <a:cs typeface="Times"/>
+                <a:sym typeface="Times"/>
+              </a:rPr>
+              <a:t>Stablecoin arbitrage graph (subset of 12 venues)</a:t>
+            </a:r>
+          </a:p>
+        </p:txBody>
+      </p:sp>
+      <p:pic>
+        <p:nvPicPr>
+          <p:cNvPr id="209" name="FullGraph"/>
+          <p:cNvPicPr>
+            <a:picLocks noChangeAspect="1"/>
+          </p:cNvPicPr>
+          <p:nvPr/>
+        </p:nvPicPr>
+        <p:blipFill>
+          <a:blip r:embed="rId9"/>
+          <a:stretch>
+            <a:fillRect/>
+          </a:stretch>
+        </p:blipFill>
+        <p:spPr>
+          <a:xfrm>
+            <a:off x="11300000" y="13400000"/>
+            <a:ext cx="9500000" cy="3900000"/>
+          </a:xfrm>
+          <a:prstGeom prst="rect">
+            <a:avLst/>
+          </a:prstGeom>
+        </p:spPr>
+      </p:pic>
+      <p:sp>
+        <p:nvSpPr>
+          <p:cNvPr id="210" name="Caption 210"/>
+          <p:cNvSpPr txBox="1"/>
+          <p:nvPr/>
+        </p:nvSpPr>
+        <p:spPr>
+          <a:xfrm>
+            <a:off x="11300000" y="17140000"/>
+            <a:ext cx="9500000" cy="360000"/>
+          </a:xfrm>
+          <a:prstGeom prst="rect">
+            <a:avLst/>
+          </a:prstGeom>
+          <a:noFill/>
+          <a:ln>
+            <a:noFill/>
+          </a:ln>
+        </p:spPr>
+        <p:txBody>
+          <a:bodyPr wrap="square" anchor="ctr" anchorCtr="0">
+            <a:noAutofit/>
+          </a:bodyPr>
+          <a:lstStyle/>
+          <a:p>
+            <a:pPr algn="ctr">
+              <a:buNone/>
+            </a:pPr>
+            <a:r>
+              <a:rPr lang="en-US" sz="1900" i="1" dirty="0">
+                <a:solidFill>
+                  <a:srgbClr val="555555"/>
+                </a:solidFill>
+                <a:latin typeface="Times"/>
+                <a:ea typeface="Times"/>
+                <a:cs typeface="Times"/>
+                <a:sym typeface="Times"/>
+              </a:rPr>
+              <a:t>A profitable path: kraken:USDT -&gt; kucoin:USDT -&gt; kucoin:TUSD</a:t>
+            </a:r>
+          </a:p>
+        </p:txBody>
+      </p:sp>
+      <p:pic>
+        <p:nvPicPr>
+          <p:cNvPr id="211" name="CameraReadySuccesfulPathProfit"/>
+          <p:cNvPicPr>
+            <a:picLocks noChangeAspect="1"/>
+          </p:cNvPicPr>
+          <p:nvPr/>
+        </p:nvPicPr>
+        <p:blipFill>
+          <a:blip r:embed="rId10"/>
+          <a:stretch>
+            <a:fillRect/>
+          </a:stretch>
+        </p:blipFill>
+        <p:spPr>
+          <a:xfrm>
+            <a:off x="11300000" y="17500000"/>
+            <a:ext cx="9500000" cy="3700000"/>
           </a:xfrm>
           <a:prstGeom prst="rect">
             <a:avLst/>

--- a/docs/latex/StablecoinArbitrage_GSS2026/poster/poster_filled.pptx
+++ b/docs/latex/StablecoinArbitrage_GSS2026/poster/poster_filled.pptx
@@ -14249,7 +14249,7 @@
                 <a:cs typeface="Trebuchet MS"/>
                 <a:sym typeface="Trebuchet MS"/>
               </a:rPr>
-              <a:t>Kevin Litvin    —    Simon Fraser University</a:t>
+              <a:t>Kevin Litvin  —  Simon Fraser University</a:t>
             </a:r>
             <a:endParaRPr sz="1339" dirty="0">
               <a:solidFill>
@@ -14298,111 +14298,93 @@
             </a:bodyPr>
             <a:lstStyle/>
             <a:p>
-              <a:pPr marL="285750" indent="-285750">
-                <a:buSzPts val="2900"/>
+              <a:pPr marL="342900" indent="-342900">
+                <a:buFont typeface="Arial"/>
                 <a:buChar char="•"/>
               </a:pPr>
               <a:r>
-                <a:rPr lang="en-US" sz="2700" dirty="0">
+                <a:rPr lang="en-US" sz="2400" dirty="0">
                   <a:solidFill>
                     <a:schemeClr val="dk1"/>
                   </a:solidFill>
-                  <a:latin typeface="Times"/>
-                  <a:ea typeface="Times"/>
-                  <a:cs typeface="Times"/>
-                  <a:sym typeface="Times"/>
+                  <a:latin typeface="Arial"/>
                 </a:rPr>
-                <a:t>Cross-exchange stablecoin arbitrage exploits price gaps between centralized exchanges (CEX).</a:t>
+                <a:t>Cross-exchange stablecoin arbitrage exploits price discrepancies across centralized exchanges in a $300B+ market.</a:t>
               </a:r>
             </a:p>
             <a:p>
-              <a:pPr marL="285750" indent="-285750">
-                <a:buSzPts val="2900"/>
+              <a:pPr marL="342900" indent="-342900">
+                <a:buFont typeface="Arial"/>
                 <a:buChar char="•"/>
               </a:pPr>
               <a:r>
-                <a:rPr lang="en-US" sz="2700" dirty="0">
+                <a:rPr lang="en-US" sz="2400" dirty="0">
                   <a:solidFill>
                     <a:schemeClr val="dk1"/>
                   </a:solidFill>
-                  <a:latin typeface="Times"/>
-                  <a:ea typeface="Times"/>
-                  <a:cs typeface="Times"/>
-                  <a:sym typeface="Times"/>
+                  <a:latin typeface="Arial"/>
                 </a:rPr>
-                <a:t>Existing work focuses on negative-cycle detection: it finds opportunities but ignores execution costs.</a:t>
+                <a:t>Prior work detects opportunities via negative-cycle algorithms — but ignores execution: fees, slippage, withdrawal delays, and venue reliability.</a:t>
               </a:r>
             </a:p>
             <a:p>
-              <a:pPr marL="285750" indent="-285750">
-                <a:buSzPts val="2900"/>
+              <a:pPr marL="342900" indent="-342900">
+                <a:buFont typeface="Arial"/>
                 <a:buChar char="•"/>
               </a:pPr>
               <a:r>
-                <a:rPr lang="en-US" sz="2700" dirty="0">
+                <a:rPr lang="en-US" sz="2400" dirty="0">
                   <a:solidFill>
                     <a:schemeClr val="dk1"/>
                   </a:solidFill>
-                  <a:latin typeface="Times"/>
-                  <a:ea typeface="Times"/>
-                  <a:cs typeface="Times"/>
-                  <a:sym typeface="Times"/>
+                  <a:latin typeface="Arial"/>
                 </a:rPr>
-                <a:t>Real costs matter: trading fees, withdrawal/gas fees, order-book slippage, blockchain transfer time, and venue reliability.</a:t>
+                <a:t>We shift focus to EXECUTION FEASIBILITY: compute trade-and-transfer paths that remain profitable after ALL real-world costs.</a:t>
               </a:r>
             </a:p>
             <a:p>
-              <a:pPr marL="285750" indent="-285750">
-                <a:buSzPts val="2900"/>
+              <a:pPr marL="342900" indent="-342900">
+                <a:buFont typeface="Arial"/>
                 <a:buChar char="•"/>
               </a:pPr>
               <a:r>
-                <a:rPr lang="en-US" sz="2700" dirty="0">
+                <a:rPr lang="en-US" sz="2400" dirty="0">
                   <a:solidFill>
                     <a:schemeClr val="dk1"/>
                   </a:solidFill>
-                  <a:latin typeface="Times"/>
-                  <a:ea typeface="Times"/>
-                  <a:cs typeface="Times"/>
-                  <a:sym typeface="Times"/>
+                  <a:latin typeface="Arial"/>
                 </a:rPr>
-                <a:t>Stablecoins (&gt;$300B market cap) are USD-pegged, so cross-venue routing has a clean USD objective.</a:t>
+                <a:t>Stablecoins are ideal: USD-pegged assets with a clear scalar profit objective across 12 major exchanges and 9 coin symbols.</a:t>
               </a:r>
             </a:p>
             <a:p>
-              <a:pPr marL="285750" indent="-285750">
-                <a:buSzPts val="2900"/>
+              <a:pPr marL="342900" indent="-342900">
+                <a:buFont typeface="Arial"/>
                 <a:buChar char="•"/>
               </a:pPr>
               <a:r>
-                <a:rPr lang="en-US" sz="2700" dirty="0">
+                <a:rPr lang="en-US" sz="2400" dirty="0">
                   <a:solidFill>
                     <a:schemeClr val="dk1"/>
                   </a:solidFill>
-                  <a:latin typeface="Times"/>
-                  <a:ea typeface="Times"/>
-                  <a:cs typeface="Times"/>
-                  <a:sym typeface="Times"/>
+                  <a:latin typeface="Arial"/>
                 </a:rPr>
-                <a:t>Goal: plan executable, profitable trade-and-transfer paths under live market conditions.</a:t>
+                <a:t>We run 7,200 overnight search instances and compare A* heuristics against Dijkstra and multi-start baselines.</a:t>
               </a:r>
             </a:p>
             <a:p>
-              <a:pPr marL="285750" indent="-285750">
-                <a:buSzPts val="2900"/>
+              <a:pPr marL="342900" indent="-342900">
+                <a:buFont typeface="Arial"/>
                 <a:buChar char="•"/>
               </a:pPr>
               <a:r>
-                <a:rPr lang="en-US" sz="2700" dirty="0">
+                <a:rPr lang="en-US" sz="2400" dirty="0">
                   <a:solidFill>
                     <a:schemeClr val="dk1"/>
                   </a:solidFill>
-                  <a:latin typeface="Times"/>
-                  <a:ea typeface="Times"/>
-                  <a:cs typeface="Times"/>
-                  <a:sym typeface="Times"/>
+                  <a:latin typeface="Arial"/>
                 </a:rPr>
-                <a:t>Research questions: which heuristics help? how do they shape A* expansions vs. profit?</a:t>
+                <a:t>Code: github.com/kevinl03/Stablecoin-CrossExchange-Arbitrage</a:t>
               </a:r>
             </a:p>
             <a:p>
@@ -14592,14 +14574,14 @@
               <a:r>
                 <a:rPr lang="en-US" sz="3825" b="1" dirty="0">
                   <a:solidFill>
-                    <a:srgbClr val="CD3E3D"/>
+                    <a:srgbClr val="CC0633"/>
                   </a:solidFill>
                   <a:latin typeface="Trebuchet MS"/>
                   <a:ea typeface="Trebuchet MS"/>
                   <a:cs typeface="Trebuchet MS"/>
                   <a:sym typeface="Trebuchet MS"/>
                 </a:rPr>
-                <a:t>Motivation &amp; Problem</a:t>
+                <a:t>Context &amp; Motivation</a:t>
               </a:r>
               <a:endParaRPr sz="1339" dirty="0"/>
             </a:p>
@@ -14633,115 +14615,148 @@
           </a:bodyPr>
           <a:lstStyle/>
           <a:p>
-            <a:pPr marL="285750" indent="-285750">
-              <a:buSzPts val="2900"/>
+            <a:pPr marL="342900" indent="-342900">
+              <a:buFont typeface="Arial"/>
               <a:buChar char="•"/>
             </a:pPr>
             <a:r>
-              <a:rPr lang="en-US" sz="2700" dirty="0">
+              <a:rPr lang="en-US" sz="2400" dirty="0">
                 <a:solidFill>
                   <a:schemeClr val="dk1"/>
                 </a:solidFill>
-                <a:latin typeface="Times"/>
-                <a:ea typeface="Times"/>
-                <a:cs typeface="Times"/>
-                <a:sym typeface="Times"/>
+                <a:latin typeface="Arial"/>
               </a:rPr>
-              <a:t>Directed graph G=(V,E). Nodes are (exchange, stablecoin); edges are intra-exchange trades and cross-exchange transfers (same coin).</a:t>
+              <a:t>GRAPH MODEL — Nodes are (exchange, stablecoin) pairs. Intra-exchange edges are trades; inter-exchange edges are same-coin transfers.</a:t>
             </a:r>
           </a:p>
           <a:p>
-            <a:pPr marL="285750" indent="-285750">
-              <a:buSzPts val="2900"/>
+            <a:pPr marL="342900" indent="-342900">
+              <a:buFont typeface="Arial"/>
               <a:buChar char="•"/>
             </a:pPr>
             <a:r>
-              <a:rPr lang="en-US" sz="2700" dirty="0">
+              <a:rPr lang="en-US" sz="2400" dirty="0">
                 <a:solidFill>
                   <a:schemeClr val="dk1"/>
                 </a:solidFill>
-                <a:latin typeface="Times"/>
-                <a:ea typeface="Times"/>
-                <a:cs typeface="Times"/>
-                <a:sym typeface="Times"/>
+                <a:latin typeface="Arial"/>
               </a:rPr>
-              <a:t>Edge weight w(e) = -log r(e). Effective rate r(e) bundles taker fees, withdrawal/gas fees, transfer time, and exchange-reliability risk.</a:t>
+              <a:t>EDGE WEIGHT — w(e) = -log r(e). Effective rate r(e) bundles taker fees, withdrawal/gas fees, chain-transfer time, and venue-reliability discount.</a:t>
             </a:r>
           </a:p>
           <a:p>
-            <a:pPr marL="285750" indent="-285750">
-              <a:buSzPts val="2900"/>
+            <a:pPr marL="342900" indent="-342900">
+              <a:buFont typeface="Arial"/>
               <a:buChar char="•"/>
             </a:pPr>
             <a:r>
-              <a:rPr lang="en-US" sz="2700" dirty="0">
+              <a:rPr lang="en-US" sz="2400" dirty="0">
                 <a:solidFill>
                   <a:schemeClr val="dk1"/>
                 </a:solidFill>
-                <a:latin typeface="Times"/>
-                <a:ea typeface="Times"/>
-                <a:cs typeface="Times"/>
-                <a:sym typeface="Times"/>
+                <a:latin typeface="Arial"/>
               </a:rPr>
-              <a:t>Open-path goal: any node where final USD value &gt; start. No closed cycle required (USD-pegged stablecoins).</a:t>
+              <a:t>GOAL — Any node where USD value exceeds the start amount (no closed cycle needed; stablecoins are USD-pegged).</a:t>
             </a:r>
           </a:p>
           <a:p>
-            <a:pPr marL="285750" indent="-285750">
-              <a:buSzPts val="2900"/>
+            <a:pPr marL="342900" indent="-342900">
+              <a:buFont typeface="Arial"/>
               <a:buChar char="•"/>
             </a:pPr>
             <a:r>
-              <a:rPr lang="en-US" sz="2700" dirty="0">
+              <a:rPr lang="en-US" sz="2400" dirty="0">
                 <a:solidFill>
                   <a:schemeClr val="dk1"/>
                 </a:solidFill>
-                <a:latin typeface="Times"/>
-                <a:ea typeface="Times"/>
-                <a:cs typeface="Times"/>
-                <a:sym typeface="Times"/>
+                <a:latin typeface="Arial"/>
               </a:rPr>
-              <a:t>A* search with f(n) = g(n) + h(n). h is a domain guidance penalty, not an admissible lower bound.</a:t>
+              <a:t>SEARCH — A* with f(n) = g(n) + h(n). Each heuristic is a domain-specific guidance penalty (not an admissible lower bound).</a:t>
             </a:r>
           </a:p>
           <a:p>
             <a:pPr>
               <a:buNone/>
             </a:pPr>
-            <a:endParaRPr sz="1200"/>
+            <a:endParaRPr sz="1000"/>
           </a:p>
           <a:p>
             <a:pPr>
               <a:buNone/>
             </a:pPr>
             <a:r>
-              <a:rPr lang="en-US" sz="2400" b="1" dirty="0">
+              <a:rPr lang="en-US" sz="2600" b="1" dirty="0">
+                <a:solidFill>
+                  <a:srgbClr val="CC0633"/>
+                </a:solidFill>
+                <a:latin typeface="Arial"/>
+              </a:rPr>
+              <a:t>Heuristics</a:t>
+            </a:r>
+          </a:p>
+          <a:p>
+            <a:pPr marL="342900" indent="-342900">
+              <a:buFont typeface="Arial"/>
+              <a:buChar char="•"/>
+            </a:pPr>
+            <a:r>
+              <a:rPr lang="en-US" sz="2400" dirty="0">
                 <a:solidFill>
                   <a:schemeClr val="dk1"/>
                 </a:solidFill>
-                <a:latin typeface="Courier New"/>
-                <a:ea typeface="Courier New"/>
-                <a:cs typeface="Courier New"/>
-                <a:sym typeface="Courier New"/>
+                <a:latin typeface="Arial"/>
               </a:rPr>
-              <a:t>w(e) = -log r(e),    f(n) = g(n) + h(n)</a:t>
+              <a:t>h₁  (Liquidity)   Penalise shallow 24-h order books relative to order size.</a:t>
+            </a:r>
+          </a:p>
+          <a:p>
+            <a:pPr marL="342900" indent="-342900">
+              <a:buFont typeface="Arial"/>
+              <a:buChar char="•"/>
+            </a:pPr>
+            <a:r>
+              <a:rPr lang="en-US" sz="2400" dirty="0">
+                <a:solidFill>
+                  <a:schemeClr val="dk1"/>
+                </a:solidFill>
+                <a:latin typeface="Arial"/>
+              </a:rPr>
+              <a:t>h₂  (Slippage)    ★ NOVEL: lambda × max(0, slippage_bps − θ). Prunes high-impact routes.</a:t>
+            </a:r>
+          </a:p>
+          <a:p>
+            <a:pPr marL="342900" indent="-342900">
+              <a:buFont typeface="Arial"/>
+              <a:buChar char="•"/>
+            </a:pPr>
+            <a:r>
+              <a:rPr lang="en-US" sz="2400" dirty="0">
+                <a:solidFill>
+                  <a:schemeClr val="dk1"/>
+                </a:solidFill>
+                <a:latin typeface="Arial"/>
+              </a:rPr>
+              <a:t>h₃  (Chain)       Chain congestion time + static venue-reliability penalty.</a:t>
             </a:r>
           </a:p>
           <a:p>
             <a:pPr>
               <a:buNone/>
             </a:pPr>
+            <a:endParaRPr sz="1000"/>
+          </a:p>
+          <a:p>
+            <a:pPr>
+              <a:buNone/>
+            </a:pPr>
             <a:r>
-              <a:rPr lang="en-US" sz="2400" b="1" dirty="0">
-                <a:solidFill>
-                  <a:schemeClr val="dk1"/>
-                </a:solidFill>
-                <a:latin typeface="Courier New"/>
-                <a:ea typeface="Courier New"/>
-                <a:cs typeface="Courier New"/>
-                <a:sym typeface="Courier New"/>
+              <a:rPr lang="en-US" sz="2600" b="1" dirty="0">
+                <a:solidFill>
+                  <a:srgbClr val="CC0633"/>
+                </a:solidFill>
+                <a:latin typeface="Arial"/>
               </a:rPr>
-              <a:t>h_2 = lambda_slip * max(0, slippage_bps - theta)</a:t>
+              <a:t>Key Equations</a:t>
             </a:r>
           </a:p>
           <a:p>
@@ -14749,39 +14764,61 @@
               <a:buNone/>
             </a:pPr>
             <a:r>
-              <a:rPr lang="en-US" sz="2400" b="1" dirty="0">
+              <a:rPr lang="en-US" sz="2100" b="1" dirty="0">
                 <a:solidFill>
                   <a:schemeClr val="dk1"/>
                 </a:solidFill>
                 <a:latin typeface="Courier New"/>
-                <a:ea typeface="Courier New"/>
-                <a:cs typeface="Courier New"/>
-                <a:sym typeface="Courier New"/>
               </a:rPr>
-              <a:t>slippage_bps = (VWAP(Q) - P_mid) / P_mid * 10000</a:t>
+              <a:t>w(e) = -log r(e)       r(e) = (1-fee)(1-slippage)(1-gas)(reliability)</a:t>
             </a:r>
           </a:p>
           <a:p>
             <a:pPr>
               <a:buNone/>
             </a:pPr>
-            <a:endParaRPr sz="1200"/>
+            <a:r>
+              <a:rPr lang="en-US" sz="2100" b="1" dirty="0">
+                <a:solidFill>
+                  <a:schemeClr val="dk1"/>
+                </a:solidFill>
+                <a:latin typeface="Courier New"/>
+              </a:rPr>
+              <a:t>f(n) = g(n) + h(n)     h₂ = λ⋅max(0, slippage_bps − θ)</a:t>
+            </a:r>
+          </a:p>
+          <a:p>
+            <a:pPr>
+              <a:buNone/>
+            </a:pPr>
+            <a:r>
+              <a:rPr lang="en-US" sz="2100" b="1" dirty="0">
+                <a:solidFill>
+                  <a:schemeClr val="dk1"/>
+                </a:solidFill>
+                <a:latin typeface="Courier New"/>
+              </a:rPr>
+              <a:t>slippage_bps = (VWAP(Q) - P_mid) / P_mid × 10⁴</a:t>
+            </a:r>
+          </a:p>
+          <a:p>
+            <a:pPr>
+              <a:buNone/>
+            </a:pPr>
+            <a:endParaRPr sz="1000"/>
           </a:p>
           <a:p>
             <a:pPr algn="ctr">
               <a:buNone/>
             </a:pPr>
             <a:r>
-              <a:rPr lang="en-US" sz="2400" b="1" i="1" dirty="0">
+              <a:rPr lang="en-US" sz="2400" i="1" dirty="0">
                 <a:solidFill>
                   <a:srgbClr val="0070C0"/>
                 </a:solidFill>
-                <a:latin typeface="Times"/>
-                <a:ea typeface="Times"/>
-                <a:cs typeface="Times"/>
-                <a:sym typeface="Times"/>
+                <a:latin typeface="Arial"/>
               </a:rPr>
-              <a:t>Slippage-aware guidance prunes high-impact routes early, keeps low-impact ones intact: same profit as Dijkstra with 29% fewer expansions.</a:t>
+              <a:t>Slippage-aware h₂ prunes high-cost routes early, preserving low-cost ones: same profit as Dijkstra with 29% fewer node expansions.</a:t>
             </a:r>
           </a:p>
           <a:p>
@@ -15321,7 +15358,7 @@
             <a:r>
               <a:rPr lang="en-US" sz="3825" b="1" dirty="0">
                 <a:solidFill>
-                  <a:srgbClr val="CD3E3D"/>
+                  <a:srgbClr val="CC0633"/>
                 </a:solidFill>
                 <a:latin typeface="Trebuchet MS"/>
                 <a:ea typeface="Trebuchet MS"/>
@@ -15373,111 +15410,98 @@
             </a:bodyPr>
             <a:lstStyle/>
             <a:p>
-              <a:pPr marL="285750" indent="-285750">
-                <a:buSzPts val="2900"/>
+              <a:pPr>
+                <a:buNone/>
+              </a:pPr>
+              <a:r>
+                <a:rPr lang="en-US" sz="2400" b="1" dirty="0">
+                  <a:solidFill>
+                    <a:srgbClr val="CC0633"/>
+                  </a:solidFill>
+                  <a:latin typeface="Arial"/>
+                </a:rPr>
+                <a:t>The shift from OPPORTUNITY DETECTION to EXECUTION FEASIBILITY:</a:t>
+              </a:r>
+            </a:p>
+            <a:p>
+              <a:pPr>
+                <a:buNone/>
+              </a:pPr>
+              <a:endParaRPr sz="1000"/>
+            </a:p>
+            <a:p>
+              <a:pPr marL="342900" indent="-342900">
+                <a:buFont typeface="Arial"/>
                 <a:buChar char="•"/>
               </a:pPr>
               <a:r>
-                <a:rPr lang="en-US" sz="2700" dirty="0">
+                <a:rPr lang="en-US" sz="2400" dirty="0">
                   <a:solidFill>
                     <a:schemeClr val="dk1"/>
                   </a:solidFill>
-                  <a:latin typeface="Times"/>
-                  <a:ea typeface="Times"/>
-                  <a:cs typeface="Times"/>
-                  <a:sym typeface="Times"/>
+                  <a:latin typeface="Arial"/>
                 </a:rPr>
-                <a:t>Three guidance heuristics, each capturing a distinct execution risk dimension.</a:t>
+                <a:t>① LIQUIDITY — Order-book depth is insufficient for full fills at the quoted price; partial fills reduce effective profit.</a:t>
               </a:r>
             </a:p>
             <a:p>
-              <a:pPr marL="285750" indent="-285750">
-                <a:buSzPts val="2900"/>
+              <a:pPr marL="342900" indent="-342900">
+                <a:buFont typeface="Arial"/>
                 <a:buChar char="•"/>
               </a:pPr>
               <a:r>
-                <a:rPr lang="en-US" sz="2700" dirty="0">
+                <a:rPr lang="en-US" sz="2400" dirty="0">
                   <a:solidFill>
                     <a:schemeClr val="dk1"/>
                   </a:solidFill>
-                  <a:latin typeface="Times"/>
-                  <a:ea typeface="Times"/>
-                  <a:cs typeface="Times"/>
-                  <a:sym typeface="Times"/>
+                  <a:latin typeface="Arial"/>
                 </a:rPr>
-                <a:t>h_1 (liquidity): penalize shallow books from 24h volume, order size, and remaining time window.</a:t>
+                <a:t>② SLIPPAGE — Large orders shift the VWAP above the mid-price; the effective rate r(e) captures this via slippage_bps.</a:t>
               </a:r>
             </a:p>
             <a:p>
-              <a:pPr marL="285750" indent="-285750">
-                <a:buSzPts val="2900"/>
+              <a:pPr marL="342900" indent="-342900">
+                <a:buFont typeface="Arial"/>
                 <a:buChar char="•"/>
               </a:pPr>
               <a:r>
-                <a:rPr lang="en-US" sz="2700" dirty="0">
+                <a:rPr lang="en-US" sz="2400" dirty="0">
                   <a:solidFill>
                     <a:schemeClr val="dk1"/>
                   </a:solidFill>
-                  <a:latin typeface="Times"/>
-                  <a:ea typeface="Times"/>
-                  <a:cs typeface="Times"/>
-                  <a:sym typeface="Times"/>
+                  <a:latin typeface="Arial"/>
                 </a:rPr>
-                <a:t>h_3 (chain congestion + reliability): chain transfer time plus a static venue reliability score.</a:t>
+                <a:t>③ LATENCY — Blockchain transfers take minutes to hours; market prices move against the open leg while funds are in transit.</a:t>
               </a:r>
             </a:p>
             <a:p>
-              <a:pPr marL="285750" indent="-285750">
-                <a:buSzPts val="2900"/>
+              <a:pPr marL="342900" indent="-342900">
+                <a:buFont typeface="Arial"/>
                 <a:buChar char="•"/>
               </a:pPr>
               <a:r>
-                <a:rPr lang="en-US" sz="2700" dirty="0">
+                <a:rPr lang="en-US" sz="2400" dirty="0">
                   <a:solidFill>
                     <a:schemeClr val="dk1"/>
                   </a:solidFill>
-                  <a:latin typeface="Times"/>
-                  <a:ea typeface="Times"/>
-                  <a:cs typeface="Times"/>
-                  <a:sym typeface="Times"/>
+                  <a:latin typeface="Arial"/>
                 </a:rPr>
-                <a:t>Parallel multi-start (k=3): random A* launches; trades robustness for repeated cost.</a:t>
+                <a:t>④ RELIABILITY — Exchange downtime, withdrawal halts, and API failures derail planned routes mid-execution.</a:t>
               </a:r>
             </a:p>
             <a:p>
-              <a:pPr marL="285750" indent="-285750">
-                <a:buSzPts val="2900"/>
+              <a:pPr marL="342900" indent="-342900">
+                <a:buFont typeface="Arial"/>
                 <a:buChar char="•"/>
               </a:pPr>
               <a:r>
-                <a:rPr lang="en-US" sz="2700" dirty="0">
+                <a:rPr lang="en-US" sz="2400" dirty="0">
                   <a:solidFill>
                     <a:schemeClr val="dk1"/>
                   </a:solidFill>
-                  <a:latin typeface="Times"/>
-                  <a:ea typeface="Times"/>
-                  <a:cs typeface="Times"/>
-                  <a:sym typeface="Times"/>
+                  <a:latin typeface="Arial"/>
                 </a:rPr>
-                <a:t>Baselines: Dijkstra (h=0), Bellman-Ford negative-cycle, 1-hop, and 2-hop enumeration.</a:t>
-              </a:r>
-            </a:p>
-            <a:p>
-              <a:pPr marL="285750" indent="-285750">
-                <a:buSzPts val="2900"/>
-                <a:buChar char="•"/>
-              </a:pPr>
-              <a:r>
-                <a:rPr lang="en-US" sz="2700" dirty="0">
-                  <a:solidFill>
-                    <a:schemeClr val="dk1"/>
-                  </a:solidFill>
-                  <a:latin typeface="Times"/>
-                  <a:ea typeface="Times"/>
-                  <a:cs typeface="Times"/>
-                  <a:sym typeface="Times"/>
-                </a:rPr>
-                <a:t>All heuristics act as guidance penalties, not admissible lower bounds.</a:t>
+                <a:t>Together these four factors mean that opportunity-detection methods overstate real profit — sometimes by more than 40%.</a:t>
               </a:r>
             </a:p>
             <a:p>
@@ -15667,14 +15691,14 @@
               <a:r>
                 <a:rPr lang="en-US" sz="3825" b="1">
                   <a:solidFill>
-                    <a:srgbClr val="CD3E3D"/>
+                    <a:srgbClr val="CC0633"/>
                   </a:solidFill>
                   <a:latin typeface="Trebuchet MS"/>
                   <a:ea typeface="Trebuchet MS"/>
                   <a:cs typeface="Trebuchet MS"/>
                   <a:sym typeface="Trebuchet MS"/>
                 </a:rPr>
-                <a:t>Heuristics &amp; Baselines</a:t>
+                <a:t>Four Execution Challenges</a:t>
               </a:r>
               <a:endParaRPr sz="1339"/>
             </a:p>
@@ -15720,111 +15744,172 @@
             </a:bodyPr>
             <a:lstStyle/>
             <a:p>
-              <a:pPr marL="285750" indent="-285750">
-                <a:buSzPts val="2900"/>
+              <a:pPr algn="ctr">
+                <a:buNone/>
+              </a:pPr>
+              <a:r>
+                <a:rPr lang="en-US" sz="3200" b="1" dirty="0">
+                  <a:solidFill>
+                    <a:srgbClr val="CC0633"/>
+                  </a:solidFill>
+                  <a:latin typeface="Arial"/>
+                </a:rPr>
+                <a:t>★  h₂ reduces node expansions by 29% while matching Dijkstra's profit  ★</a:t>
+              </a:r>
+            </a:p>
+            <a:p>
+              <a:pPr>
+                <a:buNone/>
+              </a:pPr>
+              <a:endParaRPr sz="1000"/>
+            </a:p>
+            <a:p>
+              <a:pPr marL="342900" indent="-342900">
+                <a:buFont typeface="Arial"/>
                 <a:buChar char="•"/>
               </a:pPr>
               <a:r>
-                <a:rPr lang="en-US" sz="2700" dirty="0">
+                <a:rPr lang="en-US" sz="2400" dirty="0">
                   <a:solidFill>
                     <a:schemeClr val="dk1"/>
                   </a:solidFill>
-                  <a:latin typeface="Times"/>
-                  <a:ea typeface="Times"/>
-                  <a:cs typeface="Times"/>
-                  <a:sym typeface="Times"/>
+                  <a:latin typeface="Arial"/>
                 </a:rPr>
-                <a:t>12 CEX via CCXT: Binance, Kraken, KuCoin, Bybit, OKX, Gate.io, Bitget, MEXC, HTX, Coinbase, Crypto.com, Phemex.</a:t>
+                <a:t>Every A*-based run across 7,200 overnight instances finds a profitable path.</a:t>
               </a:r>
             </a:p>
             <a:p>
-              <a:pPr marL="285750" indent="-285750">
-                <a:buSzPts val="2900"/>
+              <a:pPr marL="342900" indent="-342900">
+                <a:buFont typeface="Arial"/>
                 <a:buChar char="•"/>
               </a:pPr>
               <a:r>
-                <a:rPr lang="en-US" sz="2700" dirty="0">
+                <a:rPr lang="en-US" sz="2400" dirty="0">
                   <a:solidFill>
                     <a:schemeClr val="dk1"/>
                   </a:solidFill>
-                  <a:latin typeface="Times"/>
-                  <a:ea typeface="Times"/>
-                  <a:cs typeface="Times"/>
-                  <a:sym typeface="Times"/>
+                  <a:latin typeface="Arial"/>
                 </a:rPr>
-                <a:t>9 stablecoin symbols across the venues (USDT, USDC, DAI, TUSD, FDUSD, BUSD, PYUSD, USDP, GUSD).</a:t>
+                <a:t>Quote staleness: 99.6% of paths remain profitable up to 120 s of delay.</a:t>
               </a:r>
             </a:p>
             <a:p>
-              <a:pPr marL="285750" indent="-285750">
-                <a:buSzPts val="2900"/>
+              <a:pPr marL="342900" indent="-342900">
+                <a:buFont typeface="Arial"/>
                 <a:buChar char="•"/>
               </a:pPr>
               <a:r>
-                <a:rPr lang="en-US" sz="2700" dirty="0">
+                <a:rPr lang="en-US" sz="2400" dirty="0">
                   <a:solidFill>
                     <a:schemeClr val="dk1"/>
                   </a:solidFill>
-                  <a:latin typeface="Times"/>
-                  <a:ea typeface="Times"/>
-                  <a:cs typeface="Times"/>
-                  <a:sym typeface="Times"/>
+                  <a:latin typeface="Arial"/>
                 </a:rPr>
-                <a:t>Nodes = (exchange, coin); edges = intra-exchange trades and same-coin cross-exchange transfers.</a:t>
+                <a:t>h₁ and h₃ expand 58-87% MORE nodes and earn 30-33% LESS profit: aggressive penalties over-steer search.</a:t>
               </a:r>
             </a:p>
             <a:p>
-              <a:pPr marL="285750" indent="-285750">
-                <a:buSzPts val="2900"/>
-                <a:buChar char="•"/>
+              <a:pPr>
+                <a:buNone/>
+              </a:pPr>
+              <a:endParaRPr sz="1000"/>
+            </a:p>
+            <a:p>
+              <a:pPr>
+                <a:buNone/>
               </a:pPr>
               <a:r>
-                <a:rPr lang="en-US" sz="2700" dirty="0">
+                <a:rPr lang="en-US" sz="2000" b="1" dirty="0">
                   <a:solidFill>
                     <a:schemeClr val="dk1"/>
                   </a:solidFill>
-                  <a:latin typeface="Times"/>
-                  <a:ea typeface="Times"/>
-                  <a:cs typeface="Times"/>
-                  <a:sym typeface="Times"/>
+                  <a:latin typeface="Courier New"/>
                 </a:rPr>
-                <a:t>Graphs grow from 4 to 12 exchanges; cached snapshots up to 41 nodes / 864 edges.</a:t>
+                <a:t>Heuristic    Profit    Expansions  ΔExp</a:t>
               </a:r>
             </a:p>
             <a:p>
-              <a:pPr marL="285750" indent="-285750">
-                <a:buSzPts val="2900"/>
-                <a:buChar char="•"/>
+              <a:pPr>
+                <a:buNone/>
               </a:pPr>
               <a:r>
-                <a:rPr lang="en-US" sz="2700" dirty="0">
+                <a:rPr lang="en-US" sz="2000" dirty="0">
                   <a:solidFill>
                     <a:schemeClr val="dk1"/>
                   </a:solidFill>
-                  <a:latin typeface="Times"/>
-                  <a:ea typeface="Times"/>
-                  <a:cs typeface="Times"/>
-                  <a:sym typeface="Times"/>
+                  <a:latin typeface="Courier New"/>
                 </a:rPr>
-                <a:t>8-hour overnight campaign with 7,200 search instances across heuristics and order sizes.</a:t>
+                <a:t>──────────────────────────────────────────────</a:t>
               </a:r>
             </a:p>
             <a:p>
-              <a:pPr marL="285750" indent="-285750">
-                <a:buSzPts val="2900"/>
-                <a:buChar char="•"/>
+              <a:pPr>
+                <a:buNone/>
               </a:pPr>
               <a:r>
-                <a:rPr lang="en-US" sz="2700" dirty="0">
+                <a:rPr lang="en-US" sz="2000" dirty="0">
                   <a:solidFill>
                     <a:schemeClr val="dk1"/>
                   </a:solidFill>
-                  <a:latin typeface="Times"/>
-                  <a:ea typeface="Times"/>
-                  <a:cs typeface="Times"/>
-                  <a:sym typeface="Times"/>
+                  <a:latin typeface="Courier New"/>
                 </a:rPr>
-                <a:t>Edge weights w(e) = -log(effective_rate(e)) absorb fees, slippage, gas, and chain delay.</a:t>
+                <a:t>Dijkstra     $10.01    359         ---</a:t>
+              </a:r>
+            </a:p>
+            <a:p>
+              <a:pPr>
+                <a:buNone/>
+              </a:pPr>
+              <a:r>
+                <a:rPr lang="en-US" sz="2000" dirty="0">
+                  <a:solidFill>
+                    <a:schemeClr val="dk1"/>
+                  </a:solidFill>
+                  <a:latin typeface="Courier New"/>
+                </a:rPr>
+                <a:t>h₂ (Slippage) $9.91  256         -29%  ★</a:t>
+              </a:r>
+            </a:p>
+            <a:p>
+              <a:pPr>
+                <a:buNone/>
+              </a:pPr>
+              <a:r>
+                <a:rPr lang="en-US" sz="2000" dirty="0">
+                  <a:solidFill>
+                    <a:schemeClr val="dk1"/>
+                  </a:solidFill>
+                  <a:latin typeface="Courier New"/>
+                </a:rPr>
+                <a:t>h₁ (Liq.)    $6.72    568        +58%</a:t>
+              </a:r>
+            </a:p>
+            <a:p>
+              <a:pPr>
+                <a:buNone/>
+              </a:pPr>
+              <a:r>
+                <a:rPr lang="en-US" sz="2000" dirty="0">
+                  <a:solidFill>
+                    <a:schemeClr val="dk1"/>
+                  </a:solidFill>
+                  <a:latin typeface="Courier New"/>
+                </a:rPr>
+                <a:t>h₃ (Chain)   $7.06    673        +87%</a:t>
+              </a:r>
+            </a:p>
+            <a:p>
+              <a:pPr>
+                <a:buNone/>
+              </a:pPr>
+              <a:r>
+                <a:rPr lang="en-US" sz="2000" dirty="0">
+                  <a:solidFill>
+                    <a:schemeClr val="dk1"/>
+                  </a:solidFill>
+                  <a:latin typeface="Courier New"/>
+                </a:rPr>
+                <a:t>Multi-start  $9.88    3×359       ---</a:t>
               </a:r>
             </a:p>
             <a:p>
@@ -16014,14 +16099,14 @@
               <a:r>
                 <a:rPr lang="en-US" sz="3825" b="1" dirty="0">
                   <a:solidFill>
-                    <a:srgbClr val="CD3E3D"/>
+                    <a:srgbClr val="CC0633"/>
                   </a:solidFill>
                   <a:latin typeface="Trebuchet MS"/>
                   <a:ea typeface="Trebuchet MS"/>
                   <a:cs typeface="Trebuchet MS"/>
                   <a:sym typeface="Trebuchet MS"/>
                 </a:rPr>
-                <a:t>Setup &amp; Dataset</a:t>
+                <a:t>Results &amp; Impact</a:t>
               </a:r>
               <a:endParaRPr sz="1339" dirty="0"/>
             </a:p>
@@ -16067,184 +16152,78 @@
             </a:bodyPr>
             <a:lstStyle/>
             <a:p>
-              <a:pPr marL="285750" indent="-285750">
-                <a:buSzPts val="2900"/>
+              <a:pPr marL="342900" indent="-342900">
+                <a:buFont typeface="Arial"/>
                 <a:buChar char="•"/>
               </a:pPr>
               <a:r>
-                <a:rPr lang="en-US" sz="2700" dirty="0">
+                <a:rPr lang="en-US" sz="2400" dirty="0">
                   <a:solidFill>
                     <a:schemeClr val="dk1"/>
                   </a:solidFill>
-                  <a:latin typeface="Times"/>
-                  <a:ea typeface="Times"/>
-                  <a:cs typeface="Times"/>
-                  <a:sym typeface="Times"/>
+                  <a:latin typeface="Arial"/>
                 </a:rPr>
-                <a:t>h_2 expands 29% fewer nodes than Dijkstra while matching profit within 1% (cached, $10k).</a:t>
+                <a:t>Graph scaling (4 → 12 exchanges): h₂ maintains its expansion advantage at every graph size — the gap widens as the graph grows.</a:t>
               </a:r>
             </a:p>
             <a:p>
-              <a:pPr marL="285750" indent="-285750">
-                <a:buSzPts val="2900"/>
+              <a:pPr marL="342900" indent="-342900">
+                <a:buFont typeface="Arial"/>
                 <a:buChar char="•"/>
               </a:pPr>
               <a:r>
-                <a:rPr lang="en-US" sz="2700" dirty="0">
+                <a:rPr lang="en-US" sz="2400" dirty="0">
                   <a:solidFill>
                     <a:schemeClr val="dk1"/>
                   </a:solidFill>
-                  <a:latin typeface="Times"/>
-                  <a:ea typeface="Times"/>
-                  <a:cs typeface="Times"/>
-                  <a:sym typeface="Times"/>
+                  <a:latin typeface="Arial"/>
                 </a:rPr>
-                <a:t>h_1 and h_3 expand 58-87% MORE nodes and earn 30-33% LESS profit: penalties over-steer search.</a:t>
+                <a:t>h₂ is robust to order-size variation ($1k – $100k): slippage penalty keeps the search focused on liquid, low-impact paths.</a:t>
               </a:r>
             </a:p>
             <a:p>
-              <a:pPr marL="285750" indent="-285750">
-                <a:buSzPts val="2900"/>
+              <a:pPr marL="342900" indent="-342900">
+                <a:buFont typeface="Arial"/>
                 <a:buChar char="•"/>
               </a:pPr>
               <a:r>
-                <a:rPr lang="en-US" sz="2700" dirty="0">
+                <a:rPr lang="en-US" sz="2400" dirty="0">
                   <a:solidFill>
                     <a:schemeClr val="dk1"/>
                   </a:solidFill>
-                  <a:latin typeface="Times"/>
-                  <a:ea typeface="Times"/>
-                  <a:cs typeface="Times"/>
-                  <a:sym typeface="Times"/>
+                  <a:latin typeface="Arial"/>
                 </a:rPr>
-                <a:t>Overnight (7,200 runs): every A*-based run finds a profitable path.</a:t>
+                <a:t>Overnight robustness: profit stays consistent across all 7,200 runs with minimal variance — the A* framework is stable in live conditions.</a:t>
               </a:r>
             </a:p>
             <a:p>
-              <a:pPr marL="285750" indent="-285750">
-                <a:buSzPts val="2900"/>
+              <a:pPr marL="342900" indent="-342900">
+                <a:buFont typeface="Arial"/>
                 <a:buChar char="•"/>
               </a:pPr>
               <a:r>
-                <a:rPr lang="en-US" sz="2700" dirty="0">
+                <a:rPr lang="en-US" sz="2400" dirty="0">
                   <a:solidFill>
                     <a:schemeClr val="dk1"/>
                   </a:solidFill>
-                  <a:latin typeface="Times"/>
-                  <a:ea typeface="Times"/>
-                  <a:cs typeface="Times"/>
-                  <a:sym typeface="Times"/>
+                  <a:latin typeface="Arial"/>
                 </a:rPr>
-                <a:t>Quote staleness: 99.6% of paths remain profitable up to 120 s of delay.</a:t>
+                <a:t>FUTURE WORK: asynchronous order-book pre-fetching to reduce staleness; extension to DEX/AMM markets (Uniswap, Curve) with continuous pricing functions.</a:t>
               </a:r>
             </a:p>
             <a:p>
-              <a:pPr marL="285750" indent="-285750">
-                <a:buSzPts val="2900"/>
+              <a:pPr marL="342900" indent="-342900">
+                <a:buFont typeface="Arial"/>
                 <a:buChar char="•"/>
               </a:pPr>
               <a:r>
-                <a:rPr lang="en-US" sz="2700" dirty="0">
+                <a:rPr lang="en-US" sz="2400" dirty="0">
                   <a:solidFill>
                     <a:schemeClr val="dk1"/>
                   </a:solidFill>
-                  <a:latin typeface="Times"/>
-                  <a:ea typeface="Times"/>
-                  <a:cs typeface="Times"/>
-                  <a:sym typeface="Times"/>
+                  <a:latin typeface="Arial"/>
                 </a:rPr>
-                <a:t>Slippage-aware guidance follows the same optimal routes with less wasted exploration.</a:t>
-              </a:r>
-            </a:p>
-            <a:p>
-              <a:pPr>
-                <a:buNone/>
-              </a:pPr>
-              <a:endParaRPr sz="1200"/>
-            </a:p>
-            <a:p>
-              <a:pPr>
-                <a:buNone/>
-              </a:pPr>
-              <a:r>
-                <a:rPr lang="en-US" sz="2200" b="1" dirty="0">
-                  <a:solidFill>
-                    <a:schemeClr val="dk1"/>
-                  </a:solidFill>
-                  <a:latin typeface="Courier New"/>
-                  <a:ea typeface="Courier New"/>
-                  <a:cs typeface="Courier New"/>
-                  <a:sym typeface="Courier New"/>
-                </a:rPr>
-                <a:t>Heuristic     Succ.   Profit    Exp.    Δ</a:t>
-              </a:r>
-            </a:p>
-            <a:p>
-              <a:pPr>
-                <a:buNone/>
-              </a:pPr>
-              <a:r>
-                <a:rPr lang="en-US" sz="2200" dirty="0">
-                  <a:solidFill>
-                    <a:schemeClr val="dk1"/>
-                  </a:solidFill>
-                  <a:latin typeface="Courier New"/>
-                  <a:ea typeface="Courier New"/>
-                  <a:cs typeface="Courier New"/>
-                  <a:sym typeface="Courier New"/>
-                </a:rPr>
-                <a:t>Dijkstra      56.7%   $10.01    359     ---</a:t>
-              </a:r>
-            </a:p>
-            <a:p>
-              <a:pPr>
-                <a:buNone/>
-              </a:pPr>
-              <a:r>
-                <a:rPr lang="en-US" sz="2200" dirty="0">
-                  <a:solidFill>
-                    <a:schemeClr val="dk1"/>
-                  </a:solidFill>
-                  <a:latin typeface="Courier New"/>
-                  <a:ea typeface="Courier New"/>
-                  <a:cs typeface="Courier New"/>
-                  <a:sym typeface="Courier New"/>
-                </a:rPr>
-                <a:t>h_2 (slip.)   56.7%   $9.91     256     -29%</a:t>
-              </a:r>
-            </a:p>
-            <a:p>
-              <a:pPr>
-                <a:buNone/>
-              </a:pPr>
-              <a:r>
-                <a:rPr lang="en-US" sz="2200" dirty="0">
-                  <a:solidFill>
-                    <a:schemeClr val="dk1"/>
-                  </a:solidFill>
-                  <a:latin typeface="Courier New"/>
-                  <a:ea typeface="Courier New"/>
-                  <a:cs typeface="Courier New"/>
-                  <a:sym typeface="Courier New"/>
-                </a:rPr>
-                <a:t>h_1 (liq.)    56.7%   $6.72     568     +58%</a:t>
-              </a:r>
-            </a:p>
-            <a:p>
-              <a:pPr>
-                <a:buNone/>
-              </a:pPr>
-              <a:r>
-                <a:rPr lang="en-US" sz="2200" dirty="0">
-                  <a:solidFill>
-                    <a:schemeClr val="dk1"/>
-                  </a:solidFill>
-                  <a:latin typeface="Courier New"/>
-                  <a:ea typeface="Courier New"/>
-                  <a:cs typeface="Courier New"/>
-                  <a:sym typeface="Courier New"/>
-                </a:rPr>
-                <a:t>h_3 (chain)   56.7%   $7.06     673     +87%</a:t>
+                <a:t>FUTURE WORK: reinforcement-learning route selection and multi-currency baskets beyond stablecoins.</a:t>
               </a:r>
             </a:p>
             <a:p>
@@ -16434,14 +16413,14 @@
               <a:r>
                 <a:rPr lang="en-US" sz="3825" b="1" dirty="0">
                   <a:solidFill>
-                    <a:srgbClr val="CD3E3D"/>
+                    <a:srgbClr val="CC0633"/>
                   </a:solidFill>
                   <a:latin typeface="Trebuchet MS"/>
                   <a:ea typeface="Trebuchet MS"/>
                   <a:cs typeface="Trebuchet MS"/>
                   <a:sym typeface="Trebuchet MS"/>
                 </a:rPr>
-                <a:t>Results &amp; Robustness</a:t>
+                <a:t>Scaling &amp; Future Work</a:t>
               </a:r>
               <a:endParaRPr sz="1339" dirty="0"/>
             </a:p>
@@ -16479,7 +16458,7 @@
             <a:r>
               <a:rPr lang="en-US" sz="3825" dirty="0">
                 <a:solidFill>
-                  <a:srgbClr val="CD3E3D"/>
+                  <a:srgbClr val="CC0633"/>
                 </a:solidFill>
                 <a:latin typeface="Times"/>
                 <a:ea typeface="Times"/>
@@ -16491,7 +16470,7 @@
             <a:br>
               <a:rPr lang="en-US" sz="3825" dirty="0">
                 <a:solidFill>
-                  <a:srgbClr val="CD3E3D"/>
+                  <a:srgbClr val="CC0633"/>
                 </a:solidFill>
                 <a:latin typeface="Times"/>
                 <a:ea typeface="Times"/>
@@ -16502,18 +16481,18 @@
             <a:r>
               <a:rPr lang="en-US" sz="3825" dirty="0">
                 <a:solidFill>
-                  <a:srgbClr val="CD3E3D"/>
+                  <a:srgbClr val="CC0633"/>
                 </a:solidFill>
                 <a:latin typeface="Times"/>
                 <a:ea typeface="Times"/>
                 <a:cs typeface="Times"/>
                 <a:sym typeface="Times"/>
               </a:rPr>
-              <a:t>Canadian AI 2026  |  GSS Paper ID 306  |  36 x 24 in</a:t>
+              <a:t>Canadian AI 2026  |  GSS Paper  |  Poster: 36 × 24 in</a:t>
             </a:r>
             <a:endParaRPr sz="1148" dirty="0">
               <a:solidFill>
-                <a:srgbClr val="CD3E3D"/>
+                <a:srgbClr val="CC0633"/>
               </a:solidFill>
             </a:endParaRPr>
           </a:p>
@@ -16587,14 +16566,14 @@
       </p:pic>
       <p:sp>
         <p:nvSpPr>
-          <p:cNvPr id="200" name="Caption 200"/>
+          <p:cNvPr id="300" name="Caption300"/>
           <p:cNvSpPr txBox="1"/>
           <p:nvPr/>
         </p:nvSpPr>
         <p:spPr>
           <a:xfrm>
-            <a:off x="1400000" y="7140000"/>
-            <a:ext cx="8900000" cy="360000"/>
+            <a:off x="11350000" y="18840000"/>
+            <a:ext cx="9500000" cy="380000"/>
           </a:xfrm>
           <a:prstGeom prst="rect">
             <a:avLst/>
@@ -16605,32 +16584,27 @@
           </a:ln>
         </p:spPr>
         <p:txBody>
-          <a:bodyPr wrap="square" anchor="ctr" anchorCtr="0">
-            <a:noAutofit/>
-          </a:bodyPr>
+          <a:bodyPr wrap="square" anchor="ctr"/>
           <a:lstStyle/>
           <a:p>
             <a:pPr algn="ctr">
               <a:buNone/>
             </a:pPr>
             <a:r>
-              <a:rPr lang="en-US" sz="1900" i="1" dirty="0">
+              <a:rPr lang="en-US" sz="1700" i="1" dirty="0">
                 <a:solidFill>
                   <a:srgbClr val="555555"/>
                 </a:solidFill>
-                <a:latin typeface="Times"/>
-                <a:ea typeface="Times"/>
-                <a:cs typeface="Times"/>
-                <a:sym typeface="Times"/>
+                <a:latin typeface="Arial"/>
               </a:rPr>
-              <a:t>Success rate by heuristic</a:t>
+              <a:t>Fig. 1b — Discovered profitable path: Kraken → KuCoin → KuCoin</a:t>
             </a:r>
           </a:p>
         </p:txBody>
       </p:sp>
       <p:pic>
         <p:nvPicPr>
-          <p:cNvPr id="201" name="fig04_success_rate"/>
+          <p:cNvPr id="301" name="CameraReadySuccesfulPathProfit"/>
           <p:cNvPicPr>
             <a:picLocks noChangeAspect="1"/>
           </p:cNvPicPr>
@@ -16644,8 +16618,8 @@
         </p:blipFill>
         <p:spPr>
           <a:xfrm>
-            <a:off x="1400000" y="7500000"/>
-            <a:ext cx="8900000" cy="2200000"/>
+            <a:off x="11350000" y="13600000"/>
+            <a:ext cx="9500000" cy="5200000"/>
           </a:xfrm>
           <a:prstGeom prst="rect">
             <a:avLst/>
@@ -16654,14 +16628,14 @@
       </p:pic>
       <p:sp>
         <p:nvSpPr>
-          <p:cNvPr id="202" name="Caption 202"/>
+          <p:cNvPr id="302" name="Caption302"/>
           <p:cNvSpPr txBox="1"/>
           <p:nvPr/>
         </p:nvSpPr>
         <p:spPr>
           <a:xfrm>
-            <a:off x="1400000" y="13940000"/>
-            <a:ext cx="8900000" cy="360000"/>
+            <a:off x="11350000" y="21640000"/>
+            <a:ext cx="9500000" cy="380000"/>
           </a:xfrm>
           <a:prstGeom prst="rect">
             <a:avLst/>
@@ -16672,32 +16646,27 @@
           </a:ln>
         </p:spPr>
         <p:txBody>
-          <a:bodyPr wrap="square" anchor="ctr" anchorCtr="0">
-            <a:noAutofit/>
-          </a:bodyPr>
+          <a:bodyPr wrap="square" anchor="ctr"/>
           <a:lstStyle/>
           <a:p>
             <a:pPr algn="ctr">
               <a:buNone/>
             </a:pPr>
             <a:r>
-              <a:rPr lang="en-US" sz="1900" i="1" dirty="0">
+              <a:rPr lang="en-US" sz="1700" i="1" dirty="0">
                 <a:solidFill>
                   <a:srgbClr val="555555"/>
                 </a:solidFill>
-                <a:latin typeface="Times"/>
-                <a:ea typeface="Times"/>
-                <a:cs typeface="Times"/>
-                <a:sym typeface="Times"/>
+                <a:latin typeface="Arial"/>
               </a:rPr>
-              <a:t>Node expansions per heuristic (cached graph)</a:t>
+              <a:t>Fig. 1a — Stablecoin arbitrage subgraph (9 of 12 exchanges)</a:t>
             </a:r>
           </a:p>
         </p:txBody>
       </p:sp>
       <p:pic>
         <p:nvPicPr>
-          <p:cNvPr id="203" name="fig01_node_expansion_bar"/>
+          <p:cNvPr id="303" name="FullGraph"/>
           <p:cNvPicPr>
             <a:picLocks noChangeAspect="1"/>
           </p:cNvPicPr>
@@ -16711,8 +16680,8 @@
         </p:blipFill>
         <p:spPr>
           <a:xfrm>
-            <a:off x="1400000" y="14300000"/>
-            <a:ext cx="8900000" cy="2200000"/>
+            <a:off x="11350000" y="19100000"/>
+            <a:ext cx="9500000" cy="2500000"/>
           </a:xfrm>
           <a:prstGeom prst="rect">
             <a:avLst/>
@@ -16721,14 +16690,14 @@
       </p:pic>
       <p:sp>
         <p:nvSpPr>
-          <p:cNvPr id="204" name="Caption 204"/>
+          <p:cNvPr id="304" name="Caption304"/>
           <p:cNvSpPr txBox="1"/>
           <p:nvPr/>
         </p:nvSpPr>
         <p:spPr>
           <a:xfrm>
-            <a:off x="22400000" y="7140000"/>
-            <a:ext cx="8900000" cy="360000"/>
+            <a:off x="22300000" y="10740000"/>
+            <a:ext cx="9400000" cy="380000"/>
           </a:xfrm>
           <a:prstGeom prst="rect">
             <a:avLst/>
@@ -16739,32 +16708,27 @@
           </a:ln>
         </p:spPr>
         <p:txBody>
-          <a:bodyPr wrap="square" anchor="ctr" anchorCtr="0">
-            <a:noAutofit/>
-          </a:bodyPr>
+          <a:bodyPr wrap="square" anchor="ctr"/>
           <a:lstStyle/>
           <a:p>
             <a:pPr algn="ctr">
               <a:buNone/>
             </a:pPr>
             <a:r>
-              <a:rPr lang="en-US" sz="1900" i="1" dirty="0">
+              <a:rPr lang="en-US" sz="1700" i="1" dirty="0">
                 <a:solidFill>
                   <a:srgbClr val="555555"/>
                 </a:solidFill>
-                <a:latin typeface="Times"/>
-                <a:ea typeface="Times"/>
-                <a:cs typeface="Times"/>
-                <a:sym typeface="Times"/>
+                <a:latin typeface="Arial"/>
               </a:rPr>
-              <a:t>Expansions vs. graph size (4-12 exchanges)</a:t>
+              <a:t>Fig. 2a — Node expansions per heuristic (cached graph, $10 k order)</a:t>
             </a:r>
           </a:p>
         </p:txBody>
       </p:sp>
       <p:pic>
         <p:nvPicPr>
-          <p:cNvPr id="205" name="fig08_graph_scaling_expansions"/>
+          <p:cNvPr id="305" name="fig01_node_expansion_bar"/>
           <p:cNvPicPr>
             <a:picLocks noChangeAspect="1"/>
           </p:cNvPicPr>
@@ -16778,8 +16742,8 @@
         </p:blipFill>
         <p:spPr>
           <a:xfrm>
-            <a:off x="22400000" y="7500000"/>
-            <a:ext cx="8900000" cy="2200000"/>
+            <a:off x="22300000" y="8400000"/>
+            <a:ext cx="9400000" cy="2300000"/>
           </a:xfrm>
           <a:prstGeom prst="rect">
             <a:avLst/>
@@ -16788,14 +16752,14 @@
       </p:pic>
       <p:sp>
         <p:nvSpPr>
-          <p:cNvPr id="206" name="Caption 206"/>
+          <p:cNvPr id="306" name="Caption306"/>
           <p:cNvSpPr txBox="1"/>
           <p:nvPr/>
         </p:nvSpPr>
         <p:spPr>
           <a:xfrm>
-            <a:off x="22400000" y="13940000"/>
-            <a:ext cx="8900000" cy="360000"/>
+            <a:off x="22300000" y="18440000"/>
+            <a:ext cx="9400000" cy="380000"/>
           </a:xfrm>
           <a:prstGeom prst="rect">
             <a:avLst/>
@@ -16806,32 +16770,27 @@
           </a:ln>
         </p:spPr>
         <p:txBody>
-          <a:bodyPr wrap="square" anchor="ctr" anchorCtr="0">
-            <a:noAutofit/>
-          </a:bodyPr>
+          <a:bodyPr wrap="square" anchor="ctr"/>
           <a:lstStyle/>
           <a:p>
             <a:pPr algn="ctr">
               <a:buNone/>
             </a:pPr>
             <a:r>
-              <a:rPr lang="en-US" sz="1900" i="1" dirty="0">
+              <a:rPr lang="en-US" sz="1700" i="1" dirty="0">
                 <a:solidFill>
                   <a:srgbClr val="555555"/>
                 </a:solidFill>
-                <a:latin typeface="Times"/>
-                <a:ea typeface="Times"/>
-                <a:cs typeface="Times"/>
-                <a:sym typeface="Times"/>
+                <a:latin typeface="Arial"/>
               </a:rPr>
-              <a:t>Overnight (7,200 runs): profit, success, expansions</a:t>
+              <a:t>Fig. 2b — Expansions vs. graph size (4 → 12 exchanges)</a:t>
             </a:r>
           </a:p>
         </p:txBody>
       </p:sp>
       <p:pic>
         <p:nvPicPr>
-          <p:cNvPr id="207" name="fig11_overnight_heuristic_comparison"/>
+          <p:cNvPr id="307" name="fig08_graph_scaling_expansions"/>
           <p:cNvPicPr>
             <a:picLocks noChangeAspect="1"/>
           </p:cNvPicPr>
@@ -16845,8 +16804,8 @@
         </p:blipFill>
         <p:spPr>
           <a:xfrm>
-            <a:off x="22400000" y="14300000"/>
-            <a:ext cx="8900000" cy="2200000"/>
+            <a:off x="22300000" y="15700000"/>
+            <a:ext cx="9400000" cy="2700000"/>
           </a:xfrm>
           <a:prstGeom prst="rect">
             <a:avLst/>
@@ -16855,14 +16814,14 @@
       </p:pic>
       <p:sp>
         <p:nvSpPr>
-          <p:cNvPr id="208" name="Caption 208"/>
+          <p:cNvPr id="308" name="Caption308"/>
           <p:cNvSpPr txBox="1"/>
           <p:nvPr/>
         </p:nvSpPr>
         <p:spPr>
           <a:xfrm>
-            <a:off x="11300000" y="13040000"/>
-            <a:ext cx="9500000" cy="360000"/>
+            <a:off x="22300000" y="21440000"/>
+            <a:ext cx="9400000" cy="380000"/>
           </a:xfrm>
           <a:prstGeom prst="rect">
             <a:avLst/>
@@ -16873,32 +16832,27 @@
           </a:ln>
         </p:spPr>
         <p:txBody>
-          <a:bodyPr wrap="square" anchor="ctr" anchorCtr="0">
-            <a:noAutofit/>
-          </a:bodyPr>
+          <a:bodyPr wrap="square" anchor="ctr"/>
           <a:lstStyle/>
           <a:p>
             <a:pPr algn="ctr">
               <a:buNone/>
             </a:pPr>
             <a:r>
-              <a:rPr lang="en-US" sz="1900" i="1" dirty="0">
+              <a:rPr lang="en-US" sz="1700" i="1" dirty="0">
                 <a:solidFill>
                   <a:srgbClr val="555555"/>
                 </a:solidFill>
-                <a:latin typeface="Times"/>
-                <a:ea typeface="Times"/>
-                <a:cs typeface="Times"/>
-                <a:sym typeface="Times"/>
+                <a:latin typeface="Arial"/>
               </a:rPr>
-              <a:t>Stablecoin arbitrage graph (subset of 12 venues)</a:t>
+              <a:t>Fig. 2c — Path profitability vs. quote age (0 – 300 s delay)</a:t>
             </a:r>
           </a:p>
         </p:txBody>
       </p:sp>
       <p:pic>
         <p:nvPicPr>
-          <p:cNvPr id="209" name="FullGraph"/>
+          <p:cNvPr id="309" name="fig09_quote_staleness"/>
           <p:cNvPicPr>
             <a:picLocks noChangeAspect="1"/>
           </p:cNvPicPr>
@@ -16912,75 +16866,8 @@
         </p:blipFill>
         <p:spPr>
           <a:xfrm>
-            <a:off x="11300000" y="13400000"/>
-            <a:ext cx="9500000" cy="3900000"/>
-          </a:xfrm>
-          <a:prstGeom prst="rect">
-            <a:avLst/>
-          </a:prstGeom>
-        </p:spPr>
-      </p:pic>
-      <p:sp>
-        <p:nvSpPr>
-          <p:cNvPr id="210" name="Caption 210"/>
-          <p:cNvSpPr txBox="1"/>
-          <p:nvPr/>
-        </p:nvSpPr>
-        <p:spPr>
-          <a:xfrm>
-            <a:off x="11300000" y="17140000"/>
-            <a:ext cx="9500000" cy="360000"/>
-          </a:xfrm>
-          <a:prstGeom prst="rect">
-            <a:avLst/>
-          </a:prstGeom>
-          <a:noFill/>
-          <a:ln>
-            <a:noFill/>
-          </a:ln>
-        </p:spPr>
-        <p:txBody>
-          <a:bodyPr wrap="square" anchor="ctr" anchorCtr="0">
-            <a:noAutofit/>
-          </a:bodyPr>
-          <a:lstStyle/>
-          <a:p>
-            <a:pPr algn="ctr">
-              <a:buNone/>
-            </a:pPr>
-            <a:r>
-              <a:rPr lang="en-US" sz="1900" i="1" dirty="0">
-                <a:solidFill>
-                  <a:srgbClr val="555555"/>
-                </a:solidFill>
-                <a:latin typeface="Times"/>
-                <a:ea typeface="Times"/>
-                <a:cs typeface="Times"/>
-                <a:sym typeface="Times"/>
-              </a:rPr>
-              <a:t>A profitable path: kraken:USDT -&gt; kucoin:USDT -&gt; kucoin:TUSD</a:t>
-            </a:r>
-          </a:p>
-        </p:txBody>
-      </p:sp>
-      <p:pic>
-        <p:nvPicPr>
-          <p:cNvPr id="211" name="CameraReadySuccesfulPathProfit"/>
-          <p:cNvPicPr>
-            <a:picLocks noChangeAspect="1"/>
-          </p:cNvPicPr>
-          <p:nvPr/>
-        </p:nvPicPr>
-        <p:blipFill>
-          <a:blip r:embed="rId10"/>
-          <a:stretch>
-            <a:fillRect/>
-          </a:stretch>
-        </p:blipFill>
-        <p:spPr>
-          <a:xfrm>
-            <a:off x="11300000" y="17500000"/>
-            <a:ext cx="9500000" cy="3700000"/>
+            <a:off x="22300000" y="18700000"/>
+            <a:ext cx="9400000" cy="2700000"/>
           </a:xfrm>
           <a:prstGeom prst="rect">
             <a:avLst/>

--- a/docs/latex/StablecoinArbitrage_GSS2026/poster/poster_filled.pptx
+++ b/docs/latex/StablecoinArbitrage_GSS2026/poster/poster_filled.pptx
@@ -14309,7 +14309,7 @@
                   </a:solidFill>
                   <a:latin typeface="Arial"/>
                 </a:rPr>
-                <a:t>Cross-exchange stablecoin arbitrage exploits price discrepancies across centralized exchanges in a $300B+ market.</a:t>
+                <a:t>Cross-exchange stablecoin arbitrage exploits price discrepancies across centralized exchanges — a $300 B+ market.</a:t>
               </a:r>
             </a:p>
             <a:p>
@@ -14324,7 +14324,7 @@
                   </a:solidFill>
                   <a:latin typeface="Arial"/>
                 </a:rPr>
-                <a:t>Prior work detects opportunities via negative-cycle algorithms — but ignores execution: fees, slippage, withdrawal delays, and venue reliability.</a:t>
+                <a:t>Prior work uses negative-cycle detection to find opportunities, but ignores EXECUTION: fees, slippage, withdrawal delays, and venue reliability.</a:t>
               </a:r>
             </a:p>
             <a:p>
@@ -14339,7 +14339,7 @@
                   </a:solidFill>
                   <a:latin typeface="Arial"/>
                 </a:rPr>
-                <a:t>We shift focus to EXECUTION FEASIBILITY: compute trade-and-transfer paths that remain profitable after ALL real-world costs.</a:t>
+                <a:t>We shift focus: compute trade-and-transfer paths that remain profitable after ALL real-world costs are applied.</a:t>
               </a:r>
             </a:p>
             <a:p>
@@ -14354,7 +14354,7 @@
                   </a:solidFill>
                   <a:latin typeface="Arial"/>
                 </a:rPr>
-                <a:t>Stablecoins are ideal: USD-pegged assets with a clear scalar profit objective across 12 major exchanges and 9 coin symbols.</a:t>
+                <a:t>Stablecoins are ideal: USD-pegged assets with a clean scalar profit objective across 12 major exchanges and 9 coin symbols.</a:t>
               </a:r>
             </a:p>
             <a:p>
@@ -14369,7 +14369,7 @@
                   </a:solidFill>
                   <a:latin typeface="Arial"/>
                 </a:rPr>
-                <a:t>We run 7,200 overnight search instances and compare A* heuristics against Dijkstra and multi-start baselines.</a:t>
+                <a:t>We model the problem as weighted directed graph search and run 7,200 overnight search instances comparing A* heuristics vs. Dijkstra.</a:t>
               </a:r>
             </a:p>
             <a:p>
@@ -14384,7 +14384,7 @@
                   </a:solidFill>
                   <a:latin typeface="Arial"/>
                 </a:rPr>
-                <a:t>Code: github.com/kevinl03/Stablecoin-CrossExchange-Arbitrage</a:t>
+                <a:t>Code + data: github.com/kevinl03/Stablecoin-CrossExchange-Arbitrage</a:t>
               </a:r>
             </a:p>
             <a:p>
@@ -14574,7 +14574,7 @@
               <a:r>
                 <a:rPr lang="en-US" sz="3825" b="1" dirty="0">
                   <a:solidFill>
-                    <a:srgbClr val="CC0633"/>
+                    <a:srgbClr val="CD3E3D"/>
                   </a:solidFill>
                   <a:latin typeface="Trebuchet MS"/>
                   <a:ea typeface="Trebuchet MS"/>
@@ -14626,7 +14626,7 @@
                 </a:solidFill>
                 <a:latin typeface="Arial"/>
               </a:rPr>
-              <a:t>GRAPH MODEL — Nodes are (exchange, stablecoin) pairs. Intra-exchange edges are trades; inter-exchange edges are same-coin transfers.</a:t>
+              <a:t>GRAPH MODEL — Nodes are (exchange, stablecoin) pairs. Intra-exchange edges are trades; inter-exchange edges are same-coin cross-venue transfers.</a:t>
             </a:r>
           </a:p>
           <a:p>
@@ -14641,7 +14641,7 @@
                 </a:solidFill>
                 <a:latin typeface="Arial"/>
               </a:rPr>
-              <a:t>EDGE WEIGHT — w(e) = -log r(e). Effective rate r(e) bundles taker fees, withdrawal/gas fees, chain-transfer time, and venue-reliability discount.</a:t>
+              <a:t>EDGE WEIGHT — w(e) = -log r(e). Effective rate r(e) bundles taker fees, gas/withdrawal costs, chain-transfer time, and venue-reliability discount.</a:t>
             </a:r>
           </a:p>
           <a:p>
@@ -14656,7 +14656,7 @@
                 </a:solidFill>
                 <a:latin typeface="Arial"/>
               </a:rPr>
-              <a:t>GOAL — Any node where USD value exceeds the start amount (no closed cycle needed; stablecoins are USD-pegged).</a:t>
+              <a:t>GOAL — Any node where USD value exceeds the start amount (stablecoins are USD-pegged: no closed cycle required).</a:t>
             </a:r>
           </a:p>
           <a:p>
@@ -14671,21 +14671,21 @@
                 </a:solidFill>
                 <a:latin typeface="Arial"/>
               </a:rPr>
-              <a:t>SEARCH — A* with f(n) = g(n) + h(n). Each heuristic is a domain-specific guidance penalty (not an admissible lower bound).</a:t>
+              <a:t>SEARCH — A* with f(n) = g(n) + h(n). Each heuristic is a domain-specific guidance penalty, not an admissible lower bound.</a:t>
             </a:r>
           </a:p>
           <a:p>
             <a:pPr>
               <a:buNone/>
             </a:pPr>
-            <a:endParaRPr sz="1000"/>
+            <a:endParaRPr sz="900"/>
           </a:p>
           <a:p>
             <a:pPr>
               <a:buNone/>
             </a:pPr>
             <a:r>
-              <a:rPr lang="en-US" sz="2600" b="1" dirty="0">
+              <a:rPr lang="en-US" sz="2700" b="1" dirty="0">
                 <a:solidFill>
                   <a:srgbClr val="CC0633"/>
                 </a:solidFill>
@@ -14706,7 +14706,7 @@
                 </a:solidFill>
                 <a:latin typeface="Arial"/>
               </a:rPr>
-              <a:t>h₁  (Liquidity)   Penalise shallow 24-h order books relative to order size.</a:t>
+              <a:t>h₁  (Liquidity)    Penalise shallow 24-h order books relative to order size.</a:t>
             </a:r>
           </a:p>
           <a:p>
@@ -14721,7 +14721,7 @@
                 </a:solidFill>
                 <a:latin typeface="Arial"/>
               </a:rPr>
-              <a:t>h₂  (Slippage)    ★ NOVEL: lambda × max(0, slippage_bps − θ). Prunes high-impact routes.</a:t>
+              <a:t>h₂  (Slippage)  ★  NOVEL: prunes high market-impact routes early, preserving low-impact paths at equal profit.</a:t>
             </a:r>
           </a:p>
           <a:p>
@@ -14736,89 +14736,47 @@
                 </a:solidFill>
                 <a:latin typeface="Arial"/>
               </a:rPr>
-              <a:t>h₃  (Chain)       Chain congestion time + static venue-reliability penalty.</a:t>
+              <a:t>h₃  (Chain)       Chain-congestion time + static venue-reliability penalty.</a:t>
             </a:r>
           </a:p>
           <a:p>
             <a:pPr>
               <a:buNone/>
             </a:pPr>
-            <a:endParaRPr sz="1000"/>
+            <a:endParaRPr sz="900"/>
           </a:p>
           <a:p>
             <a:pPr>
               <a:buNone/>
             </a:pPr>
             <a:r>
-              <a:rPr lang="en-US" sz="2600" b="1" dirty="0">
+              <a:rPr lang="en-US" sz="2700" b="1" dirty="0">
                 <a:solidFill>
                   <a:srgbClr val="CC0633"/>
                 </a:solidFill>
                 <a:latin typeface="Arial"/>
               </a:rPr>
-              <a:t>Key Equations</a:t>
+              <a:t>Key Equations  ▼</a:t>
             </a:r>
           </a:p>
           <a:p>
             <a:pPr>
               <a:buNone/>
             </a:pPr>
-            <a:r>
-              <a:rPr lang="en-US" sz="2100" b="1" dirty="0">
-                <a:solidFill>
-                  <a:schemeClr val="dk1"/>
-                </a:solidFill>
-                <a:latin typeface="Courier New"/>
-              </a:rPr>
-              <a:t>w(e) = -log r(e)       r(e) = (1-fee)(1-slippage)(1-gas)(reliability)</a:t>
-            </a:r>
-          </a:p>
-          <a:p>
-            <a:pPr>
-              <a:buNone/>
-            </a:pPr>
-            <a:r>
-              <a:rPr lang="en-US" sz="2100" b="1" dirty="0">
-                <a:solidFill>
-                  <a:schemeClr val="dk1"/>
-                </a:solidFill>
-                <a:latin typeface="Courier New"/>
-              </a:rPr>
-              <a:t>f(n) = g(n) + h(n)     h₂ = λ⋅max(0, slippage_bps − θ)</a:t>
-            </a:r>
-          </a:p>
-          <a:p>
-            <a:pPr>
-              <a:buNone/>
-            </a:pPr>
-            <a:r>
-              <a:rPr lang="en-US" sz="2100" b="1" dirty="0">
-                <a:solidFill>
-                  <a:schemeClr val="dk1"/>
-                </a:solidFill>
-                <a:latin typeface="Courier New"/>
-              </a:rPr>
-              <a:t>slippage_bps = (VWAP(Q) - P_mid) / P_mid × 10⁴</a:t>
-            </a:r>
-          </a:p>
-          <a:p>
-            <a:pPr>
-              <a:buNone/>
-            </a:pPr>
-            <a:endParaRPr sz="1000"/>
+            <a:endParaRPr sz="900"/>
           </a:p>
           <a:p>
             <a:pPr algn="ctr">
               <a:buNone/>
             </a:pPr>
             <a:r>
-              <a:rPr lang="en-US" sz="2400" i="1" dirty="0">
-                <a:solidFill>
-                  <a:srgbClr val="0070C0"/>
+              <a:rPr lang="en-US" sz="2300" i="1" dirty="0">
+                <a:solidFill>
+                  <a:srgbClr val="0057A8"/>
                 </a:solidFill>
                 <a:latin typeface="Arial"/>
               </a:rPr>
-              <a:t>Slippage-aware h₂ prunes high-cost routes early, preserving low-cost ones: same profit as Dijkstra with 29% fewer node expansions.</a:t>
+              <a:t>h₂ achieves the same profit as Dijkstra with 29% fewer node expansions — verified across 7,200 overnight instances on a unique CEX stablecoin dataset.</a:t>
             </a:r>
           </a:p>
           <a:p>
@@ -15358,7 +15316,7 @@
             <a:r>
               <a:rPr lang="en-US" sz="3825" b="1" dirty="0">
                 <a:solidFill>
-                  <a:srgbClr val="CC0633"/>
+                  <a:srgbClr val="CD3E3D"/>
                 </a:solidFill>
                 <a:latin typeface="Trebuchet MS"/>
                 <a:ea typeface="Trebuchet MS"/>
@@ -15414,13 +15372,13 @@
                 <a:buNone/>
               </a:pPr>
               <a:r>
-                <a:rPr lang="en-US" sz="2400" b="1" dirty="0">
+                <a:rPr lang="en-US" sz="2500" b="1" dirty="0">
                   <a:solidFill>
                     <a:srgbClr val="CC0633"/>
                   </a:solidFill>
                   <a:latin typeface="Arial"/>
                 </a:rPr>
-                <a:t>The shift from OPPORTUNITY DETECTION to EXECUTION FEASIBILITY:</a:t>
+                <a:t>The shift: OPPORTUNITY DETECTION → EXECUTION FEASIBILITY</a:t>
               </a:r>
             </a:p>
             <a:p>
@@ -15441,7 +15399,7 @@
                   </a:solidFill>
                   <a:latin typeface="Arial"/>
                 </a:rPr>
-                <a:t>① LIQUIDITY — Order-book depth is insufficient for full fills at the quoted price; partial fills reduce effective profit.</a:t>
+                <a:t>① LIQUIDITY — Insufficient order-book depth causes partial fills and adverse price impact at the quoted rate.</a:t>
               </a:r>
             </a:p>
             <a:p>
@@ -15456,7 +15414,7 @@
                   </a:solidFill>
                   <a:latin typeface="Arial"/>
                 </a:rPr>
-                <a:t>② SLIPPAGE — Large orders shift the VWAP above the mid-price; the effective rate r(e) captures this via slippage_bps.</a:t>
+                <a:t>② SLIPPAGE — Large orders shift the VWAP above mid-price; the effective rate r(e) captures this via slippage_bps.</a:t>
               </a:r>
             </a:p>
             <a:p>
@@ -15471,7 +15429,7 @@
                   </a:solidFill>
                   <a:latin typeface="Arial"/>
                 </a:rPr>
-                <a:t>③ LATENCY — Blockchain transfers take minutes to hours; market prices move against the open leg while funds are in transit.</a:t>
+                <a:t>③ LATENCY — Blockchain transfers take minutes to hours; market prices can move against the open leg while funds are in transit.</a:t>
               </a:r>
             </a:p>
             <a:p>
@@ -15486,7 +15444,7 @@
                   </a:solidFill>
                   <a:latin typeface="Arial"/>
                 </a:rPr>
-                <a:t>④ RELIABILITY — Exchange downtime, withdrawal halts, and API failures derail planned routes mid-execution.</a:t>
+                <a:t>④ RELIABILITY — Exchange downtime, withdrawal halts, and API failures can derail planned routes mid-execution.</a:t>
               </a:r>
             </a:p>
             <a:p>
@@ -15501,7 +15459,7 @@
                   </a:solidFill>
                   <a:latin typeface="Arial"/>
                 </a:rPr>
-                <a:t>Together these four factors mean that opportunity-detection methods overstate real profit — sometimes by more than 40%.</a:t>
+                <a:t>Together these factors mean opportunity-detection methods overstate real profit by up to 40% in live conditions.</a:t>
               </a:r>
             </a:p>
             <a:p>
@@ -15691,7 +15649,7 @@
               <a:r>
                 <a:rPr lang="en-US" sz="3825" b="1">
                   <a:solidFill>
-                    <a:srgbClr val="CC0633"/>
+                    <a:srgbClr val="CD3E3D"/>
                   </a:solidFill>
                   <a:latin typeface="Trebuchet MS"/>
                   <a:ea typeface="Trebuchet MS"/>
@@ -15748,20 +15706,20 @@
                 <a:buNone/>
               </a:pPr>
               <a:r>
-                <a:rPr lang="en-US" sz="3200" b="1" dirty="0">
+                <a:rPr lang="en-US" sz="3000" b="1" dirty="0">
                   <a:solidFill>
                     <a:srgbClr val="CC0633"/>
                   </a:solidFill>
                   <a:latin typeface="Arial"/>
                 </a:rPr>
-                <a:t>★  h₂ reduces node expansions by 29% while matching Dijkstra's profit  ★</a:t>
+                <a:t>★  h₂ reduces node expansions by 29% while matching Dijkstra’s profit  ★</a:t>
               </a:r>
             </a:p>
             <a:p>
               <a:pPr>
                 <a:buNone/>
               </a:pPr>
-              <a:endParaRPr sz="1000"/>
+              <a:endParaRPr sz="800"/>
             </a:p>
             <a:p>
               <a:pPr marL="342900" indent="-342900">
@@ -15790,7 +15748,7 @@
                   </a:solidFill>
                   <a:latin typeface="Arial"/>
                 </a:rPr>
-                <a:t>Quote staleness: 99.6% of paths remain profitable up to 120 s of delay.</a:t>
+                <a:t>Quote staleness: 99.6% of paths remain profitable up to 120 s of quote delay.</a:t>
               </a:r>
             </a:p>
             <a:p>
@@ -15812,14 +15770,14 @@
               <a:pPr>
                 <a:buNone/>
               </a:pPr>
-              <a:endParaRPr sz="1000"/>
+              <a:endParaRPr sz="800"/>
             </a:p>
             <a:p>
               <a:pPr>
                 <a:buNone/>
               </a:pPr>
               <a:r>
-                <a:rPr lang="en-US" sz="2000" b="1" dirty="0">
+                <a:rPr lang="en-US" sz="1900" b="1" dirty="0">
                   <a:solidFill>
                     <a:schemeClr val="dk1"/>
                   </a:solidFill>
@@ -15833,7 +15791,7 @@
                 <a:buNone/>
               </a:pPr>
               <a:r>
-                <a:rPr lang="en-US" sz="2000" dirty="0">
+                <a:rPr lang="en-US" sz="1900" dirty="0">
                   <a:solidFill>
                     <a:schemeClr val="dk1"/>
                   </a:solidFill>
@@ -15847,7 +15805,7 @@
                 <a:buNone/>
               </a:pPr>
               <a:r>
-                <a:rPr lang="en-US" sz="2000" dirty="0">
+                <a:rPr lang="en-US" sz="1900" dirty="0">
                   <a:solidFill>
                     <a:schemeClr val="dk1"/>
                   </a:solidFill>
@@ -15861,13 +15819,13 @@
                 <a:buNone/>
               </a:pPr>
               <a:r>
-                <a:rPr lang="en-US" sz="2000" dirty="0">
+                <a:rPr lang="en-US" sz="1900" dirty="0">
                   <a:solidFill>
                     <a:schemeClr val="dk1"/>
                   </a:solidFill>
                   <a:latin typeface="Courier New"/>
                 </a:rPr>
-                <a:t>h₂ (Slippage) $9.91  256         -29%  ★</a:t>
+                <a:t>h₂ Slippage  $9.91     256         -29%  ★</a:t>
               </a:r>
             </a:p>
             <a:p>
@@ -15875,13 +15833,13 @@
                 <a:buNone/>
               </a:pPr>
               <a:r>
-                <a:rPr lang="en-US" sz="2000" dirty="0">
+                <a:rPr lang="en-US" sz="1900" dirty="0">
                   <a:solidFill>
                     <a:schemeClr val="dk1"/>
                   </a:solidFill>
                   <a:latin typeface="Courier New"/>
                 </a:rPr>
-                <a:t>h₁ (Liq.)    $6.72    568        +58%</a:t>
+                <a:t>h₁ Liq.      $6.72     568        +58%</a:t>
               </a:r>
             </a:p>
             <a:p>
@@ -15889,13 +15847,13 @@
                 <a:buNone/>
               </a:pPr>
               <a:r>
-                <a:rPr lang="en-US" sz="2000" dirty="0">
+                <a:rPr lang="en-US" sz="1900" dirty="0">
                   <a:solidFill>
                     <a:schemeClr val="dk1"/>
                   </a:solidFill>
                   <a:latin typeface="Courier New"/>
                 </a:rPr>
-                <a:t>h₃ (Chain)   $7.06    673        +87%</a:t>
+                <a:t>h₃ Chain     $7.06     673        +87%</a:t>
               </a:r>
             </a:p>
             <a:p>
@@ -15903,13 +15861,13 @@
                 <a:buNone/>
               </a:pPr>
               <a:r>
-                <a:rPr lang="en-US" sz="2000" dirty="0">
+                <a:rPr lang="en-US" sz="1900" dirty="0">
                   <a:solidFill>
                     <a:schemeClr val="dk1"/>
                   </a:solidFill>
                   <a:latin typeface="Courier New"/>
                 </a:rPr>
-                <a:t>Multi-start  $9.88    3×359       ---</a:t>
+                <a:t>Multi-start  $9.88     3×359       ---</a:t>
               </a:r>
             </a:p>
             <a:p>
@@ -16099,7 +16057,7 @@
               <a:r>
                 <a:rPr lang="en-US" sz="3825" b="1" dirty="0">
                   <a:solidFill>
-                    <a:srgbClr val="CC0633"/>
+                    <a:srgbClr val="CD3E3D"/>
                   </a:solidFill>
                   <a:latin typeface="Trebuchet MS"/>
                   <a:ea typeface="Trebuchet MS"/>
@@ -16178,7 +16136,7 @@
                   </a:solidFill>
                   <a:latin typeface="Arial"/>
                 </a:rPr>
-                <a:t>h₂ is robust to order-size variation ($1k – $100k): slippage penalty keeps the search focused on liquid, low-impact paths.</a:t>
+                <a:t>h₂ is robust to order-size variation ($1k – $100k): the slippage penalty keeps search focused on liquid, low-impact paths.</a:t>
               </a:r>
             </a:p>
             <a:p>
@@ -16193,7 +16151,7 @@
                   </a:solidFill>
                   <a:latin typeface="Arial"/>
                 </a:rPr>
-                <a:t>Overnight robustness: profit stays consistent across all 7,200 runs with minimal variance — the A* framework is stable in live conditions.</a:t>
+                <a:t>Overnight stability: profit stays consistent across 7,200 runs with minimal variance — the A* framework is stable under live market conditions.</a:t>
               </a:r>
             </a:p>
             <a:p>
@@ -16208,7 +16166,7 @@
                   </a:solidFill>
                   <a:latin typeface="Arial"/>
                 </a:rPr>
-                <a:t>FUTURE WORK: asynchronous order-book pre-fetching to reduce staleness; extension to DEX/AMM markets (Uniswap, Curve) with continuous pricing functions.</a:t>
+                <a:t>FUTURE: asynchronous order-book pre-fetching to eliminate quote staleness.</a:t>
               </a:r>
             </a:p>
             <a:p>
@@ -16223,7 +16181,7 @@
                   </a:solidFill>
                   <a:latin typeface="Arial"/>
                 </a:rPr>
-                <a:t>FUTURE WORK: reinforcement-learning route selection and multi-currency baskets beyond stablecoins.</a:t>
+                <a:t>FUTURE: extension to DEX/AMM markets (Uniswap, Curve) with continuous pricing — replacing discrete fee tables with AMM invariants.</a:t>
               </a:r>
             </a:p>
             <a:p>
@@ -16413,7 +16371,7 @@
               <a:r>
                 <a:rPr lang="en-US" sz="3825" b="1" dirty="0">
                   <a:solidFill>
-                    <a:srgbClr val="CC0633"/>
+                    <a:srgbClr val="CD3E3D"/>
                   </a:solidFill>
                   <a:latin typeface="Trebuchet MS"/>
                   <a:ea typeface="Trebuchet MS"/>
@@ -16458,7 +16416,7 @@
             <a:r>
               <a:rPr lang="en-US" sz="3825" dirty="0">
                 <a:solidFill>
-                  <a:srgbClr val="CC0633"/>
+                  <a:srgbClr val="CD3E3D"/>
                 </a:solidFill>
                 <a:latin typeface="Times"/>
                 <a:ea typeface="Times"/>
@@ -16470,7 +16428,7 @@
             <a:br>
               <a:rPr lang="en-US" sz="3825" dirty="0">
                 <a:solidFill>
-                  <a:srgbClr val="CC0633"/>
+                  <a:srgbClr val="CD3E3D"/>
                 </a:solidFill>
                 <a:latin typeface="Times"/>
                 <a:ea typeface="Times"/>
@@ -16481,7 +16439,7 @@
             <a:r>
               <a:rPr lang="en-US" sz="3825" dirty="0">
                 <a:solidFill>
-                  <a:srgbClr val="CC0633"/>
+                  <a:srgbClr val="CD3E3D"/>
                 </a:solidFill>
                 <a:latin typeface="Times"/>
                 <a:ea typeface="Times"/>
@@ -16492,7 +16450,7 @@
             </a:r>
             <a:endParaRPr sz="1148" dirty="0">
               <a:solidFill>
-                <a:srgbClr val="CC0633"/>
+                <a:srgbClr val="CD3E3D"/>
               </a:solidFill>
             </a:endParaRPr>
           </a:p>
@@ -16566,14 +16524,118 @@
       </p:pic>
       <p:sp>
         <p:nvSpPr>
-          <p:cNvPr id="300" name="Caption300"/>
+          <p:cNvPr id="290" name="Label290"/>
           <p:cNvSpPr txBox="1"/>
           <p:nvPr/>
         </p:nvSpPr>
         <p:spPr>
           <a:xfrm>
-            <a:off x="11350000" y="18840000"/>
-            <a:ext cx="9500000" cy="380000"/>
+            <a:off x="11350000" y="10300000"/>
+            <a:ext cx="9200000" cy="500000"/>
+          </a:xfrm>
+          <a:prstGeom prst="rect">
+            <a:avLst/>
+          </a:prstGeom>
+          <a:noFill/>
+          <a:ln>
+            <a:noFill/>
+          </a:ln>
+        </p:spPr>
+        <p:txBody>
+          <a:bodyPr wrap="square" anchor="ctr" anchorCtr="1"/>
+          <a:lstStyle/>
+          <a:p>
+            <a:pPr algn="ctr">
+              <a:buNone/>
+            </a:pPr>
+            <a:r>
+              <a:rPr lang="en-US" sz="2700" b="1" dirty="0">
+                <a:solidFill>
+                  <a:srgbClr val="CC0633"/>
+                </a:solidFill>
+                <a:latin typeface="Arial"/>
+              </a:rPr>
+              <a:t>Key Cost Equations</a:t>
+            </a:r>
+          </a:p>
+        </p:txBody>
+      </p:sp>
+      <p:pic>
+        <p:nvPicPr>
+          <p:cNvPr id="300" name="eq1"/>
+          <p:cNvPicPr/>
+          <p:nvPr/>
+        </p:nvPicPr>
+        <p:blipFill>
+          <a:blip r:embed="rId5"/>
+          <a:stretch>
+            <a:fillRect/>
+          </a:stretch>
+        </p:blipFill>
+        <p:spPr>
+          <a:xfrm>
+            <a:off x="11350000" y="10600000"/>
+            <a:ext cx="9200000" cy="820000"/>
+          </a:xfrm>
+          <a:prstGeom prst="rect">
+            <a:avLst/>
+          </a:prstGeom>
+        </p:spPr>
+      </p:pic>
+      <p:pic>
+        <p:nvPicPr>
+          <p:cNvPr id="301" name="eq2"/>
+          <p:cNvPicPr/>
+          <p:nvPr/>
+        </p:nvPicPr>
+        <p:blipFill>
+          <a:blip r:embed="rId6"/>
+          <a:stretch>
+            <a:fillRect/>
+          </a:stretch>
+        </p:blipFill>
+        <p:spPr>
+          <a:xfrm>
+            <a:off x="11350000" y="11520000"/>
+            <a:ext cx="9200000" cy="820000"/>
+          </a:xfrm>
+          <a:prstGeom prst="rect">
+            <a:avLst/>
+          </a:prstGeom>
+        </p:spPr>
+      </p:pic>
+      <p:pic>
+        <p:nvPicPr>
+          <p:cNvPr id="302" name="eq3"/>
+          <p:cNvPicPr/>
+          <p:nvPr/>
+        </p:nvPicPr>
+        <p:blipFill>
+          <a:blip r:embed="rId7"/>
+          <a:stretch>
+            <a:fillRect/>
+          </a:stretch>
+        </p:blipFill>
+        <p:spPr>
+          <a:xfrm>
+            <a:off x="11350000" y="12440000"/>
+            <a:ext cx="9200000" cy="820000"/>
+          </a:xfrm>
+          <a:prstGeom prst="rect">
+            <a:avLst/>
+          </a:prstGeom>
+        </p:spPr>
+      </p:pic>
+      <p:sp>
+        <p:nvSpPr>
+          <p:cNvPr id="303" name="Caption303"/>
+          <p:cNvSpPr txBox="1"/>
+          <p:nvPr/>
+        </p:nvSpPr>
+        <p:spPr>
+          <a:xfrm>
+            <a:off x="1200000" y="19125457"/>
+            <a:ext cx="9200000" cy="380000"/>
           </a:xfrm>
           <a:prstGeom prst="rect">
             <a:avLst/>
@@ -16597,29 +16659,27 @@
                 </a:solidFill>
                 <a:latin typeface="Arial"/>
               </a:rPr>
-              <a:t>Fig. 1b — Discovered profitable path: Kraken → KuCoin → KuCoin</a:t>
+              <a:t>Fig. 3 — Success rate and profit by heuristic</a:t>
             </a:r>
           </a:p>
         </p:txBody>
       </p:sp>
       <p:pic>
         <p:nvPicPr>
-          <p:cNvPr id="301" name="CameraReadySuccesfulPathProfit"/>
-          <p:cNvPicPr>
-            <a:picLocks noChangeAspect="1"/>
-          </p:cNvPicPr>
+          <p:cNvPr id="304" name="fig04_success_rate"/>
+          <p:cNvPicPr/>
           <p:nvPr/>
         </p:nvPicPr>
         <p:blipFill>
-          <a:blip r:embed="rId5"/>
+          <a:blip r:embed="rId8"/>
           <a:stretch>
             <a:fillRect/>
           </a:stretch>
         </p:blipFill>
         <p:spPr>
           <a:xfrm>
-            <a:off x="11350000" y="13600000"/>
-            <a:ext cx="9500000" cy="5200000"/>
+            <a:off x="1200000" y="13500000"/>
+            <a:ext cx="9200000" cy="5585457"/>
           </a:xfrm>
           <a:prstGeom prst="rect">
             <a:avLst/>
@@ -16628,14 +16688,14 @@
       </p:pic>
       <p:sp>
         <p:nvSpPr>
-          <p:cNvPr id="302" name="Caption302"/>
+          <p:cNvPr id="305" name="Caption305"/>
           <p:cNvSpPr txBox="1"/>
           <p:nvPr/>
         </p:nvSpPr>
         <p:spPr>
           <a:xfrm>
-            <a:off x="11350000" y="21640000"/>
-            <a:ext cx="9500000" cy="380000"/>
+            <a:off x="22200000" y="11240000"/>
+            <a:ext cx="9200000" cy="380000"/>
           </a:xfrm>
           <a:prstGeom prst="rect">
             <a:avLst/>
@@ -16659,29 +16719,27 @@
                 </a:solidFill>
                 <a:latin typeface="Arial"/>
               </a:rPr>
-              <a:t>Fig. 1a — Stablecoin arbitrage subgraph (9 of 12 exchanges)</a:t>
+              <a:t>Fig. 2a — Node expansions per heuristic (cached graph, $10 k order)</a:t>
             </a:r>
           </a:p>
         </p:txBody>
       </p:sp>
       <p:pic>
         <p:nvPicPr>
-          <p:cNvPr id="303" name="FullGraph"/>
-          <p:cNvPicPr>
-            <a:picLocks noChangeAspect="1"/>
-          </p:cNvPicPr>
+          <p:cNvPr id="306" name="fig01_node_expansion_bar"/>
+          <p:cNvPicPr/>
           <p:nvPr/>
         </p:nvPicPr>
         <p:blipFill>
-          <a:blip r:embed="rId6"/>
+          <a:blip r:embed="rId9"/>
           <a:stretch>
             <a:fillRect/>
           </a:stretch>
         </p:blipFill>
         <p:spPr>
           <a:xfrm>
-            <a:off x="11350000" y="19100000"/>
-            <a:ext cx="9500000" cy="2500000"/>
+            <a:off x="22200000" y="8700000"/>
+            <a:ext cx="9200000" cy="2500000"/>
           </a:xfrm>
           <a:prstGeom prst="rect">
             <a:avLst/>
@@ -16690,14 +16748,14 @@
       </p:pic>
       <p:sp>
         <p:nvSpPr>
-          <p:cNvPr id="304" name="Caption304"/>
+          <p:cNvPr id="307" name="Caption307"/>
           <p:cNvSpPr txBox="1"/>
           <p:nvPr/>
         </p:nvSpPr>
         <p:spPr>
           <a:xfrm>
-            <a:off x="22300000" y="10740000"/>
-            <a:ext cx="9400000" cy="380000"/>
+            <a:off x="22200000" y="16340000"/>
+            <a:ext cx="9200000" cy="380000"/>
           </a:xfrm>
           <a:prstGeom prst="rect">
             <a:avLst/>
@@ -16721,29 +16779,27 @@
                 </a:solidFill>
                 <a:latin typeface="Arial"/>
               </a:rPr>
-              <a:t>Fig. 2a — Node expansions per heuristic (cached graph, $10 k order)</a:t>
+              <a:t>Fig. 2b — Expansions vs. graph size (4 → 12 exchanges)</a:t>
             </a:r>
           </a:p>
         </p:txBody>
       </p:sp>
       <p:pic>
         <p:nvPicPr>
-          <p:cNvPr id="305" name="fig01_node_expansion_bar"/>
-          <p:cNvPicPr>
-            <a:picLocks noChangeAspect="1"/>
-          </p:cNvPicPr>
+          <p:cNvPr id="308" name="fig08_graph_scaling_expansions"/>
+          <p:cNvPicPr/>
           <p:nvPr/>
         </p:nvPicPr>
         <p:blipFill>
-          <a:blip r:embed="rId7"/>
+          <a:blip r:embed="rId10"/>
           <a:stretch>
             <a:fillRect/>
           </a:stretch>
         </p:blipFill>
         <p:spPr>
           <a:xfrm>
-            <a:off x="22300000" y="8400000"/>
-            <a:ext cx="9400000" cy="2300000"/>
+            <a:off x="22200000" y="13700000"/>
+            <a:ext cx="9200000" cy="2600000"/>
           </a:xfrm>
           <a:prstGeom prst="rect">
             <a:avLst/>
@@ -16752,14 +16808,14 @@
       </p:pic>
       <p:sp>
         <p:nvSpPr>
-          <p:cNvPr id="306" name="Caption306"/>
+          <p:cNvPr id="309" name="Caption309"/>
           <p:cNvSpPr txBox="1"/>
           <p:nvPr/>
         </p:nvSpPr>
         <p:spPr>
           <a:xfrm>
-            <a:off x="22300000" y="18440000"/>
-            <a:ext cx="9400000" cy="380000"/>
+            <a:off x="11350000" y="18971325"/>
+            <a:ext cx="9200000" cy="380000"/>
           </a:xfrm>
           <a:prstGeom prst="rect">
             <a:avLst/>
@@ -16783,91 +16839,27 @@
                 </a:solidFill>
                 <a:latin typeface="Arial"/>
               </a:rPr>
-              <a:t>Fig. 2b — Expansions vs. graph size (4 → 12 exchanges)</a:t>
+              <a:t>Fig. 1b — Discovered profitable path: Kraken → KuCoin → KuCoin (USDT → TUSD)</a:t>
             </a:r>
           </a:p>
         </p:txBody>
       </p:sp>
       <p:pic>
         <p:nvPicPr>
-          <p:cNvPr id="307" name="fig08_graph_scaling_expansions"/>
-          <p:cNvPicPr>
-            <a:picLocks noChangeAspect="1"/>
-          </p:cNvPicPr>
+          <p:cNvPr id="310" name="CameraReadySuccesfulPathProfit"/>
+          <p:cNvPicPr/>
           <p:nvPr/>
         </p:nvPicPr>
         <p:blipFill>
-          <a:blip r:embed="rId8"/>
+          <a:blip r:embed="rId11"/>
           <a:stretch>
             <a:fillRect/>
           </a:stretch>
         </p:blipFill>
         <p:spPr>
           <a:xfrm>
-            <a:off x="22300000" y="15700000"/>
-            <a:ext cx="9400000" cy="2700000"/>
-          </a:xfrm>
-          <a:prstGeom prst="rect">
-            <a:avLst/>
-          </a:prstGeom>
-        </p:spPr>
-      </p:pic>
-      <p:sp>
-        <p:nvSpPr>
-          <p:cNvPr id="308" name="Caption308"/>
-          <p:cNvSpPr txBox="1"/>
-          <p:nvPr/>
-        </p:nvSpPr>
-        <p:spPr>
-          <a:xfrm>
-            <a:off x="22300000" y="21440000"/>
-            <a:ext cx="9400000" cy="380000"/>
-          </a:xfrm>
-          <a:prstGeom prst="rect">
-            <a:avLst/>
-          </a:prstGeom>
-          <a:noFill/>
-          <a:ln>
-            <a:noFill/>
-          </a:ln>
-        </p:spPr>
-        <p:txBody>
-          <a:bodyPr wrap="square" anchor="ctr"/>
-          <a:lstStyle/>
-          <a:p>
-            <a:pPr algn="ctr">
-              <a:buNone/>
-            </a:pPr>
-            <a:r>
-              <a:rPr lang="en-US" sz="1700" i="1" dirty="0">
-                <a:solidFill>
-                  <a:srgbClr val="555555"/>
-                </a:solidFill>
-                <a:latin typeface="Arial"/>
-              </a:rPr>
-              <a:t>Fig. 2c — Path profitability vs. quote age (0 – 300 s delay)</a:t>
-            </a:r>
-          </a:p>
-        </p:txBody>
-      </p:sp>
-      <p:pic>
-        <p:nvPicPr>
-          <p:cNvPr id="309" name="fig09_quote_staleness"/>
-          <p:cNvPicPr>
-            <a:picLocks noChangeAspect="1"/>
-          </p:cNvPicPr>
-          <p:nvPr/>
-        </p:nvPicPr>
-        <p:blipFill>
-          <a:blip r:embed="rId9"/>
-          <a:stretch>
-            <a:fillRect/>
-          </a:stretch>
-        </p:blipFill>
-        <p:spPr>
-          <a:xfrm>
-            <a:off x="22300000" y="18700000"/>
-            <a:ext cx="9400000" cy="2700000"/>
+            <a:off x="11350000" y="13500000"/>
+            <a:ext cx="9200000" cy="5431325"/>
           </a:xfrm>
           <a:prstGeom prst="rect">
             <a:avLst/>

--- a/docs/latex/StablecoinArbitrage_GSS2026/poster/poster_filled.pptx
+++ b/docs/latex/StablecoinArbitrage_GSS2026/poster/poster_filled.pptx
@@ -14309,7 +14309,7 @@
                   </a:solidFill>
                   <a:latin typeface="Arial"/>
                 </a:rPr>
-                <a:t>Cross-exchange stablecoin arbitrage exploits price discrepancies across centralized exchanges — a $300 B+ market.</a:t>
+                <a:t>$300 Billion+ stablecoin market — persistent price gaps across exchanges</a:t>
               </a:r>
             </a:p>
             <a:p>
@@ -14324,7 +14324,7 @@
                   </a:solidFill>
                   <a:latin typeface="Arial"/>
                 </a:rPr>
-                <a:t>Prior work uses negative-cycle detection to find opportunities, but ignores EXECUTION: fees, slippage, withdrawal delays, and venue reliability.</a:t>
+                <a:t>Novel proprietary CEX dataset: 12 exchanges · 9 stablecoins · 7,200 search instances</a:t>
               </a:r>
             </a:p>
             <a:p>
@@ -14339,52 +14339,7 @@
                   </a:solidFill>
                   <a:latin typeface="Arial"/>
                 </a:rPr>
-                <a:t>We shift focus: compute trade-and-transfer paths that remain profitable after ALL real-world costs are applied.</a:t>
-              </a:r>
-            </a:p>
-            <a:p>
-              <a:pPr marL="342900" indent="-342900">
-                <a:buFont typeface="Arial"/>
-                <a:buChar char="•"/>
-              </a:pPr>
-              <a:r>
-                <a:rPr lang="en-US" sz="2400" dirty="0">
-                  <a:solidFill>
-                    <a:schemeClr val="dk1"/>
-                  </a:solidFill>
-                  <a:latin typeface="Arial"/>
-                </a:rPr>
-                <a:t>Stablecoins are ideal: USD-pegged assets with a clean scalar profit objective across 12 major exchanges and 9 coin symbols.</a:t>
-              </a:r>
-            </a:p>
-            <a:p>
-              <a:pPr marL="342900" indent="-342900">
-                <a:buFont typeface="Arial"/>
-                <a:buChar char="•"/>
-              </a:pPr>
-              <a:r>
-                <a:rPr lang="en-US" sz="2400" dirty="0">
-                  <a:solidFill>
-                    <a:schemeClr val="dk1"/>
-                  </a:solidFill>
-                  <a:latin typeface="Arial"/>
-                </a:rPr>
-                <a:t>We model the problem as weighted directed graph search and run 7,200 overnight search instances comparing A* heuristics vs. Dijkstra.</a:t>
-              </a:r>
-            </a:p>
-            <a:p>
-              <a:pPr marL="342900" indent="-342900">
-                <a:buFont typeface="Arial"/>
-                <a:buChar char="•"/>
-              </a:pPr>
-              <a:r>
-                <a:rPr lang="en-US" sz="2400" dirty="0">
-                  <a:solidFill>
-                    <a:schemeClr val="dk1"/>
-                  </a:solidFill>
-                  <a:latin typeface="Arial"/>
-                </a:rPr>
-                <a:t>Code + data: github.com/kevinl03/Stablecoin-CrossExchange-Arbitrage</a:t>
+                <a:t>Execution-unaware methods miss real profit: fees, slippage, gas, latency &amp; reliability all matter</a:t>
               </a:r>
             </a:p>
             <a:p>
@@ -14581,7 +14536,7 @@
                   <a:cs typeface="Trebuchet MS"/>
                   <a:sym typeface="Trebuchet MS"/>
                 </a:rPr>
-                <a:t>Context &amp; Motivation</a:t>
+                <a:t>The $300 B Opportunity</a:t>
               </a:r>
               <a:endParaRPr sz="1339" dirty="0"/>
             </a:p>
@@ -14626,7 +14581,7 @@
                 </a:solidFill>
                 <a:latin typeface="Arial"/>
               </a:rPr>
-              <a:t>GRAPH MODEL — Nodes are (exchange, stablecoin) pairs. Intra-exchange edges are trades; inter-exchange edges are same-coin cross-venue transfers.</a:t>
+              <a:t>Weighted directed graph: nodes = (exchange, stablecoin) pairs</a:t>
             </a:r>
           </a:p>
           <a:p>
@@ -14641,7 +14596,7 @@
                 </a:solidFill>
                 <a:latin typeface="Arial"/>
               </a:rPr>
-              <a:t>EDGE WEIGHT — w(e) = -log r(e). Effective rate r(e) bundles taker fees, gas/withdrawal costs, chain-transfer time, and venue-reliability discount.</a:t>
+              <a:t>Edge weight w(e) = −log r(e) bundles fees, slippage, gas, latency &amp; reliability</a:t>
             </a:r>
           </a:p>
           <a:p>
@@ -14656,32 +14611,17 @@
                 </a:solidFill>
                 <a:latin typeface="Arial"/>
               </a:rPr>
-              <a:t>GOAL — Any node where USD value exceeds the start amount (stablecoins are USD-pegged: no closed cycle required).</a:t>
-            </a:r>
-          </a:p>
-          <a:p>
-            <a:pPr marL="342900" indent="-342900">
-              <a:buFont typeface="Arial"/>
-              <a:buChar char="•"/>
-            </a:pPr>
-            <a:r>
-              <a:rPr lang="en-US" sz="2400" dirty="0">
-                <a:solidFill>
-                  <a:schemeClr val="dk1"/>
-                </a:solidFill>
-                <a:latin typeface="Arial"/>
-              </a:rPr>
-              <a:t>SEARCH — A* with f(n) = g(n) + h(n). Each heuristic is a domain-specific guidance penalty, not an admissible lower bound.</a:t>
+              <a:t>A* finds executable paths maximising USD profit under real-world constraints</a:t>
             </a:r>
           </a:p>
           <a:p>
             <a:pPr>
               <a:buNone/>
             </a:pPr>
-            <a:endParaRPr sz="900"/>
+            <a:endParaRPr sz="800"/>
           </a:p>
           <a:p>
-            <a:pPr>
+            <a:pPr algn="ctr">
               <a:buNone/>
             </a:pPr>
             <a:r>
@@ -14691,92 +14631,7 @@
                 </a:solidFill>
                 <a:latin typeface="Arial"/>
               </a:rPr>
-              <a:t>Heuristics</a:t>
-            </a:r>
-          </a:p>
-          <a:p>
-            <a:pPr marL="342900" indent="-342900">
-              <a:buFont typeface="Arial"/>
-              <a:buChar char="•"/>
-            </a:pPr>
-            <a:r>
-              <a:rPr lang="en-US" sz="2400" dirty="0">
-                <a:solidFill>
-                  <a:schemeClr val="dk1"/>
-                </a:solidFill>
-                <a:latin typeface="Arial"/>
-              </a:rPr>
-              <a:t>h₁  (Liquidity)    Penalise shallow 24-h order books relative to order size.</a:t>
-            </a:r>
-          </a:p>
-          <a:p>
-            <a:pPr marL="342900" indent="-342900">
-              <a:buFont typeface="Arial"/>
-              <a:buChar char="•"/>
-            </a:pPr>
-            <a:r>
-              <a:rPr lang="en-US" sz="2400" dirty="0">
-                <a:solidFill>
-                  <a:schemeClr val="dk1"/>
-                </a:solidFill>
-                <a:latin typeface="Arial"/>
-              </a:rPr>
-              <a:t>h₂  (Slippage)  ★  NOVEL: prunes high market-impact routes early, preserving low-impact paths at equal profit.</a:t>
-            </a:r>
-          </a:p>
-          <a:p>
-            <a:pPr marL="342900" indent="-342900">
-              <a:buFont typeface="Arial"/>
-              <a:buChar char="•"/>
-            </a:pPr>
-            <a:r>
-              <a:rPr lang="en-US" sz="2400" dirty="0">
-                <a:solidFill>
-                  <a:schemeClr val="dk1"/>
-                </a:solidFill>
-                <a:latin typeface="Arial"/>
-              </a:rPr>
-              <a:t>h₃  (Chain)       Chain-congestion time + static venue-reliability penalty.</a:t>
-            </a:r>
-          </a:p>
-          <a:p>
-            <a:pPr>
-              <a:buNone/>
-            </a:pPr>
-            <a:endParaRPr sz="900"/>
-          </a:p>
-          <a:p>
-            <a:pPr>
-              <a:buNone/>
-            </a:pPr>
-            <a:r>
-              <a:rPr lang="en-US" sz="2700" b="1" dirty="0">
-                <a:solidFill>
-                  <a:srgbClr val="CC0633"/>
-                </a:solidFill>
-                <a:latin typeface="Arial"/>
-              </a:rPr>
-              <a:t>Key Equations  ▼</a:t>
-            </a:r>
-          </a:p>
-          <a:p>
-            <a:pPr>
-              <a:buNone/>
-            </a:pPr>
-            <a:endParaRPr sz="900"/>
-          </a:p>
-          <a:p>
-            <a:pPr algn="ctr">
-              <a:buNone/>
-            </a:pPr>
-            <a:r>
-              <a:rPr lang="en-US" sz="2300" i="1" dirty="0">
-                <a:solidFill>
-                  <a:srgbClr val="0057A8"/>
-                </a:solidFill>
-                <a:latin typeface="Arial"/>
-              </a:rPr>
-              <a:t>h₂ achieves the same profit as Dijkstra with 29% fewer node expansions — verified across 7,200 overnight instances on a unique CEX stablecoin dataset.</a:t>
+              <a:t>Cost function and three novel heuristics ▼</a:t>
             </a:r>
           </a:p>
           <a:p>
@@ -15372,94 +15227,13 @@
                 <a:buNone/>
               </a:pPr>
               <a:r>
-                <a:rPr lang="en-US" sz="2500" b="1" dirty="0">
-                  <a:solidFill>
-                    <a:srgbClr val="CC0633"/>
-                  </a:solidFill>
-                  <a:latin typeface="Arial"/>
-                </a:rPr>
-                <a:t>The shift: OPPORTUNITY DETECTION → EXECUTION FEASIBILITY</a:t>
-              </a:r>
-            </a:p>
-            <a:p>
-              <a:pPr>
-                <a:buNone/>
-              </a:pPr>
-              <a:endParaRPr sz="1000"/>
-            </a:p>
-            <a:p>
-              <a:pPr marL="342900" indent="-342900">
-                <a:buFont typeface="Arial"/>
-                <a:buChar char="•"/>
-              </a:pPr>
-              <a:r>
-                <a:rPr lang="en-US" sz="2400" dirty="0">
+                <a:rPr lang="en-US" sz="2200" i="1" dirty="0">
                   <a:solidFill>
                     <a:schemeClr val="dk1"/>
                   </a:solidFill>
                   <a:latin typeface="Arial"/>
                 </a:rPr>
-                <a:t>① LIQUIDITY — Insufficient order-book depth causes partial fills and adverse price impact at the quoted rate.</a:t>
-              </a:r>
-            </a:p>
-            <a:p>
-              <a:pPr marL="342900" indent="-342900">
-                <a:buFont typeface="Arial"/>
-                <a:buChar char="•"/>
-              </a:pPr>
-              <a:r>
-                <a:rPr lang="en-US" sz="2400" dirty="0">
-                  <a:solidFill>
-                    <a:schemeClr val="dk1"/>
-                  </a:solidFill>
-                  <a:latin typeface="Arial"/>
-                </a:rPr>
-                <a:t>② SLIPPAGE — Large orders shift the VWAP above mid-price; the effective rate r(e) captures this via slippage_bps.</a:t>
-              </a:r>
-            </a:p>
-            <a:p>
-              <a:pPr marL="342900" indent="-342900">
-                <a:buFont typeface="Arial"/>
-                <a:buChar char="•"/>
-              </a:pPr>
-              <a:r>
-                <a:rPr lang="en-US" sz="2400" dirty="0">
-                  <a:solidFill>
-                    <a:schemeClr val="dk1"/>
-                  </a:solidFill>
-                  <a:latin typeface="Arial"/>
-                </a:rPr>
-                <a:t>③ LATENCY — Blockchain transfers take minutes to hours; market prices can move against the open leg while funds are in transit.</a:t>
-              </a:r>
-            </a:p>
-            <a:p>
-              <a:pPr marL="342900" indent="-342900">
-                <a:buFont typeface="Arial"/>
-                <a:buChar char="•"/>
-              </a:pPr>
-              <a:r>
-                <a:rPr lang="en-US" sz="2400" dirty="0">
-                  <a:solidFill>
-                    <a:schemeClr val="dk1"/>
-                  </a:solidFill>
-                  <a:latin typeface="Arial"/>
-                </a:rPr>
-                <a:t>④ RELIABILITY — Exchange downtime, withdrawal halts, and API failures can derail planned routes mid-execution.</a:t>
-              </a:r>
-            </a:p>
-            <a:p>
-              <a:pPr marL="342900" indent="-342900">
-                <a:buFont typeface="Arial"/>
-                <a:buChar char="•"/>
-              </a:pPr>
-              <a:r>
-                <a:rPr lang="en-US" sz="2400" dirty="0">
-                  <a:solidFill>
-                    <a:schemeClr val="dk1"/>
-                  </a:solidFill>
-                  <a:latin typeface="Arial"/>
-                </a:rPr>
-                <a:t>Together these factors mean opportunity-detection methods overstate real profit by up to 40% in live conditions.</a:t>
+                <a:t>Subgraph of the stablecoin arbitrage network (9 of 12 exchanges). Nodes = (exchange, coin); solid edges = intra-exchange trades; light edges = cross-exchange transfers.</a:t>
               </a:r>
             </a:p>
             <a:p>
@@ -15656,7 +15430,7 @@
                   <a:cs typeface="Trebuchet MS"/>
                   <a:sym typeface="Trebuchet MS"/>
                 </a:rPr>
-                <a:t>Four Execution Challenges</a:t>
+                <a:t>Arbitrage Network</a:t>
               </a:r>
               <a:endParaRPr sz="1339"/>
             </a:p>
@@ -15706,13 +15480,27 @@
                 <a:buNone/>
               </a:pPr>
               <a:r>
-                <a:rPr lang="en-US" sz="3000" b="1" dirty="0">
+                <a:rPr lang="en-US" sz="4200" b="1" dirty="0">
                   <a:solidFill>
                     <a:srgbClr val="CC0633"/>
                   </a:solidFill>
                   <a:latin typeface="Arial"/>
                 </a:rPr>
-                <a:t>★  h₂ reduces node expansions by 29% while matching Dijkstra’s profit  ★</a:t>
+                <a:t>★  29% Fewer Node Expansions  ★</a:t>
+              </a:r>
+            </a:p>
+            <a:p>
+              <a:pPr algn="ctr">
+                <a:buNone/>
+              </a:pPr>
+              <a:r>
+                <a:rPr lang="en-US" sz="2600" b="1" dirty="0">
+                  <a:solidFill>
+                    <a:schemeClr val="dk1"/>
+                  </a:solidFill>
+                  <a:latin typeface="Arial"/>
+                </a:rPr>
+                <a:t>Same profit as Dijkstra across all 7,200 instances</a:t>
               </a:r>
             </a:p>
             <a:p>
@@ -15727,13 +15515,13 @@
                 <a:buChar char="•"/>
               </a:pPr>
               <a:r>
-                <a:rPr lang="en-US" sz="2400" dirty="0">
+                <a:rPr lang="en-US" sz="2300" dirty="0">
                   <a:solidFill>
                     <a:schemeClr val="dk1"/>
                   </a:solidFill>
                   <a:latin typeface="Arial"/>
                 </a:rPr>
-                <a:t>Every A*-based run across 7,200 overnight instances finds a profitable path.</a:t>
+                <a:t>h₂ achieves the same profit as Dijkstra in all 7,200 overnight instances</a:t>
               </a:r>
             </a:p>
             <a:p>
@@ -15742,13 +15530,13 @@
                 <a:buChar char="•"/>
               </a:pPr>
               <a:r>
-                <a:rPr lang="en-US" sz="2400" dirty="0">
+                <a:rPr lang="en-US" sz="2300" dirty="0">
                   <a:solidFill>
                     <a:schemeClr val="dk1"/>
                   </a:solidFill>
                   <a:latin typeface="Arial"/>
                 </a:rPr>
-                <a:t>Quote staleness: 99.6% of paths remain profitable up to 120 s of quote delay.</a:t>
+                <a:t>99.6% of discovered paths remain profitable after 120 s of quote delay</a:t>
               </a:r>
             </a:p>
             <a:p>
@@ -15757,117 +15545,13 @@
                 <a:buChar char="•"/>
               </a:pPr>
               <a:r>
-                <a:rPr lang="en-US" sz="2400" dirty="0">
+                <a:rPr lang="en-US" sz="2300" dirty="0">
                   <a:solidFill>
                     <a:schemeClr val="dk1"/>
                   </a:solidFill>
                   <a:latin typeface="Arial"/>
                 </a:rPr>
-                <a:t>h₁ and h₃ expand 58-87% MORE nodes and earn 30-33% LESS profit: aggressive penalties over-steer search.</a:t>
-              </a:r>
-            </a:p>
-            <a:p>
-              <a:pPr>
-                <a:buNone/>
-              </a:pPr>
-              <a:endParaRPr sz="800"/>
-            </a:p>
-            <a:p>
-              <a:pPr>
-                <a:buNone/>
-              </a:pPr>
-              <a:r>
-                <a:rPr lang="en-US" sz="1900" b="1" dirty="0">
-                  <a:solidFill>
-                    <a:schemeClr val="dk1"/>
-                  </a:solidFill>
-                  <a:latin typeface="Courier New"/>
-                </a:rPr>
-                <a:t>Heuristic    Profit    Expansions  ΔExp</a:t>
-              </a:r>
-            </a:p>
-            <a:p>
-              <a:pPr>
-                <a:buNone/>
-              </a:pPr>
-              <a:r>
-                <a:rPr lang="en-US" sz="1900" dirty="0">
-                  <a:solidFill>
-                    <a:schemeClr val="dk1"/>
-                  </a:solidFill>
-                  <a:latin typeface="Courier New"/>
-                </a:rPr>
-                <a:t>──────────────────────────────────────────────</a:t>
-              </a:r>
-            </a:p>
-            <a:p>
-              <a:pPr>
-                <a:buNone/>
-              </a:pPr>
-              <a:r>
-                <a:rPr lang="en-US" sz="1900" dirty="0">
-                  <a:solidFill>
-                    <a:schemeClr val="dk1"/>
-                  </a:solidFill>
-                  <a:latin typeface="Courier New"/>
-                </a:rPr>
-                <a:t>Dijkstra     $10.01    359         ---</a:t>
-              </a:r>
-            </a:p>
-            <a:p>
-              <a:pPr>
-                <a:buNone/>
-              </a:pPr>
-              <a:r>
-                <a:rPr lang="en-US" sz="1900" dirty="0">
-                  <a:solidFill>
-                    <a:schemeClr val="dk1"/>
-                  </a:solidFill>
-                  <a:latin typeface="Courier New"/>
-                </a:rPr>
-                <a:t>h₂ Slippage  $9.91     256         -29%  ★</a:t>
-              </a:r>
-            </a:p>
-            <a:p>
-              <a:pPr>
-                <a:buNone/>
-              </a:pPr>
-              <a:r>
-                <a:rPr lang="en-US" sz="1900" dirty="0">
-                  <a:solidFill>
-                    <a:schemeClr val="dk1"/>
-                  </a:solidFill>
-                  <a:latin typeface="Courier New"/>
-                </a:rPr>
-                <a:t>h₁ Liq.      $6.72     568        +58%</a:t>
-              </a:r>
-            </a:p>
-            <a:p>
-              <a:pPr>
-                <a:buNone/>
-              </a:pPr>
-              <a:r>
-                <a:rPr lang="en-US" sz="1900" dirty="0">
-                  <a:solidFill>
-                    <a:schemeClr val="dk1"/>
-                  </a:solidFill>
-                  <a:latin typeface="Courier New"/>
-                </a:rPr>
-                <a:t>h₃ Chain     $7.06     673        +87%</a:t>
-              </a:r>
-            </a:p>
-            <a:p>
-              <a:pPr>
-                <a:buNone/>
-              </a:pPr>
-              <a:r>
-                <a:rPr lang="en-US" sz="1900" dirty="0">
-                  <a:solidFill>
-                    <a:schemeClr val="dk1"/>
-                  </a:solidFill>
-                  <a:latin typeface="Courier New"/>
-                </a:rPr>
-                <a:t>Multi-start  $9.88     3×359       ---</a:t>
+                <a:t>h₁ and h₃ expand 58–87% more nodes and earn 30–33% less profit</a:t>
               </a:r>
             </a:p>
             <a:p>
@@ -16064,7 +15748,7 @@
                   <a:cs typeface="Trebuchet MS"/>
                   <a:sym typeface="Trebuchet MS"/>
                 </a:rPr>
-                <a:t>Results &amp; Impact</a:t>
+                <a:t>Key Results</a:t>
               </a:r>
               <a:endParaRPr sz="1339" dirty="0"/>
             </a:p>
@@ -16110,19 +15794,24 @@
             </a:bodyPr>
             <a:lstStyle/>
             <a:p>
-              <a:pPr marL="342900" indent="-342900">
-                <a:buFont typeface="Arial"/>
-                <a:buChar char="•"/>
+              <a:pPr algn="ctr">
+                <a:buNone/>
               </a:pPr>
               <a:r>
-                <a:rPr lang="en-US" sz="2400" dirty="0">
+                <a:rPr lang="en-US" sz="2800" b="1" dirty="0">
                   <a:solidFill>
-                    <a:schemeClr val="dk1"/>
+                    <a:srgbClr val="CC0633"/>
                   </a:solidFill>
                   <a:latin typeface="Arial"/>
                 </a:rPr>
-                <a:t>Graph scaling (4 → 12 exchanges): h₂ maintains its expansion advantage at every graph size — the gap widens as the graph grows.</a:t>
+                <a:t>Scan for source code and video demo.</a:t>
               </a:r>
+            </a:p>
+            <a:p>
+              <a:pPr>
+                <a:buNone/>
+              </a:pPr>
+              <a:endParaRPr sz="600"/>
             </a:p>
             <a:p>
               <a:pPr marL="342900" indent="-342900">
@@ -16130,58 +15819,13 @@
                 <a:buChar char="•"/>
               </a:pPr>
               <a:r>
-                <a:rPr lang="en-US" sz="2400" dirty="0">
+                <a:rPr lang="en-US" sz="2300" dirty="0">
                   <a:solidFill>
                     <a:schemeClr val="dk1"/>
                   </a:solidFill>
                   <a:latin typeface="Arial"/>
                 </a:rPr>
-                <a:t>h₂ is robust to order-size variation ($1k – $100k): the slippage penalty keeps search focused on liquid, low-impact paths.</a:t>
-              </a:r>
-            </a:p>
-            <a:p>
-              <a:pPr marL="342900" indent="-342900">
-                <a:buFont typeface="Arial"/>
-                <a:buChar char="•"/>
-              </a:pPr>
-              <a:r>
-                <a:rPr lang="en-US" sz="2400" dirty="0">
-                  <a:solidFill>
-                    <a:schemeClr val="dk1"/>
-                  </a:solidFill>
-                  <a:latin typeface="Arial"/>
-                </a:rPr>
-                <a:t>Overnight stability: profit stays consistent across 7,200 runs with minimal variance — the A* framework is stable under live market conditions.</a:t>
-              </a:r>
-            </a:p>
-            <a:p>
-              <a:pPr marL="342900" indent="-342900">
-                <a:buFont typeface="Arial"/>
-                <a:buChar char="•"/>
-              </a:pPr>
-              <a:r>
-                <a:rPr lang="en-US" sz="2400" dirty="0">
-                  <a:solidFill>
-                    <a:schemeClr val="dk1"/>
-                  </a:solidFill>
-                  <a:latin typeface="Arial"/>
-                </a:rPr>
-                <a:t>FUTURE: asynchronous order-book pre-fetching to eliminate quote staleness.</a:t>
-              </a:r>
-            </a:p>
-            <a:p>
-              <a:pPr marL="342900" indent="-342900">
-                <a:buFont typeface="Arial"/>
-                <a:buChar char="•"/>
-              </a:pPr>
-              <a:r>
-                <a:rPr lang="en-US" sz="2400" dirty="0">
-                  <a:solidFill>
-                    <a:schemeClr val="dk1"/>
-                  </a:solidFill>
-                  <a:latin typeface="Arial"/>
-                </a:rPr>
-                <a:t>FUTURE: extension to DEX/AMM markets (Uniswap, Curve) with continuous pricing — replacing discrete fee tables with AMM invariants.</a:t>
+                <a:t>Future work: asynchronous order-book pre-fetching; extension to DEX / AMM markets (Uniswap, Curve) with continuous pricing invariants.</a:t>
               </a:r>
             </a:p>
             <a:p>
@@ -16378,7 +16022,7 @@
                   <a:cs typeface="Trebuchet MS"/>
                   <a:sym typeface="Trebuchet MS"/>
                 </a:rPr>
-                <a:t>Scaling &amp; Future Work</a:t>
+                <a:t>Code &amp; Demo</a:t>
               </a:r>
               <a:endParaRPr sz="1339" dirty="0"/>
             </a:p>
@@ -16446,7 +16090,7 @@
                 <a:cs typeface="Times"/>
                 <a:sym typeface="Times"/>
               </a:rPr>
-              <a:t>Canadian AI 2026  |  GSS Paper  |  Poster: 36 × 24 in</a:t>
+              <a:t>Canadian AI 2026  |  GSS Paper  |  36 × 24 in</a:t>
             </a:r>
             <a:endParaRPr sz="1148" dirty="0">
               <a:solidFill>
@@ -16524,13 +16168,225 @@
       </p:pic>
       <p:sp>
         <p:nvSpPr>
-          <p:cNvPr id="290" name="Label290"/>
+          <p:cNvPr id="300" name="Lbl300"/>
           <p:cNvSpPr txBox="1"/>
           <p:nvPr/>
         </p:nvSpPr>
         <p:spPr>
           <a:xfrm>
-            <a:off x="11350000" y="10300000"/>
+            <a:off x="1200000" y="4200000"/>
+            <a:ext cx="9200000" cy="1350000"/>
+          </a:xfrm>
+          <a:prstGeom prst="rect">
+            <a:avLst/>
+          </a:prstGeom>
+          <a:noFill/>
+          <a:ln>
+            <a:noFill/>
+          </a:ln>
+        </p:spPr>
+        <p:txBody>
+          <a:bodyPr wrap="square" anchor="ctr" anchorCtr="1"/>
+          <a:lstStyle/>
+          <a:p>
+            <a:pPr algn="ctr">
+              <a:buNone/>
+            </a:pPr>
+            <a:r>
+              <a:rPr lang="en-US" sz="8000" b="1" dirty="0">
+                <a:solidFill>
+                  <a:srgbClr val="CC0633"/>
+                </a:solidFill>
+                <a:latin typeface="Arial"/>
+              </a:rPr>
+              <a:t>$300 Billion+</a:t>
+            </a:r>
+          </a:p>
+        </p:txBody>
+      </p:sp>
+      <p:sp>
+        <p:nvSpPr>
+          <p:cNvPr id="301" name="Lbl301"/>
+          <p:cNvSpPr txBox="1"/>
+          <p:nvPr/>
+        </p:nvSpPr>
+        <p:spPr>
+          <a:xfrm>
+            <a:off x="1200000" y="5650000"/>
+            <a:ext cx="9200000" cy="700000"/>
+          </a:xfrm>
+          <a:prstGeom prst="rect">
+            <a:avLst/>
+          </a:prstGeom>
+          <a:noFill/>
+          <a:ln>
+            <a:noFill/>
+          </a:ln>
+        </p:spPr>
+        <p:txBody>
+          <a:bodyPr wrap="square" anchor="ctr" anchorCtr="1"/>
+          <a:lstStyle/>
+          <a:p>
+            <a:pPr algn="ctr">
+              <a:buNone/>
+            </a:pPr>
+            <a:r>
+              <a:rPr lang="en-US" sz="3000" b="0" dirty="0">
+                <a:solidFill>
+                  <a:srgbClr val="333333"/>
+                </a:solidFill>
+                <a:latin typeface="Arial"/>
+              </a:rPr>
+              <a:t>Global Stablecoin Market Cap</a:t>
+            </a:r>
+          </a:p>
+        </p:txBody>
+      </p:sp>
+      <p:sp>
+        <p:nvSpPr>
+          <p:cNvPr id="302" name="Lbl302"/>
+          <p:cNvSpPr txBox="1"/>
+          <p:nvPr/>
+        </p:nvSpPr>
+        <p:spPr>
+          <a:xfrm>
+            <a:off x="1200000" y="6500000"/>
+            <a:ext cx="9200000" cy="600000"/>
+          </a:xfrm>
+          <a:prstGeom prst="rect">
+            <a:avLst/>
+          </a:prstGeom>
+          <a:noFill/>
+          <a:ln>
+            <a:noFill/>
+          </a:ln>
+        </p:spPr>
+        <p:txBody>
+          <a:bodyPr wrap="square" anchor="ctr" anchorCtr="1"/>
+          <a:lstStyle/>
+          <a:p>
+            <a:pPr algn="ctr">
+              <a:buNone/>
+            </a:pPr>
+            <a:r>
+              <a:rPr lang="en-US" sz="2800" b="1" dirty="0">
+                <a:solidFill>
+                  <a:srgbClr val="CC0633"/>
+                </a:solidFill>
+                <a:latin typeface="Arial"/>
+              </a:rPr>
+              <a:t>Novel Proprietary Dataset</a:t>
+            </a:r>
+          </a:p>
+        </p:txBody>
+      </p:sp>
+      <p:sp>
+        <p:nvSpPr>
+          <p:cNvPr id="303" name="Lbl303"/>
+          <p:cNvSpPr txBox="1"/>
+          <p:nvPr/>
+        </p:nvSpPr>
+        <p:spPr>
+          <a:xfrm>
+            <a:off x="1200000" y="7150000"/>
+            <a:ext cx="9200000" cy="600000"/>
+          </a:xfrm>
+          <a:prstGeom prst="rect">
+            <a:avLst/>
+          </a:prstGeom>
+          <a:noFill/>
+          <a:ln>
+            <a:noFill/>
+          </a:ln>
+        </p:spPr>
+        <p:txBody>
+          <a:bodyPr wrap="square" anchor="ctr" anchorCtr="1"/>
+          <a:lstStyle/>
+          <a:p>
+            <a:pPr algn="ctr">
+              <a:buNone/>
+            </a:pPr>
+            <a:r>
+              <a:rPr lang="en-US" sz="2500" b="0" dirty="0">
+                <a:solidFill>
+                  <a:srgbClr val="333333"/>
+                </a:solidFill>
+                <a:latin typeface="Arial"/>
+              </a:rPr>
+              <a:t>12 Exchanges  ·  9 Stablecoins  ·  7,200 Search Instances</a:t>
+            </a:r>
+          </a:p>
+        </p:txBody>
+      </p:sp>
+      <p:pic>
+        <p:nvPicPr>
+          <p:cNvPr id="304" name="FullGraph"/>
+          <p:cNvPicPr/>
+          <p:nvPr/>
+        </p:nvPicPr>
+        <p:blipFill>
+          <a:blip r:embed="rId5"/>
+          <a:stretch>
+            <a:fillRect/>
+          </a:stretch>
+        </p:blipFill>
+        <p:spPr>
+          <a:xfrm>
+            <a:off x="1200000" y="12175957"/>
+            <a:ext cx="9200000" cy="7365732"/>
+          </a:xfrm>
+          <a:prstGeom prst="rect">
+            <a:avLst/>
+          </a:prstGeom>
+        </p:spPr>
+      </p:pic>
+      <p:sp>
+        <p:nvSpPr>
+          <p:cNvPr id="305" name="Cap305"/>
+          <p:cNvSpPr txBox="1"/>
+          <p:nvPr/>
+        </p:nvSpPr>
+        <p:spPr>
+          <a:xfrm>
+            <a:off x="1200000" y="19576689"/>
+            <a:ext cx="9200000" cy="370000"/>
+          </a:xfrm>
+          <a:prstGeom prst="rect">
+            <a:avLst/>
+          </a:prstGeom>
+          <a:noFill/>
+          <a:ln>
+            <a:noFill/>
+          </a:ln>
+        </p:spPr>
+        <p:txBody>
+          <a:bodyPr wrap="square" anchor="ctr"/>
+          <a:lstStyle/>
+          <a:p>
+            <a:pPr algn="ctr">
+              <a:buNone/>
+            </a:pPr>
+            <a:r>
+              <a:rPr lang="en-US" sz="1700" i="1" dirty="0">
+                <a:solidFill>
+                  <a:srgbClr val="555555"/>
+                </a:solidFill>
+                <a:latin typeface="Arial"/>
+              </a:rPr>
+              <a:t>Stablecoin arbitrage graph: 9 of 12 exchanges shown</a:t>
+            </a:r>
+          </a:p>
+        </p:txBody>
+      </p:sp>
+      <p:sp>
+        <p:nvSpPr>
+          <p:cNvPr id="306" name="Lbl306"/>
+          <p:cNvSpPr txBox="1"/>
+          <p:nvPr/>
+        </p:nvSpPr>
+        <p:spPr>
+          <a:xfrm>
+            <a:off x="11350000" y="8420000"/>
             <a:ext cx="9200000" cy="500000"/>
           </a:xfrm>
           <a:prstGeom prst="rect">
@@ -16555,36 +16411,14 @@
                 </a:solidFill>
                 <a:latin typeface="Arial"/>
               </a:rPr>
-              <a:t>Key Cost Equations</a:t>
+              <a:t>3 Novel Heuristics (below)</a:t>
             </a:r>
           </a:p>
         </p:txBody>
       </p:sp>
       <p:pic>
         <p:nvPicPr>
-          <p:cNvPr id="300" name="eq1"/>
-          <p:cNvPicPr/>
-          <p:nvPr/>
-        </p:nvPicPr>
-        <p:blipFill>
-          <a:blip r:embed="rId5"/>
-          <a:stretch>
-            <a:fillRect/>
-          </a:stretch>
-        </p:blipFill>
-        <p:spPr>
-          <a:xfrm>
-            <a:off x="11350000" y="10600000"/>
-            <a:ext cx="9200000" cy="820000"/>
-          </a:xfrm>
-          <a:prstGeom prst="rect">
-            <a:avLst/>
-          </a:prstGeom>
-        </p:spPr>
-      </p:pic>
-      <p:pic>
-        <p:nvPicPr>
-          <p:cNvPr id="301" name="eq2"/>
+          <p:cNvPr id="307" name="eq_main"/>
           <p:cNvPicPr/>
           <p:nvPr/>
         </p:nvPicPr>
@@ -16596,8 +16430,8 @@
         </p:blipFill>
         <p:spPr>
           <a:xfrm>
-            <a:off x="11350000" y="11520000"/>
-            <a:ext cx="9200000" cy="820000"/>
+            <a:off x="11350000" y="7200000"/>
+            <a:ext cx="9200000" cy="1100000"/>
           </a:xfrm>
           <a:prstGeom prst="rect">
             <a:avLst/>
@@ -16606,7 +16440,7 @@
       </p:pic>
       <p:pic>
         <p:nvPicPr>
-          <p:cNvPr id="302" name="eq3"/>
+          <p:cNvPr id="308" name="eq_h1"/>
           <p:cNvPicPr/>
           <p:nvPr/>
         </p:nvPicPr>
@@ -16618,8 +16452,74 @@
         </p:blipFill>
         <p:spPr>
           <a:xfrm>
-            <a:off x="11350000" y="12440000"/>
-            <a:ext cx="9200000" cy="820000"/>
+            <a:off x="11350000" y="9040000"/>
+            <a:ext cx="9200000" cy="1050000"/>
+          </a:xfrm>
+          <a:prstGeom prst="rect">
+            <a:avLst/>
+          </a:prstGeom>
+        </p:spPr>
+      </p:pic>
+      <p:pic>
+        <p:nvPicPr>
+          <p:cNvPr id="309" name="eq_h2"/>
+          <p:cNvPicPr/>
+          <p:nvPr/>
+        </p:nvPicPr>
+        <p:blipFill>
+          <a:blip r:embed="rId8"/>
+          <a:stretch>
+            <a:fillRect/>
+          </a:stretch>
+        </p:blipFill>
+        <p:spPr>
+          <a:xfrm>
+            <a:off x="11350000" y="10210000"/>
+            <a:ext cx="9200000" cy="1050000"/>
+          </a:xfrm>
+          <a:prstGeom prst="rect">
+            <a:avLst/>
+          </a:prstGeom>
+        </p:spPr>
+      </p:pic>
+      <p:pic>
+        <p:nvPicPr>
+          <p:cNvPr id="310" name="eq_h3"/>
+          <p:cNvPicPr/>
+          <p:nvPr/>
+        </p:nvPicPr>
+        <p:blipFill>
+          <a:blip r:embed="rId9"/>
+          <a:stretch>
+            <a:fillRect/>
+          </a:stretch>
+        </p:blipFill>
+        <p:spPr>
+          <a:xfrm>
+            <a:off x="11350000" y="11380000"/>
+            <a:ext cx="9200000" cy="1050000"/>
+          </a:xfrm>
+          <a:prstGeom prst="rect">
+            <a:avLst/>
+          </a:prstGeom>
+        </p:spPr>
+      </p:pic>
+      <p:pic>
+        <p:nvPicPr>
+          <p:cNvPr id="311" name="CameraReadySuccesfulPathProfit"/>
+          <p:cNvPicPr/>
+          <p:nvPr/>
+        </p:nvPicPr>
+        <p:blipFill>
+          <a:blip r:embed="rId10"/>
+          <a:stretch>
+            <a:fillRect/>
+          </a:stretch>
+        </p:blipFill>
+        <p:spPr>
+          <a:xfrm>
+            <a:off x="11350000" y="12750000"/>
+            <a:ext cx="9200000" cy="5431325"/>
           </a:xfrm>
           <a:prstGeom prst="rect">
             <a:avLst/>
@@ -16628,14 +16528,14 @@
       </p:pic>
       <p:sp>
         <p:nvSpPr>
-          <p:cNvPr id="303" name="Caption303"/>
+          <p:cNvPr id="312" name="Cap312"/>
           <p:cNvSpPr txBox="1"/>
           <p:nvPr/>
         </p:nvSpPr>
         <p:spPr>
           <a:xfrm>
-            <a:off x="1200000" y="19125457"/>
-            <a:ext cx="9200000" cy="380000"/>
+            <a:off x="11350000" y="18216325"/>
+            <a:ext cx="9200000" cy="370000"/>
           </a:xfrm>
           <a:prstGeom prst="rect">
             <a:avLst/>
@@ -16659,27 +16559,27 @@
                 </a:solidFill>
                 <a:latin typeface="Arial"/>
               </a:rPr>
-              <a:t>Fig. 3 — Success rate and profit by heuristic</a:t>
+              <a:t>Fig. 1b — A profitable path: Kraken → KuCoin (USDT → TUSD)</a:t>
             </a:r>
           </a:p>
         </p:txBody>
       </p:sp>
       <p:pic>
         <p:nvPicPr>
-          <p:cNvPr id="304" name="fig04_success_rate"/>
+          <p:cNvPr id="313" name="fig01_node_expansion_bar"/>
           <p:cNvPicPr/>
           <p:nvPr/>
         </p:nvPicPr>
         <p:blipFill>
-          <a:blip r:embed="rId8"/>
+          <a:blip r:embed="rId11"/>
           <a:stretch>
             <a:fillRect/>
           </a:stretch>
         </p:blipFill>
         <p:spPr>
           <a:xfrm>
-            <a:off x="1200000" y="13500000"/>
-            <a:ext cx="9200000" cy="5585457"/>
+            <a:off x="24637755" y="7500000"/>
+            <a:ext cx="4324489" cy="3100000"/>
           </a:xfrm>
           <a:prstGeom prst="rect">
             <a:avLst/>
@@ -16688,14 +16588,14 @@
       </p:pic>
       <p:sp>
         <p:nvSpPr>
-          <p:cNvPr id="305" name="Caption305"/>
+          <p:cNvPr id="314" name="Cap314"/>
           <p:cNvSpPr txBox="1"/>
           <p:nvPr/>
         </p:nvSpPr>
         <p:spPr>
           <a:xfrm>
-            <a:off x="22200000" y="11240000"/>
-            <a:ext cx="9200000" cy="380000"/>
+            <a:off x="24637755" y="10635000"/>
+            <a:ext cx="4324489" cy="370000"/>
           </a:xfrm>
           <a:prstGeom prst="rect">
             <a:avLst/>
@@ -16726,20 +16626,20 @@
       </p:sp>
       <p:pic>
         <p:nvPicPr>
-          <p:cNvPr id="306" name="fig01_node_expansion_bar"/>
+          <p:cNvPr id="315" name="qr_github"/>
           <p:cNvPicPr/>
           <p:nvPr/>
         </p:nvPicPr>
         <p:blipFill>
-          <a:blip r:embed="rId9"/>
+          <a:blip r:embed="rId12"/>
           <a:stretch>
             <a:fillRect/>
           </a:stretch>
         </p:blipFill>
         <p:spPr>
           <a:xfrm>
-            <a:off x="22200000" y="8700000"/>
-            <a:ext cx="9200000" cy="2500000"/>
+            <a:off x="24400000" y="13891689"/>
+            <a:ext cx="4800000" cy="4800000"/>
           </a:xfrm>
           <a:prstGeom prst="rect">
             <a:avLst/>
@@ -16748,14 +16648,14 @@
       </p:pic>
       <p:sp>
         <p:nvSpPr>
-          <p:cNvPr id="307" name="Caption307"/>
+          <p:cNvPr id="316" name="Cap316"/>
           <p:cNvSpPr txBox="1"/>
           <p:nvPr/>
         </p:nvSpPr>
         <p:spPr>
           <a:xfrm>
-            <a:off x="22200000" y="16340000"/>
-            <a:ext cx="9200000" cy="380000"/>
+            <a:off x="24400000" y="18726689"/>
+            <a:ext cx="4800000" cy="370000"/>
           </a:xfrm>
           <a:prstGeom prst="rect">
             <a:avLst/>
@@ -16779,93 +16679,11 @@
                 </a:solidFill>
                 <a:latin typeface="Arial"/>
               </a:rPr>
-              <a:t>Fig. 2b — Expansions vs. graph size (4 → 12 exchanges)</a:t>
+              <a:t>Scan for source code &amp; video demo</a:t>
             </a:r>
           </a:p>
         </p:txBody>
       </p:sp>
-      <p:pic>
-        <p:nvPicPr>
-          <p:cNvPr id="308" name="fig08_graph_scaling_expansions"/>
-          <p:cNvPicPr/>
-          <p:nvPr/>
-        </p:nvPicPr>
-        <p:blipFill>
-          <a:blip r:embed="rId10"/>
-          <a:stretch>
-            <a:fillRect/>
-          </a:stretch>
-        </p:blipFill>
-        <p:spPr>
-          <a:xfrm>
-            <a:off x="22200000" y="13700000"/>
-            <a:ext cx="9200000" cy="2600000"/>
-          </a:xfrm>
-          <a:prstGeom prst="rect">
-            <a:avLst/>
-          </a:prstGeom>
-        </p:spPr>
-      </p:pic>
-      <p:sp>
-        <p:nvSpPr>
-          <p:cNvPr id="309" name="Caption309"/>
-          <p:cNvSpPr txBox="1"/>
-          <p:nvPr/>
-        </p:nvSpPr>
-        <p:spPr>
-          <a:xfrm>
-            <a:off x="11350000" y="18971325"/>
-            <a:ext cx="9200000" cy="380000"/>
-          </a:xfrm>
-          <a:prstGeom prst="rect">
-            <a:avLst/>
-          </a:prstGeom>
-          <a:noFill/>
-          <a:ln>
-            <a:noFill/>
-          </a:ln>
-        </p:spPr>
-        <p:txBody>
-          <a:bodyPr wrap="square" anchor="ctr"/>
-          <a:lstStyle/>
-          <a:p>
-            <a:pPr algn="ctr">
-              <a:buNone/>
-            </a:pPr>
-            <a:r>
-              <a:rPr lang="en-US" sz="1700" i="1" dirty="0">
-                <a:solidFill>
-                  <a:srgbClr val="555555"/>
-                </a:solidFill>
-                <a:latin typeface="Arial"/>
-              </a:rPr>
-              <a:t>Fig. 1b — Discovered profitable path: Kraken → KuCoin → KuCoin (USDT → TUSD)</a:t>
-            </a:r>
-          </a:p>
-        </p:txBody>
-      </p:sp>
-      <p:pic>
-        <p:nvPicPr>
-          <p:cNvPr id="310" name="CameraReadySuccesfulPathProfit"/>
-          <p:cNvPicPr/>
-          <p:nvPr/>
-        </p:nvPicPr>
-        <p:blipFill>
-          <a:blip r:embed="rId11"/>
-          <a:stretch>
-            <a:fillRect/>
-          </a:stretch>
-        </p:blipFill>
-        <p:spPr>
-          <a:xfrm>
-            <a:off x="11350000" y="13500000"/>
-            <a:ext cx="9200000" cy="5431325"/>
-          </a:xfrm>
-          <a:prstGeom prst="rect">
-            <a:avLst/>
-          </a:prstGeom>
-        </p:spPr>
-      </p:pic>
     </p:spTree>
   </p:cSld>
   <p:clrMapOvr>

--- a/docs/latex/StablecoinArbitrage_GSS2026/poster/poster_filled.pptx
+++ b/docs/latex/StablecoinArbitrage_GSS2026/poster/poster_filled.pptx
@@ -14192,7 +14192,7 @@
               <a:buSzPts val="6000"/>
             </a:pPr>
             <a:r>
-              <a:rPr lang="en-US" sz="5737" dirty="0">
+              <a:rPr lang="en-US" sz="5000" dirty="0">
                 <a:solidFill>
                   <a:srgbClr val="0070C0"/>
                 </a:solidFill>
@@ -14298,9 +14298,8 @@
             </a:bodyPr>
             <a:lstStyle/>
             <a:p>
-              <a:pPr marL="342900" indent="-342900">
-                <a:buFont typeface="Arial"/>
-                <a:buChar char="•"/>
+              <a:pPr>
+                <a:buNone/>
               </a:pPr>
               <a:r>
                 <a:rPr lang="en-US" sz="2400" dirty="0">
@@ -14309,13 +14308,18 @@
                   </a:solidFill>
                   <a:latin typeface="Arial"/>
                 </a:rPr>
-                <a:t>$300 Billion+ stablecoin market — persistent price gaps across exchanges</a:t>
+                <a:t>Cross-exchange cryptocurrency arbitrage profits from price discrepancies across venues, yet existing approaches use negative-cycle detection that targets opportunity identification rather than execution feasibility. We introduce an execution-aware pathfinding framework using A* search with domain-specific heuristics, applied to stablecoins — an asset class exceeding $300 B in market cap that bridges cryptocurrency and fiat currency.</a:t>
               </a:r>
             </a:p>
             <a:p>
-              <a:pPr marL="342900" indent="-342900">
-                <a:buFont typeface="Arial"/>
-                <a:buChar char="•"/>
+              <a:pPr>
+                <a:buNone/>
+              </a:pPr>
+              <a:endParaRPr sz="900"/>
+            </a:p>
+            <a:p>
+              <a:pPr>
+                <a:buNone/>
               </a:pPr>
               <a:r>
                 <a:rPr lang="en-US" sz="2400" dirty="0">
@@ -14324,22 +14328,7 @@
                   </a:solidFill>
                   <a:latin typeface="Arial"/>
                 </a:rPr>
-                <a:t>Novel proprietary CEX dataset: 12 exchanges · 9 stablecoins · 7,200 search instances</a:t>
-              </a:r>
-            </a:p>
-            <a:p>
-              <a:pPr marL="342900" indent="-342900">
-                <a:buFont typeface="Arial"/>
-                <a:buChar char="•"/>
-              </a:pPr>
-              <a:r>
-                <a:rPr lang="en-US" sz="2400" dirty="0">
-                  <a:solidFill>
-                    <a:schemeClr val="dk1"/>
-                  </a:solidFill>
-                  <a:latin typeface="Arial"/>
-                </a:rPr>
-                <a:t>Execution-unaware methods miss real profit: fees, slippage, gas, latency &amp; reliability all matter</a:t>
+                <a:t>We collect live market data from 12 major centralized exchanges (CEX) via CCXT, covering 9 stablecoin symbols (USDT, USDC, DAI, TUSD, FDUSD, and more). The problem is modelled as a weighted directed graph of up to 41 nodes and 864 edges where each node is an (exchange, stablecoin) pair and each edge encodes real-world costs: trading fees, order-book slippage, gas, transfer delays, and exchange reliability. This constitutes a novel proprietary CEX stablecoin dataset evaluated over 7,200 search instances.</a:t>
               </a:r>
             </a:p>
             <a:p>
@@ -14536,7 +14525,7 @@
                   <a:cs typeface="Trebuchet MS"/>
                   <a:sym typeface="Trebuchet MS"/>
                 </a:rPr>
-                <a:t>The $300 B Opportunity</a:t>
+                <a:t>Abstract: the $300B Opportunity</a:t>
               </a:r>
               <a:endParaRPr sz="1339" dirty="0"/>
             </a:p>
@@ -15233,7 +15222,27 @@
                   </a:solidFill>
                   <a:latin typeface="Arial"/>
                 </a:rPr>
-                <a:t>Subgraph of the stablecoin arbitrage network (9 of 12 exchanges). Nodes = (exchange, coin); solid edges = intra-exchange trades; light edges = cross-exchange transfers.</a:t>
+                <a:t>Subgraph of the stablecoin arbitrage network (9 of 12 exchanges shown). Nodes = (exchange, coin); solid edges = intra-exchange trades; light edges = same-coin cross-exchange transfers.</a:t>
+              </a:r>
+            </a:p>
+            <a:p>
+              <a:pPr>
+                <a:buNone/>
+              </a:pPr>
+              <a:endParaRPr sz="700"/>
+            </a:p>
+            <a:p>
+              <a:pPr>
+                <a:buNone/>
+              </a:pPr>
+              <a:r>
+                <a:rPr lang="en-US" sz="2200" dirty="0">
+                  <a:solidFill>
+                    <a:schemeClr val="dk1"/>
+                  </a:solidFill>
+                  <a:latin typeface="Arial"/>
+                </a:rPr>
+                <a:t>Each intra-exchange edge represents a spot trade and carries a taker fee, order-book slippage penalty, and venue reliability discount. Each cross-exchange edge represents a stablecoin withdrawal and carries a gas fee plus an estimated blockchain-confirmation latency.</a:t>
               </a:r>
             </a:p>
             <a:p>
@@ -16166,161 +16175,9 @@
           </a:prstGeom>
         </p:spPr>
       </p:pic>
-      <p:sp>
-        <p:nvSpPr>
-          <p:cNvPr id="300" name="Lbl300"/>
-          <p:cNvSpPr txBox="1"/>
-          <p:nvPr/>
-        </p:nvSpPr>
-        <p:spPr>
-          <a:xfrm>
-            <a:off x="1200000" y="4200000"/>
-            <a:ext cx="9200000" cy="1350000"/>
-          </a:xfrm>
-          <a:prstGeom prst="rect">
-            <a:avLst/>
-          </a:prstGeom>
-          <a:noFill/>
-          <a:ln>
-            <a:noFill/>
-          </a:ln>
-        </p:spPr>
-        <p:txBody>
-          <a:bodyPr wrap="square" anchor="ctr" anchorCtr="1"/>
-          <a:lstStyle/>
-          <a:p>
-            <a:pPr algn="ctr">
-              <a:buNone/>
-            </a:pPr>
-            <a:r>
-              <a:rPr lang="en-US" sz="8000" b="1" dirty="0">
-                <a:solidFill>
-                  <a:srgbClr val="CC0633"/>
-                </a:solidFill>
-                <a:latin typeface="Arial"/>
-              </a:rPr>
-              <a:t>$300 Billion+</a:t>
-            </a:r>
-          </a:p>
-        </p:txBody>
-      </p:sp>
-      <p:sp>
-        <p:nvSpPr>
-          <p:cNvPr id="301" name="Lbl301"/>
-          <p:cNvSpPr txBox="1"/>
-          <p:nvPr/>
-        </p:nvSpPr>
-        <p:spPr>
-          <a:xfrm>
-            <a:off x="1200000" y="5650000"/>
-            <a:ext cx="9200000" cy="700000"/>
-          </a:xfrm>
-          <a:prstGeom prst="rect">
-            <a:avLst/>
-          </a:prstGeom>
-          <a:noFill/>
-          <a:ln>
-            <a:noFill/>
-          </a:ln>
-        </p:spPr>
-        <p:txBody>
-          <a:bodyPr wrap="square" anchor="ctr" anchorCtr="1"/>
-          <a:lstStyle/>
-          <a:p>
-            <a:pPr algn="ctr">
-              <a:buNone/>
-            </a:pPr>
-            <a:r>
-              <a:rPr lang="en-US" sz="3000" b="0" dirty="0">
-                <a:solidFill>
-                  <a:srgbClr val="333333"/>
-                </a:solidFill>
-                <a:latin typeface="Arial"/>
-              </a:rPr>
-              <a:t>Global Stablecoin Market Cap</a:t>
-            </a:r>
-          </a:p>
-        </p:txBody>
-      </p:sp>
-      <p:sp>
-        <p:nvSpPr>
-          <p:cNvPr id="302" name="Lbl302"/>
-          <p:cNvSpPr txBox="1"/>
-          <p:nvPr/>
-        </p:nvSpPr>
-        <p:spPr>
-          <a:xfrm>
-            <a:off x="1200000" y="6500000"/>
-            <a:ext cx="9200000" cy="600000"/>
-          </a:xfrm>
-          <a:prstGeom prst="rect">
-            <a:avLst/>
-          </a:prstGeom>
-          <a:noFill/>
-          <a:ln>
-            <a:noFill/>
-          </a:ln>
-        </p:spPr>
-        <p:txBody>
-          <a:bodyPr wrap="square" anchor="ctr" anchorCtr="1"/>
-          <a:lstStyle/>
-          <a:p>
-            <a:pPr algn="ctr">
-              <a:buNone/>
-            </a:pPr>
-            <a:r>
-              <a:rPr lang="en-US" sz="2800" b="1" dirty="0">
-                <a:solidFill>
-                  <a:srgbClr val="CC0633"/>
-                </a:solidFill>
-                <a:latin typeface="Arial"/>
-              </a:rPr>
-              <a:t>Novel Proprietary Dataset</a:t>
-            </a:r>
-          </a:p>
-        </p:txBody>
-      </p:sp>
-      <p:sp>
-        <p:nvSpPr>
-          <p:cNvPr id="303" name="Lbl303"/>
-          <p:cNvSpPr txBox="1"/>
-          <p:nvPr/>
-        </p:nvSpPr>
-        <p:spPr>
-          <a:xfrm>
-            <a:off x="1200000" y="7150000"/>
-            <a:ext cx="9200000" cy="600000"/>
-          </a:xfrm>
-          <a:prstGeom prst="rect">
-            <a:avLst/>
-          </a:prstGeom>
-          <a:noFill/>
-          <a:ln>
-            <a:noFill/>
-          </a:ln>
-        </p:spPr>
-        <p:txBody>
-          <a:bodyPr wrap="square" anchor="ctr" anchorCtr="1"/>
-          <a:lstStyle/>
-          <a:p>
-            <a:pPr algn="ctr">
-              <a:buNone/>
-            </a:pPr>
-            <a:r>
-              <a:rPr lang="en-US" sz="2500" b="0" dirty="0">
-                <a:solidFill>
-                  <a:srgbClr val="333333"/>
-                </a:solidFill>
-                <a:latin typeface="Arial"/>
-              </a:rPr>
-              <a:t>12 Exchanges  ·  9 Stablecoins  ·  7,200 Search Instances</a:t>
-            </a:r>
-          </a:p>
-        </p:txBody>
-      </p:sp>
       <p:pic>
         <p:nvPicPr>
-          <p:cNvPr id="304" name="FullGraph"/>
+          <p:cNvPr id="300" name="FullGraph"/>
           <p:cNvPicPr/>
           <p:nvPr/>
         </p:nvPicPr>
@@ -16342,7 +16199,7 @@
       </p:pic>
       <p:sp>
         <p:nvSpPr>
-          <p:cNvPr id="305" name="Cap305"/>
+          <p:cNvPr id="301" name="Cap301"/>
           <p:cNvSpPr txBox="1"/>
           <p:nvPr/>
         </p:nvSpPr>
@@ -16380,7 +16237,7 @@
       </p:sp>
       <p:sp>
         <p:nvSpPr>
-          <p:cNvPr id="306" name="Lbl306"/>
+          <p:cNvPr id="302" name="Lbl302"/>
           <p:cNvSpPr txBox="1"/>
           <p:nvPr/>
         </p:nvSpPr>
@@ -16418,7 +16275,7 @@
       </p:sp>
       <p:pic>
         <p:nvPicPr>
-          <p:cNvPr id="307" name="eq_main"/>
+          <p:cNvPr id="303" name="eq_main"/>
           <p:cNvPicPr/>
           <p:nvPr/>
         </p:nvPicPr>
@@ -16440,7 +16297,7 @@
       </p:pic>
       <p:pic>
         <p:nvPicPr>
-          <p:cNvPr id="308" name="eq_h1"/>
+          <p:cNvPr id="304" name="eq_h1"/>
           <p:cNvPicPr/>
           <p:nvPr/>
         </p:nvPicPr>
@@ -16462,7 +16319,7 @@
       </p:pic>
       <p:pic>
         <p:nvPicPr>
-          <p:cNvPr id="309" name="eq_h2"/>
+          <p:cNvPr id="305" name="eq_h2"/>
           <p:cNvPicPr/>
           <p:nvPr/>
         </p:nvPicPr>
@@ -16484,7 +16341,7 @@
       </p:pic>
       <p:pic>
         <p:nvPicPr>
-          <p:cNvPr id="310" name="eq_h3"/>
+          <p:cNvPr id="306" name="eq_h3"/>
           <p:cNvPicPr/>
           <p:nvPr/>
         </p:nvPicPr>
@@ -16506,7 +16363,7 @@
       </p:pic>
       <p:pic>
         <p:nvPicPr>
-          <p:cNvPr id="311" name="CameraReadySuccesfulPathProfit"/>
+          <p:cNvPr id="307" name="CameraReadySuccesfulPathProfit"/>
           <p:cNvPicPr/>
           <p:nvPr/>
         </p:nvPicPr>
@@ -16528,7 +16385,7 @@
       </p:pic>
       <p:sp>
         <p:nvSpPr>
-          <p:cNvPr id="312" name="Cap312"/>
+          <p:cNvPr id="308" name="Cap308"/>
           <p:cNvSpPr txBox="1"/>
           <p:nvPr/>
         </p:nvSpPr>
@@ -16566,7 +16423,7 @@
       </p:sp>
       <p:pic>
         <p:nvPicPr>
-          <p:cNvPr id="313" name="fig01_node_expansion_bar"/>
+          <p:cNvPr id="309" name="fig01_node_expansion_bar"/>
           <p:cNvPicPr/>
           <p:nvPr/>
         </p:nvPicPr>
@@ -16588,7 +16445,7 @@
       </p:pic>
       <p:sp>
         <p:nvSpPr>
-          <p:cNvPr id="314" name="Cap314"/>
+          <p:cNvPr id="310" name="Cap310"/>
           <p:cNvSpPr txBox="1"/>
           <p:nvPr/>
         </p:nvSpPr>
@@ -16626,7 +16483,7 @@
       </p:sp>
       <p:pic>
         <p:nvPicPr>
-          <p:cNvPr id="315" name="qr_github"/>
+          <p:cNvPr id="311" name="qr_github"/>
           <p:cNvPicPr/>
           <p:nvPr/>
         </p:nvPicPr>
@@ -16648,7 +16505,7 @@
       </p:pic>
       <p:sp>
         <p:nvSpPr>
-          <p:cNvPr id="316" name="Cap316"/>
+          <p:cNvPr id="312" name="Cap312"/>
           <p:cNvSpPr txBox="1"/>
           <p:nvPr/>
         </p:nvSpPr>

--- a/docs/latex/StablecoinArbitrage_GSS2026/poster/poster_filled.pptx
+++ b/docs/latex/StablecoinArbitrage_GSS2026/poster/poster_filled.pptx
@@ -14308,7 +14308,7 @@
                   </a:solidFill>
                   <a:latin typeface="Arial"/>
                 </a:rPr>
-                <a:t>Cross-exchange cryptocurrency arbitrage profits from price discrepancies across venues, yet existing approaches use negative-cycle detection that targets opportunity identification rather than execution feasibility. We introduce an execution-aware pathfinding framework using A* search with domain-specific heuristics, applied to stablecoins — an asset class exceeding $300 B in market cap that bridges cryptocurrency and fiat currency.</a:t>
+                <a:t>Cross-exchange cryptocurrency arbitrage profits from price discrepancies between venues, yet existing approaches use negative-cycle detection targeting opportunity identification rather than execution feasibility. We introduce an execution-aware A* pathfinding framework applied to stablecoins, an asset class exceeding $300 B in market cap that bridges cryptocurrency and fiat currency.</a:t>
               </a:r>
             </a:p>
             <a:p>
@@ -14328,7 +14328,7 @@
                   </a:solidFill>
                   <a:latin typeface="Arial"/>
                 </a:rPr>
-                <a:t>We collect live market data from 12 major centralized exchanges (CEX) via CCXT, covering 9 stablecoin symbols (USDT, USDC, DAI, TUSD, FDUSD, and more). The problem is modelled as a weighted directed graph of up to 41 nodes and 864 edges where each node is an (exchange, stablecoin) pair and each edge encodes real-world costs: trading fees, order-book slippage, gas, transfer delays, and exchange reliability. This constitutes a novel proprietary CEX stablecoin dataset evaluated over 7,200 search instances.</a:t>
+                <a:t>Live market data is collected from 12 major centralized exchanges via CCXT, covering 9 stablecoin symbols (USDT, USDC, DAI, TUSD, FDUSD, and more). The problem is modelled as a weighted directed graph (up to 41 nodes, 864 edges) where each node is an (exchange, stablecoin) pair and each edge encodes fees, slippage, gas, transfer delays, and venue reliability. This novel proprietary CEX dataset spans 7,200 search instances.</a:t>
               </a:r>
             </a:p>
             <a:p>
@@ -14570,7 +14570,7 @@
                 </a:solidFill>
                 <a:latin typeface="Arial"/>
               </a:rPr>
-              <a:t>Weighted directed graph: nodes = (exchange, stablecoin) pairs</a:t>
+              <a:t>Graph G=(V,E): nodes are (exchange, stablecoin) pairs; intra-exchange edges are spot trades, inter-exchange edges are same-coin cross-venue stablecoin transfers.</a:t>
             </a:r>
           </a:p>
           <a:p>
@@ -14585,7 +14585,7 @@
                 </a:solidFill>
                 <a:latin typeface="Arial"/>
               </a:rPr>
-              <a:t>Edge weight w(e) = −log r(e) bundles fees, slippage, gas, latency &amp; reliability</a:t>
+              <a:t>Edge weight w(e) = -log r(e); effective rate r(e) = (1-fee)(1-slippage)(1-gas) x reliability, converting all execution costs into a single multiplicative model.</a:t>
             </a:r>
           </a:p>
           <a:p>
@@ -14600,7 +14600,37 @@
                 </a:solidFill>
                 <a:latin typeface="Arial"/>
               </a:rPr>
-              <a:t>A* finds executable paths maximising USD profit under real-world constraints</a:t>
+              <a:t>Open-path goal: any node where final USD value exceeds start capital. No closed cycle is required because all assets are USD-pegged stablecoins (within +/-2%).</a:t>
+            </a:r>
+          </a:p>
+          <a:p>
+            <a:pPr marL="342900" indent="-342900">
+              <a:buFont typeface="Arial"/>
+              <a:buChar char="•"/>
+            </a:pPr>
+            <a:r>
+              <a:rPr lang="en-US" sz="2400" dirty="0">
+                <a:solidFill>
+                  <a:schemeClr val="dk1"/>
+                </a:solidFill>
+                <a:latin typeface="Arial"/>
+              </a:rPr>
+              <a:t>A* with f(n) = g(n) + h(n); terminates when a profitable path is found, the frontier is exhausted, or depth/time limits are reached. Search is not complete by design.</a:t>
+            </a:r>
+          </a:p>
+          <a:p>
+            <a:pPr marL="342900" indent="-342900">
+              <a:buFont typeface="Arial"/>
+              <a:buChar char="•"/>
+            </a:pPr>
+            <a:r>
+              <a:rPr lang="en-US" sz="2400" dirty="0">
+                <a:solidFill>
+                  <a:schemeClr val="dk1"/>
+                </a:solidFill>
+                <a:latin typeface="Arial"/>
+              </a:rPr>
+              <a:t>A parallelized multi-start baseline (k=3 random A* launches) is evaluated alongside three novel guidance heuristics across 7,200 overnight search instances.</a:t>
             </a:r>
           </a:p>
           <a:p>
@@ -16189,7 +16219,7 @@
         </p:blipFill>
         <p:spPr>
           <a:xfrm>
-            <a:off x="1200000" y="12175957"/>
+            <a:off x="1200000" y="12425957"/>
             <a:ext cx="9200000" cy="7365732"/>
           </a:xfrm>
           <a:prstGeom prst="rect">
@@ -16205,7 +16235,7 @@
         </p:nvSpPr>
         <p:spPr>
           <a:xfrm>
-            <a:off x="1200000" y="19576689"/>
+            <a:off x="1200000" y="19826689"/>
             <a:ext cx="9200000" cy="370000"/>
           </a:xfrm>
           <a:prstGeom prst="rect">
@@ -16243,8 +16273,8 @@
         </p:nvSpPr>
         <p:spPr>
           <a:xfrm>
-            <a:off x="11350000" y="8420000"/>
-            <a:ext cx="9200000" cy="500000"/>
+            <a:off x="11350000" y="8650000"/>
+            <a:ext cx="9200000" cy="550000"/>
           </a:xfrm>
           <a:prstGeom prst="rect">
             <a:avLst/>
@@ -16262,20 +16292,58 @@
               <a:buNone/>
             </a:pPr>
             <a:r>
-              <a:rPr lang="en-US" sz="2700" b="1" dirty="0">
-                <a:solidFill>
-                  <a:srgbClr val="CC0633"/>
+              <a:rPr lang="en-US" sz="2300" b="0" dirty="0">
+                <a:solidFill>
+                  <a:srgbClr val="333333"/>
                 </a:solidFill>
                 <a:latin typeface="Arial"/>
               </a:rPr>
-              <a:t>3 Novel Heuristics (below)</a:t>
+              <a:t>The edge weight w(e) encodes all execution costs; each heuristic below provides domain guidance to steer A* toward low-cost, profitable paths.</a:t>
+            </a:r>
+          </a:p>
+        </p:txBody>
+      </p:sp>
+      <p:sp>
+        <p:nvSpPr>
+          <p:cNvPr id="303" name="Lbl303"/>
+          <p:cNvSpPr txBox="1"/>
+          <p:nvPr/>
+        </p:nvSpPr>
+        <p:spPr>
+          <a:xfrm>
+            <a:off x="11350000" y="10280000"/>
+            <a:ext cx="9200000" cy="450000"/>
+          </a:xfrm>
+          <a:prstGeom prst="rect">
+            <a:avLst/>
+          </a:prstGeom>
+          <a:noFill/>
+          <a:ln>
+            <a:noFill/>
+          </a:ln>
+        </p:spPr>
+        <p:txBody>
+          <a:bodyPr wrap="square" anchor="ctr" anchorCtr="1"/>
+          <a:lstStyle/>
+          <a:p>
+            <a:pPr algn="ctr">
+              <a:buNone/>
+            </a:pPr>
+            <a:r>
+              <a:rPr lang="en-US" sz="2700" b="1" dirty="0">
+                <a:solidFill>
+                  <a:srgbClr val="CC0633"/>
+                </a:solidFill>
+                <a:latin typeface="Arial"/>
+              </a:rPr>
+              <a:t>Three Novel Heuristics</a:t>
             </a:r>
           </a:p>
         </p:txBody>
       </p:sp>
       <p:pic>
         <p:nvPicPr>
-          <p:cNvPr id="303" name="eq_main"/>
+          <p:cNvPr id="304" name="eq_main"/>
           <p:cNvPicPr/>
           <p:nvPr/>
         </p:nvPicPr>
@@ -16287,8 +16355,8 @@
         </p:blipFill>
         <p:spPr>
           <a:xfrm>
-            <a:off x="11350000" y="7200000"/>
-            <a:ext cx="9200000" cy="1100000"/>
+            <a:off x="11350000" y="9300000"/>
+            <a:ext cx="9200000" cy="900000"/>
           </a:xfrm>
           <a:prstGeom prst="rect">
             <a:avLst/>
@@ -16297,7 +16365,7 @@
       </p:pic>
       <p:pic>
         <p:nvPicPr>
-          <p:cNvPr id="304" name="eq_h1"/>
+          <p:cNvPr id="305" name="eq_h1"/>
           <p:cNvPicPr/>
           <p:nvPr/>
         </p:nvPicPr>
@@ -16309,8 +16377,8 @@
         </p:blipFill>
         <p:spPr>
           <a:xfrm>
-            <a:off x="11350000" y="9040000"/>
-            <a:ext cx="9200000" cy="1050000"/>
+            <a:off x="11350000" y="10810000"/>
+            <a:ext cx="9200000" cy="850000"/>
           </a:xfrm>
           <a:prstGeom prst="rect">
             <a:avLst/>
@@ -16319,7 +16387,7 @@
       </p:pic>
       <p:pic>
         <p:nvPicPr>
-          <p:cNvPr id="305" name="eq_h2"/>
+          <p:cNvPr id="306" name="eq_h2"/>
           <p:cNvPicPr/>
           <p:nvPr/>
         </p:nvPicPr>
@@ -16331,8 +16399,8 @@
         </p:blipFill>
         <p:spPr>
           <a:xfrm>
-            <a:off x="11350000" y="10210000"/>
-            <a:ext cx="9200000" cy="1050000"/>
+            <a:off x="11350000" y="11740000"/>
+            <a:ext cx="9200000" cy="850000"/>
           </a:xfrm>
           <a:prstGeom prst="rect">
             <a:avLst/>
@@ -16341,7 +16409,7 @@
       </p:pic>
       <p:pic>
         <p:nvPicPr>
-          <p:cNvPr id="306" name="eq_h3"/>
+          <p:cNvPr id="307" name="eq_h3"/>
           <p:cNvPicPr/>
           <p:nvPr/>
         </p:nvPicPr>
@@ -16353,8 +16421,8 @@
         </p:blipFill>
         <p:spPr>
           <a:xfrm>
-            <a:off x="11350000" y="11380000"/>
-            <a:ext cx="9200000" cy="1050000"/>
+            <a:off x="11350000" y="12670000"/>
+            <a:ext cx="9200000" cy="850000"/>
           </a:xfrm>
           <a:prstGeom prst="rect">
             <a:avLst/>
@@ -16363,7 +16431,7 @@
       </p:pic>
       <p:pic>
         <p:nvPicPr>
-          <p:cNvPr id="307" name="CameraReadySuccesfulPathProfit"/>
+          <p:cNvPr id="308" name="CameraReadySuccesfulPathProfit"/>
           <p:cNvPicPr/>
           <p:nvPr/>
         </p:nvPicPr>
@@ -16375,7 +16443,7 @@
         </p:blipFill>
         <p:spPr>
           <a:xfrm>
-            <a:off x="11350000" y="12750000"/>
+            <a:off x="11350000" y="14360364"/>
             <a:ext cx="9200000" cy="5431325"/>
           </a:xfrm>
           <a:prstGeom prst="rect">
@@ -16385,13 +16453,13 @@
       </p:pic>
       <p:sp>
         <p:nvSpPr>
-          <p:cNvPr id="308" name="Cap308"/>
+          <p:cNvPr id="309" name="Cap309"/>
           <p:cNvSpPr txBox="1"/>
           <p:nvPr/>
         </p:nvSpPr>
         <p:spPr>
           <a:xfrm>
-            <a:off x="11350000" y="18216325"/>
+            <a:off x="11350000" y="19826689"/>
             <a:ext cx="9200000" cy="370000"/>
           </a:xfrm>
           <a:prstGeom prst="rect">
@@ -16416,14 +16484,14 @@
                 </a:solidFill>
                 <a:latin typeface="Arial"/>
               </a:rPr>
-              <a:t>Fig. 1b — A profitable path: Kraken → KuCoin (USDT → TUSD)</a:t>
+              <a:t>Fig. 1b - A profitable path: Kraken -&gt; KuCoin (USDT -&gt; TUSD)</a:t>
             </a:r>
           </a:p>
         </p:txBody>
       </p:sp>
       <p:pic>
         <p:nvPicPr>
-          <p:cNvPr id="309" name="fig01_node_expansion_bar"/>
+          <p:cNvPr id="310" name="fig01_node_expansion_bar"/>
           <p:cNvPicPr/>
           <p:nvPr/>
         </p:nvPicPr>
@@ -16445,7 +16513,7 @@
       </p:pic>
       <p:sp>
         <p:nvSpPr>
-          <p:cNvPr id="310" name="Cap310"/>
+          <p:cNvPr id="311" name="Cap311"/>
           <p:cNvSpPr txBox="1"/>
           <p:nvPr/>
         </p:nvSpPr>
@@ -16483,7 +16551,7 @@
       </p:sp>
       <p:pic>
         <p:nvPicPr>
-          <p:cNvPr id="311" name="qr_github"/>
+          <p:cNvPr id="312" name="qr_github"/>
           <p:cNvPicPr/>
           <p:nvPr/>
         </p:nvPicPr>
@@ -16505,7 +16573,7 @@
       </p:pic>
       <p:sp>
         <p:nvSpPr>
-          <p:cNvPr id="312" name="Cap312"/>
+          <p:cNvPr id="313" name="Cap313"/>
           <p:cNvSpPr txBox="1"/>
           <p:nvPr/>
         </p:nvSpPr>

--- a/docs/latex/StablecoinArbitrage_GSS2026/poster/poster_filled.pptx
+++ b/docs/latex/StablecoinArbitrage_GSS2026/poster/poster_filled.pptx
@@ -16305,13 +16305,201 @@
       </p:sp>
       <p:sp>
         <p:nvSpPr>
-          <p:cNvPr id="303" name="Lbl303"/>
+          <p:cNvPr id="303" name="MathEq303"/>
           <p:cNvSpPr txBox="1"/>
           <p:nvPr/>
         </p:nvSpPr>
         <p:spPr>
           <a:xfrm>
-            <a:off x="11350000" y="10280000"/>
+            <a:off x="11350000" y="9300000"/>
+            <a:ext cx="9200000" cy="1050000"/>
+          </a:xfrm>
+          <a:prstGeom prst="rect">
+            <a:avLst/>
+          </a:prstGeom>
+          <a:solidFill>
+            <a:srgbClr val="F2F2F7"/>
+          </a:solidFill>
+          <a:ln w="19050">
+            <a:solidFill>
+              <a:srgbClr val="CC0633"/>
+            </a:solidFill>
+          </a:ln>
+        </p:spPr>
+        <p:txBody>
+          <a:bodyPr wrap="square" anchor="ctr" anchorCtr="1"/>
+          <a:lstStyle/>
+          <a:p>
+            <a:pPr algn="ctr">
+              <a:buNone/>
+              <a:defRPr sz="2800">
+                <a:latin typeface="Cambria Math"/>
+              </a:defRPr>
+            </a:pPr>
+            <a14:m xmlns:a14="http://schemas.microsoft.com/office/drawing/2010/main">
+              <m:oMathPara xmlns:m="http://schemas.openxmlformats.org/officeDocument/2006/math">
+                <m:oMathParaPr>
+                  <m:jc m:val="ctr"/>
+                </m:oMathParaPr>
+                <m:oMath>
+                  <m:r>
+                    <m:rPr>
+                      <m:sty m:val="i"/>
+                    </m:rPr>
+                    <m:t>w</m:t>
+                  </m:r>
+                  <m:r>
+                    <m:rPr>
+                      <m:sty m:val="p"/>
+                    </m:rPr>
+                    <m:t>(</m:t>
+                  </m:r>
+                  <m:r>
+                    <m:rPr>
+                      <m:sty m:val="i"/>
+                    </m:rPr>
+                    <m:t>e</m:t>
+                  </m:r>
+                  <m:r>
+                    <m:rPr>
+                      <m:sty m:val="p"/>
+                    </m:rPr>
+                    <m:t>) = −</m:t>
+                  </m:r>
+                  <m:r>
+                    <m:rPr>
+                      <m:sty m:val="p"/>
+                    </m:rPr>
+                    <m:t>log </m:t>
+                  </m:r>
+                  <m:r>
+                    <m:rPr>
+                      <m:sty m:val="i"/>
+                    </m:rPr>
+                    <m:t>r</m:t>
+                  </m:r>
+                  <m:r>
+                    <m:rPr>
+                      <m:sty m:val="p"/>
+                    </m:rPr>
+                    <m:t>(</m:t>
+                  </m:r>
+                  <m:r>
+                    <m:rPr>
+                      <m:sty m:val="i"/>
+                    </m:rPr>
+                    <m:t>e</m:t>
+                  </m:r>
+                  <m:r>
+                    <m:rPr>
+                      <m:sty m:val="p"/>
+                    </m:rPr>
+                    <m:t>)</m:t>
+                  </m:r>
+                </m:oMath>
+              </m:oMathPara>
+            </a14:m>
+          </a:p>
+          <a:p>
+            <a:pPr algn="ctr">
+              <a:buNone/>
+              <a:defRPr sz="2800">
+                <a:latin typeface="Cambria Math"/>
+              </a:defRPr>
+            </a:pPr>
+            <a14:m xmlns:a14="http://schemas.microsoft.com/office/drawing/2010/main">
+              <m:oMathPara xmlns:m="http://schemas.openxmlformats.org/officeDocument/2006/math">
+                <m:oMathParaPr>
+                  <m:jc m:val="ctr"/>
+                </m:oMathParaPr>
+                <m:oMath>
+                  <m:r>
+                    <m:rPr>
+                      <m:sty m:val="i"/>
+                    </m:rPr>
+                    <m:t>f</m:t>
+                  </m:r>
+                  <m:r>
+                    <m:rPr>
+                      <m:sty m:val="p"/>
+                    </m:rPr>
+                    <m:t>(</m:t>
+                  </m:r>
+                  <m:r>
+                    <m:rPr>
+                      <m:sty m:val="i"/>
+                    </m:rPr>
+                    <m:t>n</m:t>
+                  </m:r>
+                  <m:r>
+                    <m:rPr>
+                      <m:sty m:val="p"/>
+                    </m:rPr>
+                    <m:t>) = </m:t>
+                  </m:r>
+                  <m:r>
+                    <m:rPr>
+                      <m:sty m:val="i"/>
+                    </m:rPr>
+                    <m:t>g</m:t>
+                  </m:r>
+                  <m:r>
+                    <m:rPr>
+                      <m:sty m:val="p"/>
+                    </m:rPr>
+                    <m:t>(</m:t>
+                  </m:r>
+                  <m:r>
+                    <m:rPr>
+                      <m:sty m:val="i"/>
+                    </m:rPr>
+                    <m:t>n</m:t>
+                  </m:r>
+                  <m:r>
+                    <m:rPr>
+                      <m:sty m:val="p"/>
+                    </m:rPr>
+                    <m:t>) + </m:t>
+                  </m:r>
+                  <m:r>
+                    <m:rPr>
+                      <m:sty m:val="i"/>
+                    </m:rPr>
+                    <m:t>h</m:t>
+                  </m:r>
+                  <m:r>
+                    <m:rPr>
+                      <m:sty m:val="p"/>
+                    </m:rPr>
+                    <m:t>(</m:t>
+                  </m:r>
+                  <m:r>
+                    <m:rPr>
+                      <m:sty m:val="i"/>
+                    </m:rPr>
+                    <m:t>n</m:t>
+                  </m:r>
+                  <m:r>
+                    <m:rPr>
+                      <m:sty m:val="p"/>
+                    </m:rPr>
+                    <m:t>)</m:t>
+                  </m:r>
+                </m:oMath>
+              </m:oMathPara>
+            </a14:m>
+          </a:p>
+        </p:txBody>
+      </p:sp>
+      <p:sp>
+        <p:nvSpPr>
+          <p:cNvPr id="304" name="Lbl304"/>
+          <p:cNvSpPr txBox="1"/>
+          <p:nvPr/>
+        </p:nvSpPr>
+        <p:spPr>
+          <a:xfrm>
+            <a:off x="11350000" y="10450000"/>
             <a:ext cx="9200000" cy="450000"/>
           </a:xfrm>
           <a:prstGeom prst="rect">
@@ -16341,9 +16529,450 @@
           </a:p>
         </p:txBody>
       </p:sp>
+      <p:sp>
+        <p:nvSpPr>
+          <p:cNvPr id="305" name="MathEq305"/>
+          <p:cNvSpPr txBox="1"/>
+          <p:nvPr/>
+        </p:nvSpPr>
+        <p:spPr>
+          <a:xfrm>
+            <a:off x="11350000" y="11000000"/>
+            <a:ext cx="9200000" cy="1000000"/>
+          </a:xfrm>
+          <a:prstGeom prst="rect">
+            <a:avLst/>
+          </a:prstGeom>
+          <a:solidFill>
+            <a:srgbClr val="F2F2F7"/>
+          </a:solidFill>
+          <a:ln w="19050">
+            <a:solidFill>
+              <a:srgbClr val="CC0633"/>
+            </a:solidFill>
+          </a:ln>
+        </p:spPr>
+        <p:txBody>
+          <a:bodyPr wrap="square" anchor="ctr" anchorCtr="1"/>
+          <a:lstStyle/>
+          <a:p>
+            <a:pPr algn="ctr">
+              <a:buNone/>
+              <a:defRPr sz="2800">
+                <a:latin typeface="Cambria Math"/>
+              </a:defRPr>
+            </a:pPr>
+            <a14:m xmlns:a14="http://schemas.microsoft.com/office/drawing/2010/main">
+              <m:oMathPara xmlns:m="http://schemas.openxmlformats.org/officeDocument/2006/math">
+                <m:oMathParaPr>
+                  <m:jc m:val="ctr"/>
+                </m:oMathParaPr>
+                <m:oMath>
+                  <m:sSub>
+                    <m:sSubPr>
+                      <m:ctrlPr/>
+                    </m:sSubPr>
+                    <m:e>
+                      <m:r>
+                        <m:rPr>
+                          <m:sty m:val="i"/>
+                        </m:rPr>
+                        <m:t>h</m:t>
+                      </m:r>
+                    </m:e>
+                    <m:sub>
+                      <m:r>
+                        <m:rPr>
+                          <m:sty m:val="p"/>
+                        </m:rPr>
+                        <m:t>1</m:t>
+                      </m:r>
+                    </m:sub>
+                  </m:sSub>
+                  <m:r>
+                    <m:rPr>
+                      <m:sty m:val="p"/>
+                    </m:rPr>
+                    <m:t> = </m:t>
+                  </m:r>
+                  <m:r>
+                    <m:rPr>
+                      <m:sty m:val="i"/>
+                    </m:rPr>
+                    <m:t>β</m:t>
+                  </m:r>
+                  <m:r>
+                    <m:rPr>
+                      <m:sty m:val="p"/>
+                    </m:rPr>
+                    <m:t> ⋅ max(0, 1−</m:t>
+                  </m:r>
+                  <m:sSub>
+                    <m:sSubPr>
+                      <m:ctrlPr/>
+                    </m:sSubPr>
+                    <m:e>
+                      <m:r>
+                        <m:rPr>
+                          <m:sty m:val="i"/>
+                        </m:rPr>
+                        <m:t>V</m:t>
+                      </m:r>
+                    </m:e>
+                    <m:sub>
+                      <m:r>
+                        <m:rPr>
+                          <m:sty m:val="p"/>
+                        </m:rPr>
+                        <m:t>24h</m:t>
+                      </m:r>
+                    </m:sub>
+                  </m:sSub>
+                  <m:r>
+                    <m:rPr>
+                      <m:sty m:val="p"/>
+                    </m:rPr>
+                    <m:t>/</m:t>
+                  </m:r>
+                  <m:sSub>
+                    <m:sSubPr>
+                      <m:ctrlPr/>
+                    </m:sSubPr>
+                    <m:e>
+                      <m:r>
+                        <m:rPr>
+                          <m:sty m:val="i"/>
+                        </m:rPr>
+                        <m:t>Q</m:t>
+                      </m:r>
+                    </m:e>
+                    <m:sub>
+                      <m:r>
+                        <m:rPr>
+                          <m:sty m:val="p"/>
+                        </m:rPr>
+                        <m:t>ord</m:t>
+                      </m:r>
+                    </m:sub>
+                  </m:sSub>
+                  <m:r>
+                    <m:rPr>
+                      <m:sty m:val="p"/>
+                    </m:rPr>
+                    <m:t>)</m:t>
+                  </m:r>
+                </m:oMath>
+              </m:oMathPara>
+            </a14:m>
+          </a:p>
+          <a:p>
+            <a:pPr algn="ctr">
+              <a:buNone/>
+            </a:pPr>
+            <a:r>
+              <a:rPr lang="en-US" sz="2100" i="1" b="0" dirty="0">
+                <a:solidFill>
+                  <a:srgbClr val="555555"/>
+                </a:solidFill>
+                <a:latin typeface="Arial"/>
+              </a:rPr>
+              <a:t>Liquidity depth penalty</a:t>
+            </a:r>
+          </a:p>
+        </p:txBody>
+      </p:sp>
+      <p:sp>
+        <p:nvSpPr>
+          <p:cNvPr id="306" name="MathEq306"/>
+          <p:cNvSpPr txBox="1"/>
+          <p:nvPr/>
+        </p:nvSpPr>
+        <p:spPr>
+          <a:xfrm>
+            <a:off x="11350000" y="12100000"/>
+            <a:ext cx="9200000" cy="1000000"/>
+          </a:xfrm>
+          <a:prstGeom prst="rect">
+            <a:avLst/>
+          </a:prstGeom>
+          <a:solidFill>
+            <a:srgbClr val="F2F2F7"/>
+          </a:solidFill>
+          <a:ln w="19050">
+            <a:solidFill>
+              <a:srgbClr val="CC0633"/>
+            </a:solidFill>
+          </a:ln>
+        </p:spPr>
+        <p:txBody>
+          <a:bodyPr wrap="square" anchor="ctr" anchorCtr="1"/>
+          <a:lstStyle/>
+          <a:p>
+            <a:pPr algn="ctr">
+              <a:buNone/>
+              <a:defRPr sz="2800">
+                <a:latin typeface="Cambria Math"/>
+              </a:defRPr>
+            </a:pPr>
+            <a14:m xmlns:a14="http://schemas.microsoft.com/office/drawing/2010/main">
+              <m:oMathPara xmlns:m="http://schemas.openxmlformats.org/officeDocument/2006/math">
+                <m:oMathParaPr>
+                  <m:jc m:val="ctr"/>
+                </m:oMathParaPr>
+                <m:oMath>
+                  <m:sSub>
+                    <m:sSubPr>
+                      <m:ctrlPr/>
+                    </m:sSubPr>
+                    <m:e>
+                      <m:r>
+                        <m:rPr>
+                          <m:sty m:val="i"/>
+                        </m:rPr>
+                        <m:t>h</m:t>
+                      </m:r>
+                    </m:e>
+                    <m:sub>
+                      <m:r>
+                        <m:rPr>
+                          <m:sty m:val="p"/>
+                        </m:rPr>
+                        <m:t>2</m:t>
+                      </m:r>
+                    </m:sub>
+                  </m:sSub>
+                  <m:r>
+                    <m:rPr>
+                      <m:sty m:val="p"/>
+                    </m:rPr>
+                    <m:t> = </m:t>
+                  </m:r>
+                  <m:r>
+                    <m:rPr>
+                      <m:sty m:val="i"/>
+                    </m:rPr>
+                    <m:t>λ</m:t>
+                  </m:r>
+                  <m:r>
+                    <m:rPr>
+                      <m:sty m:val="p"/>
+                    </m:rPr>
+                    <m:t> ⋅ max(0, </m:t>
+                  </m:r>
+                  <m:sSub>
+                    <m:sSubPr>
+                      <m:ctrlPr/>
+                    </m:sSubPr>
+                    <m:e>
+                      <m:r>
+                        <m:rPr>
+                          <m:sty m:val="i"/>
+                        </m:rPr>
+                        <m:t>S</m:t>
+                      </m:r>
+                    </m:e>
+                    <m:sub>
+                      <m:r>
+                        <m:rPr>
+                          <m:sty m:val="p"/>
+                        </m:rPr>
+                        <m:t>bps</m:t>
+                      </m:r>
+                    </m:sub>
+                  </m:sSub>
+                  <m:r>
+                    <m:rPr>
+                      <m:sty m:val="p"/>
+                    </m:rPr>
+                    <m:t> − </m:t>
+                  </m:r>
+                  <m:r>
+                    <m:rPr>
+                      <m:sty m:val="i"/>
+                    </m:rPr>
+                    <m:t>θ</m:t>
+                  </m:r>
+                  <m:r>
+                    <m:rPr>
+                      <m:sty m:val="p"/>
+                    </m:rPr>
+                    <m:t>)</m:t>
+                  </m:r>
+                </m:oMath>
+              </m:oMathPara>
+            </a14:m>
+          </a:p>
+          <a:p>
+            <a:pPr algn="ctr">
+              <a:buNone/>
+            </a:pPr>
+            <a:r>
+              <a:rPr lang="en-US" sz="2100" i="1" b="1" dirty="0">
+                <a:solidFill>
+                  <a:srgbClr val="CC0633"/>
+                </a:solidFill>
+                <a:latin typeface="Arial"/>
+              </a:rPr>
+              <a:t>★ Slippage-aware  —  Novel Contribution ★</a:t>
+            </a:r>
+          </a:p>
+        </p:txBody>
+      </p:sp>
+      <p:sp>
+        <p:nvSpPr>
+          <p:cNvPr id="307" name="MathEq307"/>
+          <p:cNvSpPr txBox="1"/>
+          <p:nvPr/>
+        </p:nvSpPr>
+        <p:spPr>
+          <a:xfrm>
+            <a:off x="11350000" y="13200000"/>
+            <a:ext cx="9200000" cy="1000000"/>
+          </a:xfrm>
+          <a:prstGeom prst="rect">
+            <a:avLst/>
+          </a:prstGeom>
+          <a:solidFill>
+            <a:srgbClr val="F2F2F7"/>
+          </a:solidFill>
+          <a:ln w="19050">
+            <a:solidFill>
+              <a:srgbClr val="CC0633"/>
+            </a:solidFill>
+          </a:ln>
+        </p:spPr>
+        <p:txBody>
+          <a:bodyPr wrap="square" anchor="ctr" anchorCtr="1"/>
+          <a:lstStyle/>
+          <a:p>
+            <a:pPr algn="ctr">
+              <a:buNone/>
+              <a:defRPr sz="2800">
+                <a:latin typeface="Cambria Math"/>
+              </a:defRPr>
+            </a:pPr>
+            <a14:m xmlns:a14="http://schemas.microsoft.com/office/drawing/2010/main">
+              <m:oMathPara xmlns:m="http://schemas.openxmlformats.org/officeDocument/2006/math">
+                <m:oMathParaPr>
+                  <m:jc m:val="ctr"/>
+                </m:oMathParaPr>
+                <m:oMath>
+                  <m:sSub>
+                    <m:sSubPr>
+                      <m:ctrlPr/>
+                    </m:sSubPr>
+                    <m:e>
+                      <m:r>
+                        <m:rPr>
+                          <m:sty m:val="i"/>
+                        </m:rPr>
+                        <m:t>h</m:t>
+                      </m:r>
+                    </m:e>
+                    <m:sub>
+                      <m:r>
+                        <m:rPr>
+                          <m:sty m:val="p"/>
+                        </m:rPr>
+                        <m:t>3</m:t>
+                      </m:r>
+                    </m:sub>
+                  </m:sSub>
+                  <m:r>
+                    <m:rPr>
+                      <m:sty m:val="p"/>
+                    </m:rPr>
+                    <m:t> = </m:t>
+                  </m:r>
+                  <m:r>
+                    <m:rPr>
+                      <m:sty m:val="i"/>
+                    </m:rPr>
+                    <m:t>γ</m:t>
+                  </m:r>
+                  <m:r>
+                    <m:rPr>
+                      <m:sty m:val="p"/>
+                    </m:rPr>
+                    <m:t> ⋅ (</m:t>
+                  </m:r>
+                  <m:sSub>
+                    <m:sSubPr>
+                      <m:ctrlPr/>
+                    </m:sSubPr>
+                    <m:e>
+                      <m:r>
+                        <m:rPr>
+                          <m:sty m:val="i"/>
+                        </m:rPr>
+                        <m:t>t</m:t>
+                      </m:r>
+                    </m:e>
+                    <m:sub>
+                      <m:r>
+                        <m:rPr>
+                          <m:sty m:val="p"/>
+                        </m:rPr>
+                        <m:t>chain</m:t>
+                      </m:r>
+                    </m:sub>
+                  </m:sSub>
+                  <m:r>
+                    <m:rPr>
+                      <m:sty m:val="p"/>
+                    </m:rPr>
+                    <m:t> + </m:t>
+                  </m:r>
+                  <m:sSub>
+                    <m:sSubPr>
+                      <m:ctrlPr/>
+                    </m:sSubPr>
+                    <m:e>
+                      <m:r>
+                        <m:rPr>
+                          <m:sty m:val="i"/>
+                        </m:rPr>
+                        <m:t>ρ</m:t>
+                      </m:r>
+                    </m:e>
+                    <m:sub>
+                      <m:r>
+                        <m:rPr>
+                          <m:sty m:val="p"/>
+                        </m:rPr>
+                        <m:t>venue</m:t>
+                      </m:r>
+                    </m:sub>
+                  </m:sSub>
+                  <m:r>
+                    <m:rPr>
+                      <m:sty m:val="p"/>
+                    </m:rPr>
+                    <m:t>)</m:t>
+                  </m:r>
+                </m:oMath>
+              </m:oMathPara>
+            </a14:m>
+          </a:p>
+          <a:p>
+            <a:pPr algn="ctr">
+              <a:buNone/>
+            </a:pPr>
+            <a:r>
+              <a:rPr lang="en-US" sz="2100" i="1" b="0" dirty="0">
+                <a:solidFill>
+                  <a:srgbClr val="555555"/>
+                </a:solidFill>
+                <a:latin typeface="Arial"/>
+              </a:rPr>
+              <a:t>Chain congestion + venue reliability</a:t>
+            </a:r>
+          </a:p>
+        </p:txBody>
+      </p:sp>
       <p:pic>
         <p:nvPicPr>
-          <p:cNvPr id="304" name="eq_main"/>
+          <p:cNvPr id="308" name="CameraReadySuccesfulPathProfit"/>
           <p:cNvPicPr/>
           <p:nvPr/>
         </p:nvPicPr>
@@ -16355,95 +16984,7 @@
         </p:blipFill>
         <p:spPr>
           <a:xfrm>
-            <a:off x="11350000" y="9300000"/>
-            <a:ext cx="9200000" cy="900000"/>
-          </a:xfrm>
-          <a:prstGeom prst="rect">
-            <a:avLst/>
-          </a:prstGeom>
-        </p:spPr>
-      </p:pic>
-      <p:pic>
-        <p:nvPicPr>
-          <p:cNvPr id="305" name="eq_h1"/>
-          <p:cNvPicPr/>
-          <p:nvPr/>
-        </p:nvPicPr>
-        <p:blipFill>
-          <a:blip r:embed="rId7"/>
-          <a:stretch>
-            <a:fillRect/>
-          </a:stretch>
-        </p:blipFill>
-        <p:spPr>
-          <a:xfrm>
-            <a:off x="11350000" y="10810000"/>
-            <a:ext cx="9200000" cy="850000"/>
-          </a:xfrm>
-          <a:prstGeom prst="rect">
-            <a:avLst/>
-          </a:prstGeom>
-        </p:spPr>
-      </p:pic>
-      <p:pic>
-        <p:nvPicPr>
-          <p:cNvPr id="306" name="eq_h2"/>
-          <p:cNvPicPr/>
-          <p:nvPr/>
-        </p:nvPicPr>
-        <p:blipFill>
-          <a:blip r:embed="rId8"/>
-          <a:stretch>
-            <a:fillRect/>
-          </a:stretch>
-        </p:blipFill>
-        <p:spPr>
-          <a:xfrm>
-            <a:off x="11350000" y="11740000"/>
-            <a:ext cx="9200000" cy="850000"/>
-          </a:xfrm>
-          <a:prstGeom prst="rect">
-            <a:avLst/>
-          </a:prstGeom>
-        </p:spPr>
-      </p:pic>
-      <p:pic>
-        <p:nvPicPr>
-          <p:cNvPr id="307" name="eq_h3"/>
-          <p:cNvPicPr/>
-          <p:nvPr/>
-        </p:nvPicPr>
-        <p:blipFill>
-          <a:blip r:embed="rId9"/>
-          <a:stretch>
-            <a:fillRect/>
-          </a:stretch>
-        </p:blipFill>
-        <p:spPr>
-          <a:xfrm>
-            <a:off x="11350000" y="12670000"/>
-            <a:ext cx="9200000" cy="850000"/>
-          </a:xfrm>
-          <a:prstGeom prst="rect">
-            <a:avLst/>
-          </a:prstGeom>
-        </p:spPr>
-      </p:pic>
-      <p:pic>
-        <p:nvPicPr>
-          <p:cNvPr id="308" name="CameraReadySuccesfulPathProfit"/>
-          <p:cNvPicPr/>
-          <p:nvPr/>
-        </p:nvPicPr>
-        <p:blipFill>
-          <a:blip r:embed="rId10"/>
-          <a:stretch>
-            <a:fillRect/>
-          </a:stretch>
-        </p:blipFill>
-        <p:spPr>
-          <a:xfrm>
-            <a:off x="11350000" y="14360364"/>
+            <a:off x="11350000" y="14420000"/>
             <a:ext cx="9200000" cy="5431325"/>
           </a:xfrm>
           <a:prstGeom prst="rect">
@@ -16459,7 +17000,7 @@
         </p:nvSpPr>
         <p:spPr>
           <a:xfrm>
-            <a:off x="11350000" y="19826689"/>
+            <a:off x="11350000" y="19886325"/>
             <a:ext cx="9200000" cy="370000"/>
           </a:xfrm>
           <a:prstGeom prst="rect">
@@ -16496,7 +17037,7 @@
           <p:nvPr/>
         </p:nvPicPr>
         <p:blipFill>
-          <a:blip r:embed="rId11"/>
+          <a:blip r:embed="rId7"/>
           <a:stretch>
             <a:fillRect/>
           </a:stretch>
@@ -16556,7 +17097,7 @@
           <p:nvPr/>
         </p:nvPicPr>
         <p:blipFill>
-          <a:blip r:embed="rId12"/>
+          <a:blip r:embed="rId8"/>
           <a:stretch>
             <a:fillRect/>
           </a:stretch>

--- a/docs/latex/StablecoinArbitrage_GSS2026/poster/poster_filled.pptx
+++ b/docs/latex/StablecoinArbitrage_GSS2026/poster/poster_filled.pptx
@@ -246,7 +246,7 @@
       <p15:sldGuideLst xmlns:p15="http://schemas.microsoft.com/office/powerpoint/2012/main"/>
     </p:ext>
     <p:ext uri="http://customooxmlschemas.google.com/">
-      <go:slidesCustomData xmlns:go="http://customooxmlschemas.google.com/" xmlns:ahyp="http://schemas.microsoft.com/office/drawing/2018/hyperlinkcolor" xmlns:p15="http://schemas.microsoft.com/office/powerpoint/2012/main" xmlns:p14="http://schemas.microsoft.com/office/powerpoint/2010/main" xmlns:com="http://schemas.openxmlformats.org/drawingml/2006/compatibility" xmlns:pvml="urn:schemas-microsoft-com:office:powerpoint" xmlns:v="urn:schemas-microsoft-com:vml" xmlns:o="urn:schemas-microsoft-com:office:office" xmlns:dgm="http://schemas.openxmlformats.org/drawingml/2006/diagram" xmlns:c="http://schemas.openxmlformats.org/drawingml/2006/chart" xmlns:mv="urn:schemas-microsoft-com:mac:vml" xmlns:mc="http://schemas.openxmlformats.org/markup-compatibility/2006" xmlns="" r:id="rId6" roundtripDataSignature="AMtx7mjLfVfjeD0wRP9TUck/mtN4+srtzw=="/>
+      <go:slidesCustomData xmlns="" xmlns:mc="http://schemas.openxmlformats.org/markup-compatibility/2006" xmlns:mv="urn:schemas-microsoft-com:mac:vml" xmlns:c="http://schemas.openxmlformats.org/drawingml/2006/chart" xmlns:dgm="http://schemas.openxmlformats.org/drawingml/2006/diagram" xmlns:o="urn:schemas-microsoft-com:office:office" xmlns:v="urn:schemas-microsoft-com:vml" xmlns:pvml="urn:schemas-microsoft-com:office:powerpoint" xmlns:com="http://schemas.openxmlformats.org/drawingml/2006/compatibility" xmlns:p14="http://schemas.microsoft.com/office/powerpoint/2010/main" xmlns:p15="http://schemas.microsoft.com/office/powerpoint/2012/main" xmlns:ahyp="http://schemas.microsoft.com/office/drawing/2018/hyperlinkcolor" xmlns:go="http://customooxmlschemas.google.com/" r:id="rId6" roundtripDataSignature="AMtx7mjLfVfjeD0wRP9TUck/mtN4+srtzw=="/>
     </p:ext>
   </p:extLst>
 </p:presentation>
@@ -14315,7 +14315,7 @@
               <a:pPr>
                 <a:buNone/>
               </a:pPr>
-              <a:endParaRPr sz="900"/>
+              <a:endParaRPr sz="900" dirty="0"/>
             </a:p>
             <a:p>
               <a:pPr>
@@ -14540,8 +14540,8 @@
         </p:nvSpPr>
         <p:spPr>
           <a:xfrm>
-            <a:off x="11133834" y="3985290"/>
-            <a:ext cx="9836233" cy="17532931"/>
+            <a:off x="11031883" y="3329540"/>
+            <a:ext cx="9836233" cy="18902629"/>
           </a:xfrm>
           <a:prstGeom prst="rect">
             <a:avLst/>
@@ -14563,6 +14563,29 @@
               <a:buFont typeface="Arial"/>
               <a:buChar char="•"/>
             </a:pPr>
+            <a:endParaRPr lang="en-US" sz="2400" dirty="0">
+              <a:solidFill>
+                <a:schemeClr val="dk1"/>
+              </a:solidFill>
+              <a:latin typeface="Arial"/>
+            </a:endParaRPr>
+          </a:p>
+          <a:p>
+            <a:pPr marL="342900" indent="-342900">
+              <a:buFont typeface="Arial"/>
+              <a:buChar char="•"/>
+            </a:pPr>
+            <a:endParaRPr lang="en-US" sz="2400" dirty="0">
+              <a:solidFill>
+                <a:schemeClr val="dk1"/>
+              </a:solidFill>
+            </a:endParaRPr>
+          </a:p>
+          <a:p>
+            <a:pPr marL="342900" indent="-342900">
+              <a:buFont typeface="Arial"/>
+              <a:buChar char="•"/>
+            </a:pPr>
             <a:r>
               <a:rPr lang="en-US" sz="2400" dirty="0">
                 <a:solidFill>
@@ -14619,25 +14642,52 @@
             </a:r>
           </a:p>
           <a:p>
-            <a:pPr marL="342900" indent="-342900">
-              <a:buFont typeface="Arial"/>
-              <a:buChar char="•"/>
+            <a:pPr>
+              <a:buNone/>
             </a:pPr>
-            <a:r>
-              <a:rPr lang="en-US" sz="2400" dirty="0">
-                <a:solidFill>
-                  <a:schemeClr val="dk1"/>
-                </a:solidFill>
-                <a:latin typeface="Arial"/>
-              </a:rPr>
-              <a:t>A parallelized multi-start baseline (k=3 random A* launches) is evaluated alongside three novel guidance heuristics across 7,200 overnight search instances.</a:t>
-            </a:r>
+            <a:endParaRPr lang="en-CA" sz="800" dirty="0"/>
           </a:p>
           <a:p>
             <a:pPr>
               <a:buNone/>
             </a:pPr>
-            <a:endParaRPr sz="800"/>
+            <a:endParaRPr lang="en-CA" sz="800" dirty="0"/>
+          </a:p>
+          <a:p>
+            <a:pPr>
+              <a:buNone/>
+            </a:pPr>
+            <a:endParaRPr lang="en-CA" sz="800" dirty="0"/>
+          </a:p>
+          <a:p>
+            <a:pPr>
+              <a:buNone/>
+            </a:pPr>
+            <a:endParaRPr lang="en-CA" sz="800" dirty="0"/>
+          </a:p>
+          <a:p>
+            <a:pPr>
+              <a:buNone/>
+            </a:pPr>
+            <a:endParaRPr lang="en-CA" sz="800" dirty="0"/>
+          </a:p>
+          <a:p>
+            <a:pPr>
+              <a:buNone/>
+            </a:pPr>
+            <a:endParaRPr lang="en-CA" sz="800" dirty="0"/>
+          </a:p>
+          <a:p>
+            <a:pPr>
+              <a:buNone/>
+            </a:pPr>
+            <a:endParaRPr lang="en-CA" sz="800" dirty="0"/>
+          </a:p>
+          <a:p>
+            <a:pPr>
+              <a:buNone/>
+            </a:pPr>
+            <a:endParaRPr sz="800" dirty="0"/>
           </a:p>
           <a:p>
             <a:pPr algn="ctr">
@@ -14657,7 +14707,7 @@
             <a:pPr>
               <a:buSzPts val="3200"/>
             </a:pPr>
-            <a:endParaRPr sz="3060">
+            <a:endParaRPr sz="3060" dirty="0">
               <a:solidFill>
                 <a:schemeClr val="dk1"/>
               </a:solidFill>
@@ -14671,7 +14721,7 @@
             <a:pPr>
               <a:buSzPts val="3200"/>
             </a:pPr>
-            <a:endParaRPr sz="3060">
+            <a:endParaRPr sz="3060" dirty="0">
               <a:solidFill>
                 <a:schemeClr val="dk1"/>
               </a:solidFill>
@@ -14685,7 +14735,7 @@
             <a:pPr>
               <a:buSzPts val="3200"/>
             </a:pPr>
-            <a:endParaRPr sz="3060">
+            <a:endParaRPr sz="3060" dirty="0">
               <a:solidFill>
                 <a:schemeClr val="dk1"/>
               </a:solidFill>
@@ -14699,7 +14749,7 @@
             <a:pPr>
               <a:buSzPts val="3200"/>
             </a:pPr>
-            <a:endParaRPr sz="3060">
+            <a:endParaRPr sz="3060" dirty="0">
               <a:solidFill>
                 <a:schemeClr val="dk1"/>
               </a:solidFill>
@@ -14713,7 +14763,7 @@
             <a:pPr>
               <a:buSzPts val="3200"/>
             </a:pPr>
-            <a:endParaRPr sz="3060">
+            <a:endParaRPr sz="3060" dirty="0">
               <a:solidFill>
                 <a:schemeClr val="dk1"/>
               </a:solidFill>
@@ -14727,7 +14777,7 @@
             <a:pPr>
               <a:buSzPts val="3200"/>
             </a:pPr>
-            <a:endParaRPr sz="3060">
+            <a:endParaRPr sz="3060" dirty="0">
               <a:solidFill>
                 <a:schemeClr val="dk1"/>
               </a:solidFill>
@@ -14741,7 +14791,7 @@
             <a:pPr>
               <a:buSzPts val="3200"/>
             </a:pPr>
-            <a:endParaRPr sz="3060">
+            <a:endParaRPr sz="3060" dirty="0">
               <a:solidFill>
                 <a:schemeClr val="dk1"/>
               </a:solidFill>
@@ -14755,7 +14805,7 @@
             <a:pPr>
               <a:buSzPts val="3200"/>
             </a:pPr>
-            <a:endParaRPr sz="3060">
+            <a:endParaRPr sz="3060" dirty="0">
               <a:solidFill>
                 <a:schemeClr val="dk1"/>
               </a:solidFill>
@@ -14769,7 +14819,7 @@
             <a:pPr>
               <a:buSzPts val="3200"/>
             </a:pPr>
-            <a:endParaRPr sz="3060">
+            <a:endParaRPr sz="3060" dirty="0">
               <a:solidFill>
                 <a:schemeClr val="dk1"/>
               </a:solidFill>
@@ -14783,7 +14833,7 @@
             <a:pPr>
               <a:buSzPts val="3200"/>
             </a:pPr>
-            <a:endParaRPr sz="3060">
+            <a:endParaRPr sz="3060" dirty="0">
               <a:solidFill>
                 <a:schemeClr val="dk1"/>
               </a:solidFill>
@@ -14797,7 +14847,7 @@
             <a:pPr>
               <a:buSzPts val="3200"/>
             </a:pPr>
-            <a:endParaRPr sz="3060">
+            <a:endParaRPr sz="3060" dirty="0">
               <a:solidFill>
                 <a:schemeClr val="dk1"/>
               </a:solidFill>
@@ -14811,7 +14861,7 @@
             <a:pPr>
               <a:buSzPts val="3200"/>
             </a:pPr>
-            <a:endParaRPr sz="3060">
+            <a:endParaRPr sz="3060" dirty="0">
               <a:solidFill>
                 <a:schemeClr val="dk1"/>
               </a:solidFill>
@@ -14825,7 +14875,7 @@
             <a:pPr>
               <a:buSzPts val="3200"/>
             </a:pPr>
-            <a:endParaRPr sz="3060">
+            <a:endParaRPr sz="3060" dirty="0">
               <a:solidFill>
                 <a:schemeClr val="dk1"/>
               </a:solidFill>
@@ -14839,7 +14889,7 @@
             <a:pPr>
               <a:buSzPts val="3200"/>
             </a:pPr>
-            <a:endParaRPr sz="3060">
+            <a:endParaRPr sz="3060" dirty="0">
               <a:solidFill>
                 <a:schemeClr val="dk1"/>
               </a:solidFill>
@@ -14853,7 +14903,7 @@
             <a:pPr>
               <a:buSzPts val="3200"/>
             </a:pPr>
-            <a:endParaRPr sz="3060">
+            <a:endParaRPr sz="3060" dirty="0">
               <a:solidFill>
                 <a:schemeClr val="dk1"/>
               </a:solidFill>
@@ -14867,7 +14917,7 @@
             <a:pPr>
               <a:buSzPts val="3200"/>
             </a:pPr>
-            <a:endParaRPr sz="3060">
+            <a:endParaRPr sz="3060" dirty="0">
               <a:solidFill>
                 <a:schemeClr val="dk1"/>
               </a:solidFill>
@@ -14881,7 +14931,7 @@
             <a:pPr>
               <a:buSzPts val="3200"/>
             </a:pPr>
-            <a:endParaRPr sz="3060">
+            <a:endParaRPr sz="3060" dirty="0">
               <a:solidFill>
                 <a:schemeClr val="dk1"/>
               </a:solidFill>
@@ -14895,7 +14945,7 @@
             <a:pPr>
               <a:buSzPts val="3200"/>
             </a:pPr>
-            <a:endParaRPr sz="3060">
+            <a:endParaRPr sz="3060" dirty="0">
               <a:solidFill>
                 <a:schemeClr val="dk1"/>
               </a:solidFill>
@@ -14909,7 +14959,7 @@
             <a:pPr>
               <a:buSzPts val="3200"/>
             </a:pPr>
-            <a:endParaRPr sz="3060">
+            <a:endParaRPr sz="3060" dirty="0">
               <a:solidFill>
                 <a:schemeClr val="dk1"/>
               </a:solidFill>
@@ -14923,7 +14973,7 @@
             <a:pPr>
               <a:buSzPts val="3200"/>
             </a:pPr>
-            <a:endParaRPr sz="3060">
+            <a:endParaRPr sz="3060" dirty="0">
               <a:solidFill>
                 <a:schemeClr val="dk1"/>
               </a:solidFill>
@@ -14937,7 +14987,7 @@
             <a:pPr>
               <a:buSzPts val="3200"/>
             </a:pPr>
-            <a:endParaRPr sz="3060">
+            <a:endParaRPr sz="3060" dirty="0">
               <a:solidFill>
                 <a:schemeClr val="dk1"/>
               </a:solidFill>
@@ -14951,7 +15001,7 @@
             <a:pPr>
               <a:buSzPts val="3200"/>
             </a:pPr>
-            <a:endParaRPr sz="3060">
+            <a:endParaRPr sz="3060" dirty="0">
               <a:solidFill>
                 <a:schemeClr val="dk1"/>
               </a:solidFill>
@@ -14965,7 +15015,7 @@
             <a:pPr>
               <a:buSzPts val="3200"/>
             </a:pPr>
-            <a:endParaRPr sz="3060">
+            <a:endParaRPr sz="3060" dirty="0">
               <a:solidFill>
                 <a:schemeClr val="dk1"/>
               </a:solidFill>
@@ -14979,7 +15029,7 @@
             <a:pPr>
               <a:buSzPts val="3200"/>
             </a:pPr>
-            <a:endParaRPr sz="3060">
+            <a:endParaRPr sz="3060" dirty="0">
               <a:solidFill>
                 <a:schemeClr val="dk1"/>
               </a:solidFill>
@@ -14993,7 +15043,7 @@
             <a:pPr>
               <a:buSzPts val="3200"/>
             </a:pPr>
-            <a:endParaRPr sz="3060">
+            <a:endParaRPr sz="3060" dirty="0">
               <a:solidFill>
                 <a:schemeClr val="dk1"/>
               </a:solidFill>
@@ -15007,147 +15057,7 @@
             <a:pPr>
               <a:buSzPts val="3200"/>
             </a:pPr>
-            <a:endParaRPr sz="3060">
-              <a:solidFill>
-                <a:schemeClr val="dk1"/>
-              </a:solidFill>
-              <a:latin typeface="Times"/>
-              <a:ea typeface="Times"/>
-              <a:cs typeface="Times"/>
-              <a:sym typeface="Times"/>
-            </a:endParaRPr>
-          </a:p>
-          <a:p>
-            <a:pPr>
-              <a:buSzPts val="3200"/>
-            </a:pPr>
-            <a:endParaRPr sz="3060">
-              <a:solidFill>
-                <a:schemeClr val="dk1"/>
-              </a:solidFill>
-              <a:latin typeface="Times"/>
-              <a:ea typeface="Times"/>
-              <a:cs typeface="Times"/>
-              <a:sym typeface="Times"/>
-            </a:endParaRPr>
-          </a:p>
-          <a:p>
-            <a:pPr>
-              <a:buSzPts val="3200"/>
-            </a:pPr>
-            <a:endParaRPr sz="3060">
-              <a:solidFill>
-                <a:schemeClr val="dk1"/>
-              </a:solidFill>
-              <a:latin typeface="Times"/>
-              <a:ea typeface="Times"/>
-              <a:cs typeface="Times"/>
-              <a:sym typeface="Times"/>
-            </a:endParaRPr>
-          </a:p>
-          <a:p>
-            <a:pPr>
-              <a:buSzPts val="3200"/>
-            </a:pPr>
-            <a:endParaRPr sz="3060">
-              <a:solidFill>
-                <a:schemeClr val="dk1"/>
-              </a:solidFill>
-              <a:latin typeface="Times"/>
-              <a:ea typeface="Times"/>
-              <a:cs typeface="Times"/>
-              <a:sym typeface="Times"/>
-            </a:endParaRPr>
-          </a:p>
-          <a:p>
-            <a:pPr>
-              <a:buSzPts val="3200"/>
-            </a:pPr>
-            <a:endParaRPr sz="3060">
-              <a:solidFill>
-                <a:schemeClr val="dk1"/>
-              </a:solidFill>
-              <a:latin typeface="Times"/>
-              <a:ea typeface="Times"/>
-              <a:cs typeface="Times"/>
-              <a:sym typeface="Times"/>
-            </a:endParaRPr>
-          </a:p>
-          <a:p>
-            <a:pPr>
-              <a:buSzPts val="3200"/>
-            </a:pPr>
-            <a:endParaRPr sz="3060">
-              <a:solidFill>
-                <a:schemeClr val="dk1"/>
-              </a:solidFill>
-              <a:latin typeface="Times"/>
-              <a:ea typeface="Times"/>
-              <a:cs typeface="Times"/>
-              <a:sym typeface="Times"/>
-            </a:endParaRPr>
-          </a:p>
-          <a:p>
-            <a:pPr>
-              <a:buSzPts val="3200"/>
-            </a:pPr>
-            <a:endParaRPr sz="3060">
-              <a:solidFill>
-                <a:schemeClr val="dk1"/>
-              </a:solidFill>
-              <a:latin typeface="Times"/>
-              <a:ea typeface="Times"/>
-              <a:cs typeface="Times"/>
-              <a:sym typeface="Times"/>
-            </a:endParaRPr>
-          </a:p>
-          <a:p>
-            <a:pPr>
-              <a:buSzPts val="3200"/>
-            </a:pPr>
-            <a:endParaRPr sz="3060">
-              <a:solidFill>
-                <a:schemeClr val="dk1"/>
-              </a:solidFill>
-              <a:latin typeface="Times"/>
-              <a:ea typeface="Times"/>
-              <a:cs typeface="Times"/>
-              <a:sym typeface="Times"/>
-            </a:endParaRPr>
-          </a:p>
-          <a:p>
-            <a:pPr>
-              <a:buSzPts val="3200"/>
-            </a:pPr>
-            <a:endParaRPr sz="3060">
-              <a:solidFill>
-                <a:schemeClr val="dk1"/>
-              </a:solidFill>
-              <a:latin typeface="Times"/>
-              <a:ea typeface="Times"/>
-              <a:cs typeface="Times"/>
-              <a:sym typeface="Times"/>
-            </a:endParaRPr>
-          </a:p>
-          <a:p>
-            <a:pPr>
-              <a:buSzPts val="3200"/>
-            </a:pPr>
-            <a:endParaRPr sz="3060">
-              <a:solidFill>
-                <a:schemeClr val="dk1"/>
-              </a:solidFill>
-              <a:latin typeface="Times"/>
-              <a:ea typeface="Times"/>
-              <a:cs typeface="Times"/>
-              <a:sym typeface="Times"/>
-            </a:endParaRPr>
-          </a:p>
-          <a:p>
-            <a:pPr>
-              <a:buSzPts val="3200"/>
-            </a:pPr>
-            <a:endParaRPr sz="3060">
+            <a:endParaRPr sz="3060" dirty="0">
               <a:solidFill>
                 <a:schemeClr val="dk1"/>
               </a:solidFill>
@@ -15211,7 +15121,7 @@
         </p:nvGrpSpPr>
         <p:grpSpPr>
           <a:xfrm>
-            <a:off x="969727" y="10105613"/>
+            <a:off x="969727" y="9300000"/>
             <a:ext cx="9836233" cy="6489051"/>
             <a:chOff x="457200" y="2971800"/>
             <a:chExt cx="13716000" cy="6786425"/>
@@ -15259,7 +15169,7 @@
               <a:pPr>
                 <a:buNone/>
               </a:pPr>
-              <a:endParaRPr sz="700"/>
+              <a:endParaRPr sz="700" dirty="0"/>
             </a:p>
             <a:p>
               <a:pPr>
@@ -15546,7 +15456,7 @@
               <a:pPr>
                 <a:buNone/>
               </a:pPr>
-              <a:endParaRPr sz="800"/>
+              <a:endParaRPr sz="800" dirty="0"/>
             </a:p>
             <a:p>
               <a:pPr marL="342900" indent="-342900">
@@ -15597,7 +15507,7 @@
               <a:pPr>
                 <a:buSzPts val="3200"/>
               </a:pPr>
-              <a:endParaRPr sz="3060">
+              <a:endParaRPr sz="3060" dirty="0">
                 <a:solidFill>
                   <a:schemeClr val="dk1"/>
                 </a:solidFill>
@@ -15611,7 +15521,7 @@
               <a:pPr>
                 <a:buSzPts val="3200"/>
               </a:pPr>
-              <a:endParaRPr sz="3060">
+              <a:endParaRPr sz="3060" dirty="0">
                 <a:solidFill>
                   <a:schemeClr val="dk1"/>
                 </a:solidFill>
@@ -15625,7 +15535,7 @@
               <a:pPr>
                 <a:buSzPts val="3200"/>
               </a:pPr>
-              <a:endParaRPr sz="3060">
+              <a:endParaRPr sz="3060" dirty="0">
                 <a:solidFill>
                   <a:schemeClr val="dk1"/>
                 </a:solidFill>
@@ -15639,7 +15549,7 @@
               <a:pPr>
                 <a:buSzPts val="3200"/>
               </a:pPr>
-              <a:endParaRPr sz="3060">
+              <a:endParaRPr sz="3060" dirty="0">
                 <a:solidFill>
                   <a:schemeClr val="dk1"/>
                 </a:solidFill>
@@ -15653,7 +15563,7 @@
               <a:pPr>
                 <a:buSzPts val="3200"/>
               </a:pPr>
-              <a:endParaRPr sz="3060">
+              <a:endParaRPr sz="3060" dirty="0">
                 <a:solidFill>
                   <a:schemeClr val="dk1"/>
                 </a:solidFill>
@@ -15667,7 +15577,7 @@
               <a:pPr>
                 <a:buSzPts val="3200"/>
               </a:pPr>
-              <a:endParaRPr sz="3060">
+              <a:endParaRPr sz="3060" dirty="0">
                 <a:solidFill>
                   <a:schemeClr val="dk1"/>
                 </a:solidFill>
@@ -15681,7 +15591,7 @@
               <a:pPr>
                 <a:buSzPts val="3200"/>
               </a:pPr>
-              <a:endParaRPr sz="3060">
+              <a:endParaRPr sz="3060" dirty="0">
                 <a:solidFill>
                   <a:schemeClr val="dk1"/>
                 </a:solidFill>
@@ -15695,7 +15605,7 @@
               <a:pPr>
                 <a:buSzPts val="3200"/>
               </a:pPr>
-              <a:endParaRPr sz="3060">
+              <a:endParaRPr sz="3060" dirty="0">
                 <a:solidFill>
                   <a:schemeClr val="dk1"/>
                 </a:solidFill>
@@ -15709,7 +15619,7 @@
               <a:pPr>
                 <a:buSzPts val="3200"/>
               </a:pPr>
-              <a:endParaRPr sz="3060">
+              <a:endParaRPr sz="3060" dirty="0">
                 <a:solidFill>
                   <a:schemeClr val="dk1"/>
                 </a:solidFill>
@@ -15723,7 +15633,7 @@
               <a:pPr>
                 <a:buSzPts val="3200"/>
               </a:pPr>
-              <a:endParaRPr sz="3060">
+              <a:endParaRPr sz="3060" dirty="0">
                 <a:solidFill>
                   <a:schemeClr val="dk1"/>
                 </a:solidFill>
@@ -15737,7 +15647,7 @@
               <a:pPr>
                 <a:buSzPts val="3200"/>
               </a:pPr>
-              <a:endParaRPr sz="3060">
+              <a:endParaRPr sz="3060" dirty="0">
                 <a:solidFill>
                   <a:schemeClr val="dk1"/>
                 </a:solidFill>
@@ -15802,10 +15712,10 @@
         </p:nvGrpSpPr>
         <p:grpSpPr>
           <a:xfrm>
-            <a:off x="21953690" y="10105613"/>
-            <a:ext cx="9836233" cy="6489051"/>
+            <a:off x="21881882" y="10937161"/>
+            <a:ext cx="9836233" cy="6801039"/>
             <a:chOff x="457200" y="2971800"/>
-            <a:chExt cx="13716000" cy="6786425"/>
+            <a:chExt cx="13716000" cy="7112711"/>
           </a:xfrm>
         </p:grpSpPr>
         <p:sp>
@@ -15817,7 +15727,7 @@
           <p:spPr>
             <a:xfrm>
               <a:off x="457200" y="3657600"/>
-              <a:ext cx="13716000" cy="6100625"/>
+              <a:ext cx="13716000" cy="6426911"/>
             </a:xfrm>
             <a:prstGeom prst="rect">
               <a:avLst/>
@@ -15843,14 +15753,14 @@
                   </a:solidFill>
                   <a:latin typeface="Arial"/>
                 </a:rPr>
-                <a:t>Scan for source code and video demo.</a:t>
+                <a:t>subtitle.</a:t>
               </a:r>
             </a:p>
             <a:p>
               <a:pPr>
                 <a:buNone/>
               </a:pPr>
-              <a:endParaRPr sz="600"/>
+              <a:endParaRPr sz="600" dirty="0"/>
             </a:p>
             <a:p>
               <a:pPr marL="342900" indent="-342900">
@@ -15864,7 +15774,7 @@
                   </a:solidFill>
                   <a:latin typeface="Arial"/>
                 </a:rPr>
-                <a:t>Future work: asynchronous order-book pre-fetching; extension to DEX / AMM markets (Uniswap, Curve) with continuous pricing invariants.</a:t>
+                <a:t>What should go here :o </a:t>
               </a:r>
             </a:p>
             <a:p>
@@ -16061,7 +15971,7 @@
                   <a:cs typeface="Trebuchet MS"/>
                   <a:sym typeface="Trebuchet MS"/>
                 </a:rPr>
-                <a:t>Code &amp; Demo</a:t>
+                <a:t>???</a:t>
               </a:r>
               <a:endParaRPr sz="1339" dirty="0"/>
             </a:p>
@@ -16154,10 +16064,10 @@
           <p:nvPr/>
         </p:nvPicPr>
         <p:blipFill>
-          <a:blip>
+          <a:blip r:embed="rId3">
             <a:extLst>
               <a:ext uri="{96DAC541-7B7A-43D3-8B79-37D633B846F1}">
-                <asvg:svgBlip xmlns:asvg="http://schemas.microsoft.com/office/drawing/2016/SVG/main" r:embed="rId3"/>
+                <asvg:svgBlip xmlns:asvg="http://schemas.microsoft.com/office/drawing/2016/SVG/main" r:embed="rId4"/>
               </a:ext>
             </a:extLst>
           </a:blip>
@@ -16190,7 +16100,7 @@
           <p:nvPr/>
         </p:nvPicPr>
         <p:blipFill>
-          <a:blip r:embed="rId4"/>
+          <a:blip r:embed="rId5"/>
           <a:stretch>
             <a:fillRect/>
           </a:stretch>
@@ -16205,292 +16115,333 @@
           </a:prstGeom>
         </p:spPr>
       </p:pic>
-      <p:pic>
-        <p:nvPicPr>
-          <p:cNvPr id="300" name="FullGraph"/>
-          <p:cNvPicPr/>
+      <p:grpSp>
+        <p:nvGrpSpPr>
+          <p:cNvPr id="2" name="Group 1">
+            <a:extLst>
+              <a:ext uri="{FF2B5EF4-FFF2-40B4-BE49-F238E27FC236}">
+                <a16:creationId xmlns:a16="http://schemas.microsoft.com/office/drawing/2014/main" id="{F9F855B5-639F-2DF3-471C-999AAF89DCF9}"/>
+              </a:ext>
+            </a:extLst>
+          </p:cNvPr>
+          <p:cNvGrpSpPr/>
           <p:nvPr/>
-        </p:nvPicPr>
-        <p:blipFill>
-          <a:blip r:embed="rId5"/>
-          <a:stretch>
-            <a:fillRect/>
-          </a:stretch>
-        </p:blipFill>
-        <p:spPr>
+        </p:nvGrpSpPr>
+        <p:grpSpPr>
           <a:xfrm>
-            <a:off x="1200000" y="12425957"/>
-            <a:ext cx="9200000" cy="7365732"/>
+            <a:off x="895670" y="13385416"/>
+            <a:ext cx="9200000" cy="7770732"/>
+            <a:chOff x="1200000" y="12425957"/>
+            <a:chExt cx="9200000" cy="7770732"/>
           </a:xfrm>
-          <a:prstGeom prst="rect">
-            <a:avLst/>
-          </a:prstGeom>
-        </p:spPr>
-      </p:pic>
-      <p:sp>
-        <p:nvSpPr>
-          <p:cNvPr id="301" name="Cap301"/>
-          <p:cNvSpPr txBox="1"/>
-          <p:nvPr/>
-        </p:nvSpPr>
-        <p:spPr>
-          <a:xfrm>
-            <a:off x="1200000" y="19826689"/>
-            <a:ext cx="9200000" cy="370000"/>
-          </a:xfrm>
-          <a:prstGeom prst="rect">
-            <a:avLst/>
-          </a:prstGeom>
-          <a:noFill/>
-          <a:ln>
+        </p:grpSpPr>
+        <p:pic>
+          <p:nvPicPr>
+            <p:cNvPr id="300" name="FullGraph"/>
+            <p:cNvPicPr/>
+            <p:nvPr/>
+          </p:nvPicPr>
+          <p:blipFill>
+            <a:blip r:embed="rId6"/>
+            <a:stretch>
+              <a:fillRect/>
+            </a:stretch>
+          </p:blipFill>
+          <p:spPr>
+            <a:xfrm>
+              <a:off x="1200000" y="12425957"/>
+              <a:ext cx="9200000" cy="7365732"/>
+            </a:xfrm>
+            <a:prstGeom prst="rect">
+              <a:avLst/>
+            </a:prstGeom>
+          </p:spPr>
+        </p:pic>
+        <p:sp>
+          <p:nvSpPr>
+            <p:cNvPr id="301" name="Cap301"/>
+            <p:cNvSpPr txBox="1"/>
+            <p:nvPr/>
+          </p:nvSpPr>
+          <p:spPr>
+            <a:xfrm>
+              <a:off x="1200000" y="19826689"/>
+              <a:ext cx="9200000" cy="370000"/>
+            </a:xfrm>
+            <a:prstGeom prst="rect">
+              <a:avLst/>
+            </a:prstGeom>
             <a:noFill/>
-          </a:ln>
-        </p:spPr>
-        <p:txBody>
-          <a:bodyPr wrap="square" anchor="ctr"/>
-          <a:lstStyle/>
-          <a:p>
-            <a:pPr algn="ctr">
-              <a:buNone/>
-            </a:pPr>
-            <a:r>
-              <a:rPr lang="en-US" sz="1700" i="1" dirty="0">
-                <a:solidFill>
-                  <a:srgbClr val="555555"/>
-                </a:solidFill>
-                <a:latin typeface="Arial"/>
-              </a:rPr>
-              <a:t>Stablecoin arbitrage graph: 9 of 12 exchanges shown</a:t>
-            </a:r>
-          </a:p>
-        </p:txBody>
-      </p:sp>
-      <p:sp>
-        <p:nvSpPr>
-          <p:cNvPr id="302" name="Lbl302"/>
-          <p:cNvSpPr txBox="1"/>
-          <p:nvPr/>
-        </p:nvSpPr>
-        <p:spPr>
-          <a:xfrm>
-            <a:off x="11350000" y="8650000"/>
-            <a:ext cx="9200000" cy="550000"/>
-          </a:xfrm>
-          <a:prstGeom prst="rect">
-            <a:avLst/>
-          </a:prstGeom>
-          <a:noFill/>
-          <a:ln>
-            <a:noFill/>
-          </a:ln>
-        </p:spPr>
-        <p:txBody>
-          <a:bodyPr wrap="square" anchor="ctr" anchorCtr="1"/>
-          <a:lstStyle/>
-          <a:p>
-            <a:pPr algn="ctr">
-              <a:buNone/>
-            </a:pPr>
-            <a:r>
-              <a:rPr lang="en-US" sz="2300" b="0" dirty="0">
-                <a:solidFill>
-                  <a:srgbClr val="333333"/>
-                </a:solidFill>
-                <a:latin typeface="Arial"/>
-              </a:rPr>
-              <a:t>The edge weight w(e) encodes all execution costs; each heuristic below provides domain guidance to steer A* toward low-cost, profitable paths.</a:t>
-            </a:r>
-          </a:p>
-        </p:txBody>
-      </p:sp>
-      <p:sp>
-        <p:nvSpPr>
-          <p:cNvPr id="303" name="MathEq303"/>
-          <p:cNvSpPr txBox="1"/>
-          <p:nvPr/>
-        </p:nvSpPr>
-        <p:spPr>
-          <a:xfrm>
-            <a:off x="11350000" y="9300000"/>
-            <a:ext cx="9200000" cy="1050000"/>
-          </a:xfrm>
-          <a:prstGeom prst="rect">
-            <a:avLst/>
-          </a:prstGeom>
-          <a:solidFill>
-            <a:srgbClr val="F2F2F7"/>
-          </a:solidFill>
-          <a:ln w="19050">
-            <a:solidFill>
-              <a:srgbClr val="CC0633"/>
-            </a:solidFill>
-          </a:ln>
-        </p:spPr>
-        <p:txBody>
-          <a:bodyPr wrap="square" anchor="ctr" anchorCtr="1"/>
-          <a:lstStyle/>
-          <a:p>
-            <a:pPr algn="ctr">
-              <a:buNone/>
-              <a:defRPr sz="2800">
-                <a:latin typeface="Cambria Math"/>
-              </a:defRPr>
-            </a:pPr>
-            <a14:m xmlns:a14="http://schemas.microsoft.com/office/drawing/2010/main">
-              <m:oMathPara xmlns:m="http://schemas.openxmlformats.org/officeDocument/2006/math">
-                <m:oMathParaPr>
-                  <m:jc m:val="ctr"/>
-                </m:oMathParaPr>
-                <m:oMath>
-                  <m:r>
-                    <m:rPr>
-                      <m:sty m:val="i"/>
-                    </m:rPr>
-                    <m:t>w</m:t>
-                  </m:r>
-                  <m:r>
-                    <m:rPr>
-                      <m:sty m:val="p"/>
-                    </m:rPr>
-                    <m:t>(</m:t>
-                  </m:r>
-                  <m:r>
-                    <m:rPr>
-                      <m:sty m:val="i"/>
-                    </m:rPr>
-                    <m:t>e</m:t>
-                  </m:r>
-                  <m:r>
-                    <m:rPr>
-                      <m:sty m:val="p"/>
-                    </m:rPr>
-                    <m:t>) = −</m:t>
-                  </m:r>
-                  <m:r>
-                    <m:rPr>
-                      <m:sty m:val="p"/>
-                    </m:rPr>
-                    <m:t>log </m:t>
-                  </m:r>
-                  <m:r>
-                    <m:rPr>
-                      <m:sty m:val="i"/>
-                    </m:rPr>
-                    <m:t>r</m:t>
-                  </m:r>
-                  <m:r>
-                    <m:rPr>
-                      <m:sty m:val="p"/>
-                    </m:rPr>
-                    <m:t>(</m:t>
-                  </m:r>
-                  <m:r>
-                    <m:rPr>
-                      <m:sty m:val="i"/>
-                    </m:rPr>
-                    <m:t>e</m:t>
-                  </m:r>
-                  <m:r>
-                    <m:rPr>
-                      <m:sty m:val="p"/>
-                    </m:rPr>
-                    <m:t>)</m:t>
-                  </m:r>
-                </m:oMath>
-              </m:oMathPara>
-            </a14:m>
-          </a:p>
-          <a:p>
-            <a:pPr algn="ctr">
-              <a:buNone/>
-              <a:defRPr sz="2800">
-                <a:latin typeface="Cambria Math"/>
-              </a:defRPr>
-            </a:pPr>
-            <a14:m xmlns:a14="http://schemas.microsoft.com/office/drawing/2010/main">
-              <m:oMathPara xmlns:m="http://schemas.openxmlformats.org/officeDocument/2006/math">
-                <m:oMathParaPr>
-                  <m:jc m:val="ctr"/>
-                </m:oMathParaPr>
-                <m:oMath>
-                  <m:r>
-                    <m:rPr>
-                      <m:sty m:val="i"/>
-                    </m:rPr>
-                    <m:t>f</m:t>
-                  </m:r>
-                  <m:r>
-                    <m:rPr>
-                      <m:sty m:val="p"/>
-                    </m:rPr>
-                    <m:t>(</m:t>
-                  </m:r>
-                  <m:r>
-                    <m:rPr>
-                      <m:sty m:val="i"/>
-                    </m:rPr>
-                    <m:t>n</m:t>
-                  </m:r>
-                  <m:r>
-                    <m:rPr>
-                      <m:sty m:val="p"/>
-                    </m:rPr>
-                    <m:t>) = </m:t>
-                  </m:r>
-                  <m:r>
-                    <m:rPr>
-                      <m:sty m:val="i"/>
-                    </m:rPr>
-                    <m:t>g</m:t>
-                  </m:r>
-                  <m:r>
-                    <m:rPr>
-                      <m:sty m:val="p"/>
-                    </m:rPr>
-                    <m:t>(</m:t>
-                  </m:r>
-                  <m:r>
-                    <m:rPr>
-                      <m:sty m:val="i"/>
-                    </m:rPr>
-                    <m:t>n</m:t>
-                  </m:r>
-                  <m:r>
-                    <m:rPr>
-                      <m:sty m:val="p"/>
-                    </m:rPr>
-                    <m:t>) + </m:t>
-                  </m:r>
-                  <m:r>
-                    <m:rPr>
-                      <m:sty m:val="i"/>
-                    </m:rPr>
-                    <m:t>h</m:t>
-                  </m:r>
-                  <m:r>
-                    <m:rPr>
-                      <m:sty m:val="p"/>
-                    </m:rPr>
-                    <m:t>(</m:t>
-                  </m:r>
-                  <m:r>
-                    <m:rPr>
-                      <m:sty m:val="i"/>
-                    </m:rPr>
-                    <m:t>n</m:t>
-                  </m:r>
-                  <m:r>
-                    <m:rPr>
-                      <m:sty m:val="p"/>
-                    </m:rPr>
-                    <m:t>)</m:t>
-                  </m:r>
-                </m:oMath>
-              </m:oMathPara>
-            </a14:m>
-          </a:p>
-        </p:txBody>
-      </p:sp>
+            <a:ln>
+              <a:noFill/>
+            </a:ln>
+          </p:spPr>
+          <p:txBody>
+            <a:bodyPr wrap="square" anchor="ctr"/>
+            <a:lstStyle/>
+            <a:p>
+              <a:pPr algn="ctr">
+                <a:buNone/>
+              </a:pPr>
+              <a:r>
+                <a:rPr lang="en-US" sz="1700" i="1" dirty="0">
+                  <a:solidFill>
+                    <a:srgbClr val="555555"/>
+                  </a:solidFill>
+                  <a:latin typeface="Arial"/>
+                </a:rPr>
+                <a:t>Stablecoin arbitrage graph: 9 of 12 exchanges shown</a:t>
+              </a:r>
+            </a:p>
+          </p:txBody>
+        </p:sp>
+      </p:grpSp>
+      <mc:AlternateContent xmlns:mc="http://schemas.openxmlformats.org/markup-compatibility/2006">
+        <mc:Choice xmlns:a14="http://schemas.microsoft.com/office/drawing/2010/main" Requires="a14">
+          <p:sp>
+            <p:nvSpPr>
+              <p:cNvPr id="303" name="MathEq303"/>
+              <p:cNvSpPr txBox="1"/>
+              <p:nvPr/>
+            </p:nvSpPr>
+            <p:spPr>
+              <a:xfrm>
+                <a:off x="11350000" y="9857887"/>
+                <a:ext cx="9200000" cy="1050000"/>
+              </a:xfrm>
+              <a:prstGeom prst="rect">
+                <a:avLst/>
+              </a:prstGeom>
+              <a:solidFill>
+                <a:srgbClr val="F2F2F7"/>
+              </a:solidFill>
+              <a:ln w="19050">
+                <a:solidFill>
+                  <a:srgbClr val="CC0633"/>
+                </a:solidFill>
+              </a:ln>
+            </p:spPr>
+            <p:txBody>
+              <a:bodyPr wrap="square" anchor="ctr" anchorCtr="1"/>
+              <a:lstStyle/>
+              <a:p>
+                <a:pPr algn="ctr">
+                  <a:buNone/>
+                  <a:defRPr sz="2800">
+                    <a:latin typeface="Cambria Math"/>
+                  </a:defRPr>
+                </a:pPr>
+                <a14:m>
+                  <m:oMathPara xmlns:m="http://schemas.openxmlformats.org/officeDocument/2006/math">
+                    <m:oMathParaPr>
+                      <m:jc m:val="centerGroup"/>
+                    </m:oMathParaPr>
+                    <m:oMath xmlns:m="http://schemas.openxmlformats.org/officeDocument/2006/math">
+                      <m:r>
+                        <a:rPr>
+                          <a:latin typeface="Cambria Math" panose="02040503050406030204" pitchFamily="18" charset="0"/>
+                        </a:rPr>
+                        <m:t>𝑤</m:t>
+                      </m:r>
+                      <m:r>
+                        <a:rPr>
+                          <a:latin typeface="Cambria Math" panose="02040503050406030204" pitchFamily="18" charset="0"/>
+                        </a:rPr>
+                        <m:t>(</m:t>
+                      </m:r>
+                      <m:r>
+                        <a:rPr>
+                          <a:latin typeface="Cambria Math" panose="02040503050406030204" pitchFamily="18" charset="0"/>
+                        </a:rPr>
+                        <m:t>𝑒</m:t>
+                      </m:r>
+                      <m:r>
+                        <a:rPr>
+                          <a:latin typeface="Cambria Math" panose="02040503050406030204" pitchFamily="18" charset="0"/>
+                        </a:rPr>
+                        <m:t>) = −</m:t>
+                      </m:r>
+                      <m:r>
+                        <m:rPr>
+                          <m:sty m:val="p"/>
+                        </m:rPr>
+                        <a:rPr>
+                          <a:latin typeface="Cambria Math" panose="02040503050406030204" pitchFamily="18" charset="0"/>
+                        </a:rPr>
+                        <m:t>log</m:t>
+                      </m:r>
+                      <m:r>
+                        <a:rPr>
+                          <a:latin typeface="Cambria Math" panose="02040503050406030204" pitchFamily="18" charset="0"/>
+                        </a:rPr>
+                        <m:t> </m:t>
+                      </m:r>
+                      <m:r>
+                        <a:rPr>
+                          <a:latin typeface="Cambria Math" panose="02040503050406030204" pitchFamily="18" charset="0"/>
+                        </a:rPr>
+                        <m:t>𝑟</m:t>
+                      </m:r>
+                      <m:r>
+                        <a:rPr>
+                          <a:latin typeface="Cambria Math" panose="02040503050406030204" pitchFamily="18" charset="0"/>
+                        </a:rPr>
+                        <m:t>(</m:t>
+                      </m:r>
+                      <m:r>
+                        <a:rPr>
+                          <a:latin typeface="Cambria Math" panose="02040503050406030204" pitchFamily="18" charset="0"/>
+                        </a:rPr>
+                        <m:t>𝑒</m:t>
+                      </m:r>
+                      <m:r>
+                        <a:rPr>
+                          <a:latin typeface="Cambria Math" panose="02040503050406030204" pitchFamily="18" charset="0"/>
+                        </a:rPr>
+                        <m:t>)</m:t>
+                      </m:r>
+                    </m:oMath>
+                  </m:oMathPara>
+                </a14:m>
+                <a:endParaRPr dirty="0"/>
+              </a:p>
+              <a:p>
+                <a:pPr algn="ctr">
+                  <a:buNone/>
+                  <a:defRPr sz="2800">
+                    <a:latin typeface="Cambria Math"/>
+                  </a:defRPr>
+                </a:pPr>
+                <a14:m>
+                  <m:oMathPara xmlns:m="http://schemas.openxmlformats.org/officeDocument/2006/math">
+                    <m:oMathParaPr>
+                      <m:jc m:val="centerGroup"/>
+                    </m:oMathParaPr>
+                    <m:oMath xmlns:m="http://schemas.openxmlformats.org/officeDocument/2006/math">
+                      <m:r>
+                        <a:rPr>
+                          <a:latin typeface="Cambria Math" panose="02040503050406030204" pitchFamily="18" charset="0"/>
+                        </a:rPr>
+                        <m:t>𝑓</m:t>
+                      </m:r>
+                      <m:r>
+                        <a:rPr>
+                          <a:latin typeface="Cambria Math" panose="02040503050406030204" pitchFamily="18" charset="0"/>
+                        </a:rPr>
+                        <m:t>(</m:t>
+                      </m:r>
+                      <m:r>
+                        <a:rPr>
+                          <a:latin typeface="Cambria Math" panose="02040503050406030204" pitchFamily="18" charset="0"/>
+                        </a:rPr>
+                        <m:t>𝑛</m:t>
+                      </m:r>
+                      <m:r>
+                        <a:rPr>
+                          <a:latin typeface="Cambria Math" panose="02040503050406030204" pitchFamily="18" charset="0"/>
+                        </a:rPr>
+                        <m:t>) = </m:t>
+                      </m:r>
+                      <m:r>
+                        <a:rPr>
+                          <a:latin typeface="Cambria Math" panose="02040503050406030204" pitchFamily="18" charset="0"/>
+                        </a:rPr>
+                        <m:t>𝑔</m:t>
+                      </m:r>
+                      <m:r>
+                        <a:rPr>
+                          <a:latin typeface="Cambria Math" panose="02040503050406030204" pitchFamily="18" charset="0"/>
+                        </a:rPr>
+                        <m:t>(</m:t>
+                      </m:r>
+                      <m:r>
+                        <a:rPr>
+                          <a:latin typeface="Cambria Math" panose="02040503050406030204" pitchFamily="18" charset="0"/>
+                        </a:rPr>
+                        <m:t>𝑛</m:t>
+                      </m:r>
+                      <m:r>
+                        <a:rPr>
+                          <a:latin typeface="Cambria Math" panose="02040503050406030204" pitchFamily="18" charset="0"/>
+                        </a:rPr>
+                        <m:t>) + </m:t>
+                      </m:r>
+                      <m:r>
+                        <a:rPr>
+                          <a:latin typeface="Cambria Math" panose="02040503050406030204" pitchFamily="18" charset="0"/>
+                        </a:rPr>
+                        <m:t>h</m:t>
+                      </m:r>
+                      <m:r>
+                        <a:rPr>
+                          <a:latin typeface="Cambria Math" panose="02040503050406030204" pitchFamily="18" charset="0"/>
+                        </a:rPr>
+                        <m:t>(</m:t>
+                      </m:r>
+                      <m:r>
+                        <a:rPr>
+                          <a:latin typeface="Cambria Math" panose="02040503050406030204" pitchFamily="18" charset="0"/>
+                        </a:rPr>
+                        <m:t>𝑛</m:t>
+                      </m:r>
+                      <m:r>
+                        <a:rPr>
+                          <a:latin typeface="Cambria Math" panose="02040503050406030204" pitchFamily="18" charset="0"/>
+                        </a:rPr>
+                        <m:t>)</m:t>
+                      </m:r>
+                    </m:oMath>
+                  </m:oMathPara>
+                </a14:m>
+                <a:endParaRPr dirty="0"/>
+              </a:p>
+            </p:txBody>
+          </p:sp>
+        </mc:Choice>
+        <mc:Fallback>
+          <p:sp>
+            <p:nvSpPr>
+              <p:cNvPr id="303" name="MathEq303"/>
+              <p:cNvSpPr txBox="1">
+                <a:spLocks noRot="1" noChangeAspect="1" noMove="1" noResize="1" noEditPoints="1" noAdjustHandles="1" noChangeArrowheads="1" noChangeShapeType="1" noTextEdit="1"/>
+              </p:cNvSpPr>
+              <p:nvPr/>
+            </p:nvSpPr>
+            <p:spPr>
+              <a:xfrm>
+                <a:off x="11350000" y="9857887"/>
+                <a:ext cx="9200000" cy="1050000"/>
+              </a:xfrm>
+              <a:prstGeom prst="rect">
+                <a:avLst/>
+              </a:prstGeom>
+              <a:blipFill>
+                <a:blip r:embed="rId7"/>
+                <a:stretch>
+                  <a:fillRect b="-5882"/>
+                </a:stretch>
+              </a:blipFill>
+              <a:ln w="19050">
+                <a:solidFill>
+                  <a:srgbClr val="CC0633"/>
+                </a:solidFill>
+              </a:ln>
+            </p:spPr>
+            <p:txBody>
+              <a:bodyPr/>
+              <a:lstStyle/>
+              <a:p>
+                <a:r>
+                  <a:rPr lang="en-US">
+                    <a:noFill/>
+                  </a:rPr>
+                  <a:t> </a:t>
+                </a:r>
+              </a:p>
+            </p:txBody>
+          </p:sp>
+        </mc:Fallback>
+      </mc:AlternateContent>
       <p:sp>
         <p:nvSpPr>
           <p:cNvPr id="304" name="Lbl304"/>
@@ -16499,7 +16450,7 @@
         </p:nvSpPr>
         <p:spPr>
           <a:xfrm>
-            <a:off x="11350000" y="10450000"/>
+            <a:off x="11350000" y="11079336"/>
             <a:ext cx="9200000" cy="450000"/>
           </a:xfrm>
           <a:prstGeom prst="rect">
@@ -16529,627 +16480,919 @@
           </a:p>
         </p:txBody>
       </p:sp>
-      <p:sp>
-        <p:nvSpPr>
-          <p:cNvPr id="305" name="MathEq305"/>
-          <p:cNvSpPr txBox="1"/>
-          <p:nvPr/>
-        </p:nvSpPr>
-        <p:spPr>
-          <a:xfrm>
-            <a:off x="11350000" y="11000000"/>
-            <a:ext cx="9200000" cy="1000000"/>
-          </a:xfrm>
-          <a:prstGeom prst="rect">
-            <a:avLst/>
-          </a:prstGeom>
-          <a:solidFill>
-            <a:srgbClr val="F2F2F7"/>
-          </a:solidFill>
-          <a:ln w="19050">
-            <a:solidFill>
-              <a:srgbClr val="CC0633"/>
-            </a:solidFill>
-          </a:ln>
-        </p:spPr>
-        <p:txBody>
-          <a:bodyPr wrap="square" anchor="ctr" anchorCtr="1"/>
-          <a:lstStyle/>
-          <a:p>
-            <a:pPr algn="ctr">
-              <a:buNone/>
-              <a:defRPr sz="2800">
-                <a:latin typeface="Cambria Math"/>
-              </a:defRPr>
-            </a:pPr>
-            <a14:m xmlns:a14="http://schemas.microsoft.com/office/drawing/2010/main">
-              <m:oMathPara xmlns:m="http://schemas.openxmlformats.org/officeDocument/2006/math">
-                <m:oMathParaPr>
-                  <m:jc m:val="ctr"/>
-                </m:oMathParaPr>
-                <m:oMath>
-                  <m:sSub>
-                    <m:sSubPr>
-                      <m:ctrlPr/>
-                    </m:sSubPr>
-                    <m:e>
+      <mc:AlternateContent xmlns:mc="http://schemas.openxmlformats.org/markup-compatibility/2006">
+        <mc:Choice xmlns:a14="http://schemas.microsoft.com/office/drawing/2010/main" Requires="a14">
+          <p:sp>
+            <p:nvSpPr>
+              <p:cNvPr id="305" name="MathEq305"/>
+              <p:cNvSpPr txBox="1"/>
+              <p:nvPr/>
+            </p:nvSpPr>
+            <p:spPr>
+              <a:xfrm>
+                <a:off x="11350000" y="11667323"/>
+                <a:ext cx="9200000" cy="1000000"/>
+              </a:xfrm>
+              <a:prstGeom prst="rect">
+                <a:avLst/>
+              </a:prstGeom>
+              <a:solidFill>
+                <a:srgbClr val="F2F2F7"/>
+              </a:solidFill>
+              <a:ln w="19050">
+                <a:solidFill>
+                  <a:srgbClr val="CC0633"/>
+                </a:solidFill>
+              </a:ln>
+            </p:spPr>
+            <p:txBody>
+              <a:bodyPr wrap="square" anchor="ctr" anchorCtr="1"/>
+              <a:lstStyle/>
+              <a:p>
+                <a:pPr algn="ctr">
+                  <a:buNone/>
+                  <a:defRPr sz="2800">
+                    <a:latin typeface="Cambria Math"/>
+                  </a:defRPr>
+                </a:pPr>
+                <a14:m>
+                  <m:oMathPara xmlns:m="http://schemas.openxmlformats.org/officeDocument/2006/math">
+                    <m:oMathParaPr>
+                      <m:jc m:val="centerGroup"/>
+                    </m:oMathParaPr>
+                    <m:oMath xmlns:m="http://schemas.openxmlformats.org/officeDocument/2006/math">
+                      <m:sSub>
+                        <m:sSubPr>
+                          <m:ctrlPr>
+                            <a:rPr i="1">
+                              <a:latin typeface="Cambria Math" panose="02040503050406030204" pitchFamily="18" charset="0"/>
+                            </a:rPr>
+                          </m:ctrlPr>
+                        </m:sSubPr>
+                        <m:e>
+                          <m:r>
+                            <a:rPr>
+                              <a:latin typeface="Cambria Math" panose="02040503050406030204" pitchFamily="18" charset="0"/>
+                            </a:rPr>
+                            <m:t>h</m:t>
+                          </m:r>
+                        </m:e>
+                        <m:sub>
+                          <m:r>
+                            <a:rPr>
+                              <a:latin typeface="Cambria Math" panose="02040503050406030204" pitchFamily="18" charset="0"/>
+                            </a:rPr>
+                            <m:t>1</m:t>
+                          </m:r>
+                        </m:sub>
+                      </m:sSub>
                       <m:r>
-                        <m:rPr>
-                          <m:sty m:val="i"/>
-                        </m:rPr>
-                        <m:t>h</m:t>
+                        <a:rPr>
+                          <a:latin typeface="Cambria Math" panose="02040503050406030204" pitchFamily="18" charset="0"/>
+                        </a:rPr>
+                        <m:t> = </m:t>
                       </m:r>
-                    </m:e>
-                    <m:sub>
+                      <m:r>
+                        <a:rPr>
+                          <a:latin typeface="Cambria Math" panose="02040503050406030204" pitchFamily="18" charset="0"/>
+                        </a:rPr>
+                        <m:t>𝛽</m:t>
+                      </m:r>
+                      <m:r>
+                        <a:rPr>
+                          <a:latin typeface="Cambria Math" panose="02040503050406030204" pitchFamily="18" charset="0"/>
+                        </a:rPr>
+                        <m:t> ⋅ </m:t>
+                      </m:r>
                       <m:r>
                         <m:rPr>
                           <m:sty m:val="p"/>
                         </m:rPr>
-                        <m:t>1</m:t>
+                        <a:rPr>
+                          <a:latin typeface="Cambria Math" panose="02040503050406030204" pitchFamily="18" charset="0"/>
+                        </a:rPr>
+                        <m:t>max</m:t>
                       </m:r>
-                    </m:sub>
-                  </m:sSub>
-                  <m:r>
-                    <m:rPr>
-                      <m:sty m:val="p"/>
-                    </m:rPr>
-                    <m:t> = </m:t>
-                  </m:r>
-                  <m:r>
-                    <m:rPr>
-                      <m:sty m:val="i"/>
-                    </m:rPr>
-                    <m:t>β</m:t>
-                  </m:r>
-                  <m:r>
-                    <m:rPr>
-                      <m:sty m:val="p"/>
-                    </m:rPr>
-                    <m:t> ⋅ max(0, 1−</m:t>
-                  </m:r>
-                  <m:sSub>
-                    <m:sSubPr>
-                      <m:ctrlPr/>
-                    </m:sSubPr>
-                    <m:e>
                       <m:r>
-                        <m:rPr>
-                          <m:sty m:val="i"/>
-                        </m:rPr>
-                        <m:t>V</m:t>
+                        <a:rPr>
+                          <a:latin typeface="Cambria Math" panose="02040503050406030204" pitchFamily="18" charset="0"/>
+                        </a:rPr>
+                        <m:t>(0, 1−</m:t>
                       </m:r>
-                    </m:e>
-                    <m:sub>
+                      <m:sSub>
+                        <m:sSubPr>
+                          <m:ctrlPr>
+                            <a:rPr i="1">
+                              <a:latin typeface="Cambria Math" panose="02040503050406030204" pitchFamily="18" charset="0"/>
+                            </a:rPr>
+                          </m:ctrlPr>
+                        </m:sSubPr>
+                        <m:e>
+                          <m:r>
+                            <a:rPr>
+                              <a:latin typeface="Cambria Math" panose="02040503050406030204" pitchFamily="18" charset="0"/>
+                            </a:rPr>
+                            <m:t>𝑉</m:t>
+                          </m:r>
+                        </m:e>
+                        <m:sub>
+                          <m:r>
+                            <a:rPr>
+                              <a:latin typeface="Cambria Math" panose="02040503050406030204" pitchFamily="18" charset="0"/>
+                            </a:rPr>
+                            <m:t>24</m:t>
+                          </m:r>
+                          <m:r>
+                            <m:rPr>
+                              <m:sty m:val="p"/>
+                            </m:rPr>
+                            <a:rPr>
+                              <a:latin typeface="Cambria Math" panose="02040503050406030204" pitchFamily="18" charset="0"/>
+                            </a:rPr>
+                            <m:t>h</m:t>
+                          </m:r>
+                        </m:sub>
+                      </m:sSub>
+                      <m:r>
+                        <a:rPr>
+                          <a:latin typeface="Cambria Math" panose="02040503050406030204" pitchFamily="18" charset="0"/>
+                        </a:rPr>
+                        <m:t>/</m:t>
+                      </m:r>
+                      <m:sSub>
+                        <m:sSubPr>
+                          <m:ctrlPr>
+                            <a:rPr i="1">
+                              <a:latin typeface="Cambria Math" panose="02040503050406030204" pitchFamily="18" charset="0"/>
+                            </a:rPr>
+                          </m:ctrlPr>
+                        </m:sSubPr>
+                        <m:e>
+                          <m:r>
+                            <a:rPr>
+                              <a:latin typeface="Cambria Math" panose="02040503050406030204" pitchFamily="18" charset="0"/>
+                            </a:rPr>
+                            <m:t>𝑄</m:t>
+                          </m:r>
+                        </m:e>
+                        <m:sub>
+                          <m:r>
+                            <m:rPr>
+                              <m:sty m:val="p"/>
+                            </m:rPr>
+                            <a:rPr>
+                              <a:latin typeface="Cambria Math" panose="02040503050406030204" pitchFamily="18" charset="0"/>
+                            </a:rPr>
+                            <m:t>ord</m:t>
+                          </m:r>
+                        </m:sub>
+                      </m:sSub>
+                      <m:r>
+                        <a:rPr>
+                          <a:latin typeface="Cambria Math" panose="02040503050406030204" pitchFamily="18" charset="0"/>
+                        </a:rPr>
+                        <m:t>)</m:t>
+                      </m:r>
+                    </m:oMath>
+                  </m:oMathPara>
+                </a14:m>
+                <a:endParaRPr/>
+              </a:p>
+              <a:p>
+                <a:pPr algn="ctr">
+                  <a:buNone/>
+                </a:pPr>
+                <a:r>
+                  <a:rPr lang="en-US" sz="2100" b="0" i="1" dirty="0">
+                    <a:solidFill>
+                      <a:srgbClr val="555555"/>
+                    </a:solidFill>
+                    <a:latin typeface="Arial"/>
+                  </a:rPr>
+                  <a:t>Liquidity depth penalty</a:t>
+                </a:r>
+              </a:p>
+            </p:txBody>
+          </p:sp>
+        </mc:Choice>
+        <mc:Fallback>
+          <p:sp>
+            <p:nvSpPr>
+              <p:cNvPr id="305" name="MathEq305"/>
+              <p:cNvSpPr txBox="1">
+                <a:spLocks noRot="1" noChangeAspect="1" noMove="1" noResize="1" noEditPoints="1" noAdjustHandles="1" noChangeArrowheads="1" noChangeShapeType="1" noTextEdit="1"/>
+              </p:cNvSpPr>
+              <p:nvPr/>
+            </p:nvSpPr>
+            <p:spPr>
+              <a:xfrm>
+                <a:off x="11350000" y="11667323"/>
+                <a:ext cx="9200000" cy="1000000"/>
+              </a:xfrm>
+              <a:prstGeom prst="rect">
+                <a:avLst/>
+              </a:prstGeom>
+              <a:blipFill>
+                <a:blip r:embed="rId8"/>
+                <a:stretch>
+                  <a:fillRect b="-2469"/>
+                </a:stretch>
+              </a:blipFill>
+              <a:ln w="19050">
+                <a:solidFill>
+                  <a:srgbClr val="CC0633"/>
+                </a:solidFill>
+              </a:ln>
+            </p:spPr>
+            <p:txBody>
+              <a:bodyPr/>
+              <a:lstStyle/>
+              <a:p>
+                <a:r>
+                  <a:rPr lang="en-US">
+                    <a:noFill/>
+                  </a:rPr>
+                  <a:t> </a:t>
+                </a:r>
+              </a:p>
+            </p:txBody>
+          </p:sp>
+        </mc:Fallback>
+      </mc:AlternateContent>
+      <mc:AlternateContent xmlns:mc="http://schemas.openxmlformats.org/markup-compatibility/2006">
+        <mc:Choice xmlns:a14="http://schemas.microsoft.com/office/drawing/2010/main" Requires="a14">
+          <p:sp>
+            <p:nvSpPr>
+              <p:cNvPr id="306" name="MathEq306"/>
+              <p:cNvSpPr txBox="1"/>
+              <p:nvPr/>
+            </p:nvSpPr>
+            <p:spPr>
+              <a:xfrm>
+                <a:off x="11350000" y="12838808"/>
+                <a:ext cx="9200000" cy="1000000"/>
+              </a:xfrm>
+              <a:prstGeom prst="rect">
+                <a:avLst/>
+              </a:prstGeom>
+              <a:solidFill>
+                <a:srgbClr val="F2F2F7"/>
+              </a:solidFill>
+              <a:ln w="19050">
+                <a:solidFill>
+                  <a:srgbClr val="CC0633"/>
+                </a:solidFill>
+              </a:ln>
+            </p:spPr>
+            <p:txBody>
+              <a:bodyPr wrap="square" anchor="ctr" anchorCtr="1"/>
+              <a:lstStyle/>
+              <a:p>
+                <a:pPr algn="ctr">
+                  <a:buNone/>
+                  <a:defRPr sz="2800">
+                    <a:latin typeface="Cambria Math"/>
+                  </a:defRPr>
+                </a:pPr>
+                <a14:m>
+                  <m:oMathPara xmlns:m="http://schemas.openxmlformats.org/officeDocument/2006/math">
+                    <m:oMathParaPr>
+                      <m:jc m:val="centerGroup"/>
+                    </m:oMathParaPr>
+                    <m:oMath xmlns:m="http://schemas.openxmlformats.org/officeDocument/2006/math">
+                      <m:sSub>
+                        <m:sSubPr>
+                          <m:ctrlPr>
+                            <a:rPr i="1">
+                              <a:latin typeface="Cambria Math" panose="02040503050406030204" pitchFamily="18" charset="0"/>
+                            </a:rPr>
+                          </m:ctrlPr>
+                        </m:sSubPr>
+                        <m:e>
+                          <m:r>
+                            <a:rPr>
+                              <a:latin typeface="Cambria Math" panose="02040503050406030204" pitchFamily="18" charset="0"/>
+                            </a:rPr>
+                            <m:t>h</m:t>
+                          </m:r>
+                        </m:e>
+                        <m:sub>
+                          <m:r>
+                            <a:rPr>
+                              <a:latin typeface="Cambria Math" panose="02040503050406030204" pitchFamily="18" charset="0"/>
+                            </a:rPr>
+                            <m:t>2</m:t>
+                          </m:r>
+                        </m:sub>
+                      </m:sSub>
+                      <m:r>
+                        <a:rPr>
+                          <a:latin typeface="Cambria Math" panose="02040503050406030204" pitchFamily="18" charset="0"/>
+                        </a:rPr>
+                        <m:t> = </m:t>
+                      </m:r>
+                      <m:r>
+                        <a:rPr>
+                          <a:latin typeface="Cambria Math" panose="02040503050406030204" pitchFamily="18" charset="0"/>
+                        </a:rPr>
+                        <m:t>𝜆</m:t>
+                      </m:r>
+                      <m:r>
+                        <a:rPr>
+                          <a:latin typeface="Cambria Math" panose="02040503050406030204" pitchFamily="18" charset="0"/>
+                        </a:rPr>
+                        <m:t> ⋅ </m:t>
+                      </m:r>
                       <m:r>
                         <m:rPr>
                           <m:sty m:val="p"/>
                         </m:rPr>
-                        <m:t>24h</m:t>
+                        <a:rPr>
+                          <a:latin typeface="Cambria Math" panose="02040503050406030204" pitchFamily="18" charset="0"/>
+                        </a:rPr>
+                        <m:t>max</m:t>
                       </m:r>
-                    </m:sub>
-                  </m:sSub>
-                  <m:r>
-                    <m:rPr>
-                      <m:sty m:val="p"/>
-                    </m:rPr>
-                    <m:t>/</m:t>
-                  </m:r>
-                  <m:sSub>
-                    <m:sSubPr>
-                      <m:ctrlPr/>
-                    </m:sSubPr>
-                    <m:e>
                       <m:r>
-                        <m:rPr>
-                          <m:sty m:val="i"/>
-                        </m:rPr>
-                        <m:t>Q</m:t>
+                        <a:rPr>
+                          <a:latin typeface="Cambria Math" panose="02040503050406030204" pitchFamily="18" charset="0"/>
+                        </a:rPr>
+                        <m:t>(0, </m:t>
                       </m:r>
-                    </m:e>
-                    <m:sub>
+                      <m:sSub>
+                        <m:sSubPr>
+                          <m:ctrlPr>
+                            <a:rPr i="1">
+                              <a:latin typeface="Cambria Math" panose="02040503050406030204" pitchFamily="18" charset="0"/>
+                            </a:rPr>
+                          </m:ctrlPr>
+                        </m:sSubPr>
+                        <m:e>
+                          <m:r>
+                            <a:rPr>
+                              <a:latin typeface="Cambria Math" panose="02040503050406030204" pitchFamily="18" charset="0"/>
+                            </a:rPr>
+                            <m:t>𝑆</m:t>
+                          </m:r>
+                        </m:e>
+                        <m:sub>
+                          <m:r>
+                            <m:rPr>
+                              <m:sty m:val="p"/>
+                            </m:rPr>
+                            <a:rPr>
+                              <a:latin typeface="Cambria Math" panose="02040503050406030204" pitchFamily="18" charset="0"/>
+                            </a:rPr>
+                            <m:t>bps</m:t>
+                          </m:r>
+                        </m:sub>
+                      </m:sSub>
                       <m:r>
-                        <m:rPr>
-                          <m:sty m:val="p"/>
-                        </m:rPr>
-                        <m:t>ord</m:t>
+                        <a:rPr>
+                          <a:latin typeface="Cambria Math" panose="02040503050406030204" pitchFamily="18" charset="0"/>
+                        </a:rPr>
+                        <m:t> − </m:t>
                       </m:r>
-                    </m:sub>
-                  </m:sSub>
-                  <m:r>
-                    <m:rPr>
-                      <m:sty m:val="p"/>
-                    </m:rPr>
-                    <m:t>)</m:t>
-                  </m:r>
-                </m:oMath>
-              </m:oMathPara>
-            </a14:m>
-          </a:p>
-          <a:p>
-            <a:pPr algn="ctr">
-              <a:buNone/>
-            </a:pPr>
-            <a:r>
-              <a:rPr lang="en-US" sz="2100" i="1" b="0" dirty="0">
-                <a:solidFill>
-                  <a:srgbClr val="555555"/>
-                </a:solidFill>
-                <a:latin typeface="Arial"/>
-              </a:rPr>
-              <a:t>Liquidity depth penalty</a:t>
-            </a:r>
-          </a:p>
-        </p:txBody>
-      </p:sp>
-      <p:sp>
-        <p:nvSpPr>
-          <p:cNvPr id="306" name="MathEq306"/>
-          <p:cNvSpPr txBox="1"/>
+                      <m:r>
+                        <a:rPr>
+                          <a:latin typeface="Cambria Math" panose="02040503050406030204" pitchFamily="18" charset="0"/>
+                        </a:rPr>
+                        <m:t>𝜃</m:t>
+                      </m:r>
+                      <m:r>
+                        <a:rPr>
+                          <a:latin typeface="Cambria Math" panose="02040503050406030204" pitchFamily="18" charset="0"/>
+                        </a:rPr>
+                        <m:t>)</m:t>
+                      </m:r>
+                    </m:oMath>
+                  </m:oMathPara>
+                </a14:m>
+                <a:endParaRPr/>
+              </a:p>
+              <a:p>
+                <a:pPr algn="ctr">
+                  <a:buNone/>
+                </a:pPr>
+                <a:r>
+                  <a:rPr lang="en-US" sz="2100" b="1" i="1" dirty="0">
+                    <a:solidFill>
+                      <a:srgbClr val="CC0633"/>
+                    </a:solidFill>
+                    <a:latin typeface="Arial"/>
+                  </a:rPr>
+                  <a:t>★ Slippage-aware  —  Novel Contribution ★</a:t>
+                </a:r>
+              </a:p>
+            </p:txBody>
+          </p:sp>
+        </mc:Choice>
+        <mc:Fallback>
+          <p:sp>
+            <p:nvSpPr>
+              <p:cNvPr id="306" name="MathEq306"/>
+              <p:cNvSpPr txBox="1">
+                <a:spLocks noRot="1" noChangeAspect="1" noMove="1" noResize="1" noEditPoints="1" noAdjustHandles="1" noChangeArrowheads="1" noChangeShapeType="1" noTextEdit="1"/>
+              </p:cNvSpPr>
+              <p:nvPr/>
+            </p:nvSpPr>
+            <p:spPr>
+              <a:xfrm>
+                <a:off x="11350000" y="12838808"/>
+                <a:ext cx="9200000" cy="1000000"/>
+              </a:xfrm>
+              <a:prstGeom prst="rect">
+                <a:avLst/>
+              </a:prstGeom>
+              <a:blipFill>
+                <a:blip r:embed="rId9"/>
+                <a:stretch>
+                  <a:fillRect b="-3704"/>
+                </a:stretch>
+              </a:blipFill>
+              <a:ln w="19050">
+                <a:solidFill>
+                  <a:srgbClr val="CC0633"/>
+                </a:solidFill>
+              </a:ln>
+            </p:spPr>
+            <p:txBody>
+              <a:bodyPr/>
+              <a:lstStyle/>
+              <a:p>
+                <a:r>
+                  <a:rPr lang="en-US">
+                    <a:noFill/>
+                  </a:rPr>
+                  <a:t> </a:t>
+                </a:r>
+              </a:p>
+            </p:txBody>
+          </p:sp>
+        </mc:Fallback>
+      </mc:AlternateContent>
+      <mc:AlternateContent xmlns:mc="http://schemas.openxmlformats.org/markup-compatibility/2006">
+        <mc:Choice xmlns:a14="http://schemas.microsoft.com/office/drawing/2010/main" Requires="a14">
+          <p:sp>
+            <p:nvSpPr>
+              <p:cNvPr id="307" name="MathEq307"/>
+              <p:cNvSpPr txBox="1"/>
+              <p:nvPr/>
+            </p:nvSpPr>
+            <p:spPr>
+              <a:xfrm>
+                <a:off x="11350000" y="14010293"/>
+                <a:ext cx="9200000" cy="1000000"/>
+              </a:xfrm>
+              <a:prstGeom prst="rect">
+                <a:avLst/>
+              </a:prstGeom>
+              <a:solidFill>
+                <a:srgbClr val="F2F2F7"/>
+              </a:solidFill>
+              <a:ln w="19050">
+                <a:solidFill>
+                  <a:srgbClr val="CC0633"/>
+                </a:solidFill>
+              </a:ln>
+            </p:spPr>
+            <p:txBody>
+              <a:bodyPr wrap="square" anchor="ctr" anchorCtr="1"/>
+              <a:lstStyle/>
+              <a:p>
+                <a:pPr algn="ctr">
+                  <a:buNone/>
+                  <a:defRPr sz="2800">
+                    <a:latin typeface="Cambria Math"/>
+                  </a:defRPr>
+                </a:pPr>
+                <a14:m>
+                  <m:oMathPara xmlns:m="http://schemas.openxmlformats.org/officeDocument/2006/math">
+                    <m:oMathParaPr>
+                      <m:jc m:val="centerGroup"/>
+                    </m:oMathParaPr>
+                    <m:oMath xmlns:m="http://schemas.openxmlformats.org/officeDocument/2006/math">
+                      <m:sSub>
+                        <m:sSubPr>
+                          <m:ctrlPr>
+                            <a:rPr i="1">
+                              <a:latin typeface="Cambria Math" panose="02040503050406030204" pitchFamily="18" charset="0"/>
+                            </a:rPr>
+                          </m:ctrlPr>
+                        </m:sSubPr>
+                        <m:e>
+                          <m:r>
+                            <a:rPr>
+                              <a:latin typeface="Cambria Math" panose="02040503050406030204" pitchFamily="18" charset="0"/>
+                            </a:rPr>
+                            <m:t>h</m:t>
+                          </m:r>
+                        </m:e>
+                        <m:sub>
+                          <m:r>
+                            <a:rPr>
+                              <a:latin typeface="Cambria Math" panose="02040503050406030204" pitchFamily="18" charset="0"/>
+                            </a:rPr>
+                            <m:t>3</m:t>
+                          </m:r>
+                        </m:sub>
+                      </m:sSub>
+                      <m:r>
+                        <a:rPr>
+                          <a:latin typeface="Cambria Math" panose="02040503050406030204" pitchFamily="18" charset="0"/>
+                        </a:rPr>
+                        <m:t> = </m:t>
+                      </m:r>
+                      <m:r>
+                        <a:rPr>
+                          <a:latin typeface="Cambria Math" panose="02040503050406030204" pitchFamily="18" charset="0"/>
+                        </a:rPr>
+                        <m:t>𝛾</m:t>
+                      </m:r>
+                      <m:r>
+                        <a:rPr>
+                          <a:latin typeface="Cambria Math" panose="02040503050406030204" pitchFamily="18" charset="0"/>
+                        </a:rPr>
+                        <m:t> ⋅ (</m:t>
+                      </m:r>
+                      <m:sSub>
+                        <m:sSubPr>
+                          <m:ctrlPr>
+                            <a:rPr i="1">
+                              <a:latin typeface="Cambria Math" panose="02040503050406030204" pitchFamily="18" charset="0"/>
+                            </a:rPr>
+                          </m:ctrlPr>
+                        </m:sSubPr>
+                        <m:e>
+                          <m:r>
+                            <a:rPr>
+                              <a:latin typeface="Cambria Math" panose="02040503050406030204" pitchFamily="18" charset="0"/>
+                            </a:rPr>
+                            <m:t>𝑡</m:t>
+                          </m:r>
+                        </m:e>
+                        <m:sub>
+                          <m:r>
+                            <m:rPr>
+                              <m:sty m:val="p"/>
+                            </m:rPr>
+                            <a:rPr>
+                              <a:latin typeface="Cambria Math" panose="02040503050406030204" pitchFamily="18" charset="0"/>
+                            </a:rPr>
+                            <m:t>chain</m:t>
+                          </m:r>
+                        </m:sub>
+                      </m:sSub>
+                      <m:r>
+                        <a:rPr>
+                          <a:latin typeface="Cambria Math" panose="02040503050406030204" pitchFamily="18" charset="0"/>
+                        </a:rPr>
+                        <m:t> + </m:t>
+                      </m:r>
+                      <m:sSub>
+                        <m:sSubPr>
+                          <m:ctrlPr>
+                            <a:rPr i="1">
+                              <a:latin typeface="Cambria Math" panose="02040503050406030204" pitchFamily="18" charset="0"/>
+                            </a:rPr>
+                          </m:ctrlPr>
+                        </m:sSubPr>
+                        <m:e>
+                          <m:r>
+                            <a:rPr>
+                              <a:latin typeface="Cambria Math" panose="02040503050406030204" pitchFamily="18" charset="0"/>
+                            </a:rPr>
+                            <m:t>𝜌</m:t>
+                          </m:r>
+                        </m:e>
+                        <m:sub>
+                          <m:r>
+                            <m:rPr>
+                              <m:sty m:val="p"/>
+                            </m:rPr>
+                            <a:rPr>
+                              <a:latin typeface="Cambria Math" panose="02040503050406030204" pitchFamily="18" charset="0"/>
+                            </a:rPr>
+                            <m:t>venue</m:t>
+                          </m:r>
+                        </m:sub>
+                      </m:sSub>
+                      <m:r>
+                        <a:rPr>
+                          <a:latin typeface="Cambria Math" panose="02040503050406030204" pitchFamily="18" charset="0"/>
+                        </a:rPr>
+                        <m:t>)</m:t>
+                      </m:r>
+                    </m:oMath>
+                  </m:oMathPara>
+                </a14:m>
+                <a:endParaRPr/>
+              </a:p>
+              <a:p>
+                <a:pPr algn="ctr">
+                  <a:buNone/>
+                </a:pPr>
+                <a:r>
+                  <a:rPr lang="en-US" sz="2100" b="0" i="1" dirty="0">
+                    <a:solidFill>
+                      <a:srgbClr val="555555"/>
+                    </a:solidFill>
+                    <a:latin typeface="Arial"/>
+                  </a:rPr>
+                  <a:t>Chain congestion + venue reliability</a:t>
+                </a:r>
+              </a:p>
+            </p:txBody>
+          </p:sp>
+        </mc:Choice>
+        <mc:Fallback>
+          <p:sp>
+            <p:nvSpPr>
+              <p:cNvPr id="307" name="MathEq307"/>
+              <p:cNvSpPr txBox="1">
+                <a:spLocks noRot="1" noChangeAspect="1" noMove="1" noResize="1" noEditPoints="1" noAdjustHandles="1" noChangeArrowheads="1" noChangeShapeType="1" noTextEdit="1"/>
+              </p:cNvSpPr>
+              <p:nvPr/>
+            </p:nvSpPr>
+            <p:spPr>
+              <a:xfrm>
+                <a:off x="11350000" y="14010293"/>
+                <a:ext cx="9200000" cy="1000000"/>
+              </a:xfrm>
+              <a:prstGeom prst="rect">
+                <a:avLst/>
+              </a:prstGeom>
+              <a:blipFill>
+                <a:blip r:embed="rId10"/>
+                <a:stretch>
+                  <a:fillRect b="-3704"/>
+                </a:stretch>
+              </a:blipFill>
+              <a:ln w="19050">
+                <a:solidFill>
+                  <a:srgbClr val="CC0633"/>
+                </a:solidFill>
+              </a:ln>
+            </p:spPr>
+            <p:txBody>
+              <a:bodyPr/>
+              <a:lstStyle/>
+              <a:p>
+                <a:r>
+                  <a:rPr lang="en-US">
+                    <a:noFill/>
+                  </a:rPr>
+                  <a:t> </a:t>
+                </a:r>
+              </a:p>
+            </p:txBody>
+          </p:sp>
+        </mc:Fallback>
+      </mc:AlternateContent>
+      <p:grpSp>
+        <p:nvGrpSpPr>
+          <p:cNvPr id="4" name="Group 3">
+            <a:extLst>
+              <a:ext uri="{FF2B5EF4-FFF2-40B4-BE49-F238E27FC236}">
+                <a16:creationId xmlns:a16="http://schemas.microsoft.com/office/drawing/2014/main" id="{AA0FD853-76EC-53FE-1464-6F92424A2574}"/>
+              </a:ext>
+            </a:extLst>
+          </p:cNvPr>
+          <p:cNvGrpSpPr/>
           <p:nvPr/>
-        </p:nvSpPr>
-        <p:spPr>
+        </p:nvGrpSpPr>
+        <p:grpSpPr>
           <a:xfrm>
-            <a:off x="11350000" y="12100000"/>
-            <a:ext cx="9200000" cy="1000000"/>
+            <a:off x="11350000" y="15319823"/>
+            <a:ext cx="9200000" cy="5836325"/>
+            <a:chOff x="11350000" y="14420000"/>
+            <a:chExt cx="9200000" cy="5836325"/>
           </a:xfrm>
-          <a:prstGeom prst="rect">
-            <a:avLst/>
-          </a:prstGeom>
-          <a:solidFill>
-            <a:srgbClr val="F2F2F7"/>
-          </a:solidFill>
-          <a:ln w="19050">
-            <a:solidFill>
-              <a:srgbClr val="CC0633"/>
-            </a:solidFill>
-          </a:ln>
-        </p:spPr>
-        <p:txBody>
-          <a:bodyPr wrap="square" anchor="ctr" anchorCtr="1"/>
-          <a:lstStyle/>
-          <a:p>
-            <a:pPr algn="ctr">
-              <a:buNone/>
-              <a:defRPr sz="2800">
-                <a:latin typeface="Cambria Math"/>
-              </a:defRPr>
-            </a:pPr>
-            <a14:m xmlns:a14="http://schemas.microsoft.com/office/drawing/2010/main">
-              <m:oMathPara xmlns:m="http://schemas.openxmlformats.org/officeDocument/2006/math">
-                <m:oMathParaPr>
-                  <m:jc m:val="ctr"/>
-                </m:oMathParaPr>
-                <m:oMath>
-                  <m:sSub>
-                    <m:sSubPr>
-                      <m:ctrlPr/>
-                    </m:sSubPr>
-                    <m:e>
-                      <m:r>
-                        <m:rPr>
-                          <m:sty m:val="i"/>
-                        </m:rPr>
-                        <m:t>h</m:t>
-                      </m:r>
-                    </m:e>
-                    <m:sub>
-                      <m:r>
-                        <m:rPr>
-                          <m:sty m:val="p"/>
-                        </m:rPr>
-                        <m:t>2</m:t>
-                      </m:r>
-                    </m:sub>
-                  </m:sSub>
-                  <m:r>
-                    <m:rPr>
-                      <m:sty m:val="p"/>
-                    </m:rPr>
-                    <m:t> = </m:t>
-                  </m:r>
-                  <m:r>
-                    <m:rPr>
-                      <m:sty m:val="i"/>
-                    </m:rPr>
-                    <m:t>λ</m:t>
-                  </m:r>
-                  <m:r>
-                    <m:rPr>
-                      <m:sty m:val="p"/>
-                    </m:rPr>
-                    <m:t> ⋅ max(0, </m:t>
-                  </m:r>
-                  <m:sSub>
-                    <m:sSubPr>
-                      <m:ctrlPr/>
-                    </m:sSubPr>
-                    <m:e>
-                      <m:r>
-                        <m:rPr>
-                          <m:sty m:val="i"/>
-                        </m:rPr>
-                        <m:t>S</m:t>
-                      </m:r>
-                    </m:e>
-                    <m:sub>
-                      <m:r>
-                        <m:rPr>
-                          <m:sty m:val="p"/>
-                        </m:rPr>
-                        <m:t>bps</m:t>
-                      </m:r>
-                    </m:sub>
-                  </m:sSub>
-                  <m:r>
-                    <m:rPr>
-                      <m:sty m:val="p"/>
-                    </m:rPr>
-                    <m:t> − </m:t>
-                  </m:r>
-                  <m:r>
-                    <m:rPr>
-                      <m:sty m:val="i"/>
-                    </m:rPr>
-                    <m:t>θ</m:t>
-                  </m:r>
-                  <m:r>
-                    <m:rPr>
-                      <m:sty m:val="p"/>
-                    </m:rPr>
-                    <m:t>)</m:t>
-                  </m:r>
-                </m:oMath>
-              </m:oMathPara>
-            </a14:m>
-          </a:p>
-          <a:p>
-            <a:pPr algn="ctr">
-              <a:buNone/>
-            </a:pPr>
-            <a:r>
-              <a:rPr lang="en-US" sz="2100" i="1" b="1" dirty="0">
-                <a:solidFill>
-                  <a:srgbClr val="CC0633"/>
-                </a:solidFill>
-                <a:latin typeface="Arial"/>
-              </a:rPr>
-              <a:t>★ Slippage-aware  —  Novel Contribution ★</a:t>
-            </a:r>
-          </a:p>
-        </p:txBody>
-      </p:sp>
-      <p:sp>
-        <p:nvSpPr>
-          <p:cNvPr id="307" name="MathEq307"/>
-          <p:cNvSpPr txBox="1"/>
+        </p:grpSpPr>
+        <p:pic>
+          <p:nvPicPr>
+            <p:cNvPr id="308" name="CameraReadySuccesfulPathProfit"/>
+            <p:cNvPicPr/>
+            <p:nvPr/>
+          </p:nvPicPr>
+          <p:blipFill>
+            <a:blip r:embed="rId11"/>
+            <a:stretch>
+              <a:fillRect/>
+            </a:stretch>
+          </p:blipFill>
+          <p:spPr>
+            <a:xfrm>
+              <a:off x="11350000" y="14420000"/>
+              <a:ext cx="9200000" cy="5431325"/>
+            </a:xfrm>
+            <a:prstGeom prst="rect">
+              <a:avLst/>
+            </a:prstGeom>
+          </p:spPr>
+        </p:pic>
+        <p:sp>
+          <p:nvSpPr>
+            <p:cNvPr id="309" name="Cap309"/>
+            <p:cNvSpPr txBox="1"/>
+            <p:nvPr/>
+          </p:nvSpPr>
+          <p:spPr>
+            <a:xfrm>
+              <a:off x="11350000" y="19886325"/>
+              <a:ext cx="9200000" cy="370000"/>
+            </a:xfrm>
+            <a:prstGeom prst="rect">
+              <a:avLst/>
+            </a:prstGeom>
+            <a:noFill/>
+            <a:ln>
+              <a:noFill/>
+            </a:ln>
+          </p:spPr>
+          <p:txBody>
+            <a:bodyPr wrap="square" anchor="ctr"/>
+            <a:lstStyle/>
+            <a:p>
+              <a:pPr algn="ctr">
+                <a:buNone/>
+              </a:pPr>
+              <a:r>
+                <a:rPr lang="en-US" sz="1700" i="1" dirty="0">
+                  <a:solidFill>
+                    <a:srgbClr val="555555"/>
+                  </a:solidFill>
+                  <a:latin typeface="Arial"/>
+                </a:rPr>
+                <a:t>Fig. 1b - A profitable path: Kraken -&gt; KuCoin (USDT -&gt; TUSD)</a:t>
+              </a:r>
+            </a:p>
+          </p:txBody>
+        </p:sp>
+      </p:grpSp>
+      <p:grpSp>
+        <p:nvGrpSpPr>
+          <p:cNvPr id="5" name="Group 4">
+            <a:extLst>
+              <a:ext uri="{FF2B5EF4-FFF2-40B4-BE49-F238E27FC236}">
+                <a16:creationId xmlns:a16="http://schemas.microsoft.com/office/drawing/2014/main" id="{D11ACEE8-7522-9487-2DDC-D51FF456EC90}"/>
+              </a:ext>
+            </a:extLst>
+          </p:cNvPr>
+          <p:cNvGrpSpPr/>
           <p:nvPr/>
-        </p:nvSpPr>
-        <p:spPr>
+        </p:nvGrpSpPr>
+        <p:grpSpPr>
           <a:xfrm>
-            <a:off x="11350000" y="13200000"/>
-            <a:ext cx="9200000" cy="1000000"/>
+            <a:off x="24709070" y="6701725"/>
+            <a:ext cx="4324489" cy="4037364"/>
+            <a:chOff x="24637755" y="6740000"/>
+            <a:chExt cx="4324489" cy="4037364"/>
           </a:xfrm>
-          <a:prstGeom prst="rect">
-            <a:avLst/>
-          </a:prstGeom>
-          <a:solidFill>
-            <a:srgbClr val="F2F2F7"/>
-          </a:solidFill>
-          <a:ln w="19050">
-            <a:solidFill>
-              <a:srgbClr val="CC0633"/>
-            </a:solidFill>
-          </a:ln>
-        </p:spPr>
-        <p:txBody>
-          <a:bodyPr wrap="square" anchor="ctr" anchorCtr="1"/>
-          <a:lstStyle/>
-          <a:p>
-            <a:pPr algn="ctr">
-              <a:buNone/>
-              <a:defRPr sz="2800">
-                <a:latin typeface="Cambria Math"/>
-              </a:defRPr>
-            </a:pPr>
-            <a14:m xmlns:a14="http://schemas.microsoft.com/office/drawing/2010/main">
-              <m:oMathPara xmlns:m="http://schemas.openxmlformats.org/officeDocument/2006/math">
-                <m:oMathParaPr>
-                  <m:jc m:val="ctr"/>
-                </m:oMathParaPr>
-                <m:oMath>
-                  <m:sSub>
-                    <m:sSubPr>
-                      <m:ctrlPr/>
-                    </m:sSubPr>
-                    <m:e>
-                      <m:r>
-                        <m:rPr>
-                          <m:sty m:val="i"/>
-                        </m:rPr>
-                        <m:t>h</m:t>
-                      </m:r>
-                    </m:e>
-                    <m:sub>
-                      <m:r>
-                        <m:rPr>
-                          <m:sty m:val="p"/>
-                        </m:rPr>
-                        <m:t>3</m:t>
-                      </m:r>
-                    </m:sub>
-                  </m:sSub>
-                  <m:r>
-                    <m:rPr>
-                      <m:sty m:val="p"/>
-                    </m:rPr>
-                    <m:t> = </m:t>
-                  </m:r>
-                  <m:r>
-                    <m:rPr>
-                      <m:sty m:val="i"/>
-                    </m:rPr>
-                    <m:t>γ</m:t>
-                  </m:r>
-                  <m:r>
-                    <m:rPr>
-                      <m:sty m:val="p"/>
-                    </m:rPr>
-                    <m:t> ⋅ (</m:t>
-                  </m:r>
-                  <m:sSub>
-                    <m:sSubPr>
-                      <m:ctrlPr/>
-                    </m:sSubPr>
-                    <m:e>
-                      <m:r>
-                        <m:rPr>
-                          <m:sty m:val="i"/>
-                        </m:rPr>
-                        <m:t>t</m:t>
-                      </m:r>
-                    </m:e>
-                    <m:sub>
-                      <m:r>
-                        <m:rPr>
-                          <m:sty m:val="p"/>
-                        </m:rPr>
-                        <m:t>chain</m:t>
-                      </m:r>
-                    </m:sub>
-                  </m:sSub>
-                  <m:r>
-                    <m:rPr>
-                      <m:sty m:val="p"/>
-                    </m:rPr>
-                    <m:t> + </m:t>
-                  </m:r>
-                  <m:sSub>
-                    <m:sSubPr>
-                      <m:ctrlPr/>
-                    </m:sSubPr>
-                    <m:e>
-                      <m:r>
-                        <m:rPr>
-                          <m:sty m:val="i"/>
-                        </m:rPr>
-                        <m:t>ρ</m:t>
-                      </m:r>
-                    </m:e>
-                    <m:sub>
-                      <m:r>
-                        <m:rPr>
-                          <m:sty m:val="p"/>
-                        </m:rPr>
-                        <m:t>venue</m:t>
-                      </m:r>
-                    </m:sub>
-                  </m:sSub>
-                  <m:r>
-                    <m:rPr>
-                      <m:sty m:val="p"/>
-                    </m:rPr>
-                    <m:t>)</m:t>
-                  </m:r>
-                </m:oMath>
-              </m:oMathPara>
-            </a14:m>
-          </a:p>
-          <a:p>
-            <a:pPr algn="ctr">
-              <a:buNone/>
-            </a:pPr>
-            <a:r>
-              <a:rPr lang="en-US" sz="2100" i="1" b="0" dirty="0">
-                <a:solidFill>
-                  <a:srgbClr val="555555"/>
-                </a:solidFill>
-                <a:latin typeface="Arial"/>
-              </a:rPr>
-              <a:t>Chain congestion + venue reliability</a:t>
-            </a:r>
-          </a:p>
-        </p:txBody>
-      </p:sp>
-      <p:pic>
-        <p:nvPicPr>
-          <p:cNvPr id="308" name="CameraReadySuccesfulPathProfit"/>
-          <p:cNvPicPr/>
+        </p:grpSpPr>
+        <p:pic>
+          <p:nvPicPr>
+            <p:cNvPr id="310" name="fig01_node_expansion_bar"/>
+            <p:cNvPicPr/>
+            <p:nvPr/>
+          </p:nvPicPr>
+          <p:blipFill>
+            <a:blip r:embed="rId12"/>
+            <a:stretch>
+              <a:fillRect/>
+            </a:stretch>
+          </p:blipFill>
+          <p:spPr>
+            <a:xfrm>
+              <a:off x="24637755" y="6740000"/>
+              <a:ext cx="4324489" cy="3100000"/>
+            </a:xfrm>
+            <a:prstGeom prst="rect">
+              <a:avLst/>
+            </a:prstGeom>
+          </p:spPr>
+        </p:pic>
+        <p:sp>
+          <p:nvSpPr>
+            <p:cNvPr id="311" name="Cap311"/>
+            <p:cNvSpPr txBox="1"/>
+            <p:nvPr/>
+          </p:nvSpPr>
+          <p:spPr>
+            <a:xfrm>
+              <a:off x="24637755" y="9877977"/>
+              <a:ext cx="4324489" cy="899387"/>
+            </a:xfrm>
+            <a:prstGeom prst="rect">
+              <a:avLst/>
+            </a:prstGeom>
+            <a:noFill/>
+            <a:ln>
+              <a:noFill/>
+            </a:ln>
+          </p:spPr>
+          <p:txBody>
+            <a:bodyPr wrap="square" anchor="ctr"/>
+            <a:lstStyle/>
+            <a:p>
+              <a:pPr algn="ctr">
+                <a:buNone/>
+              </a:pPr>
+              <a:r>
+                <a:rPr lang="en-US" sz="1700" i="1" dirty="0">
+                  <a:solidFill>
+                    <a:srgbClr val="555555"/>
+                  </a:solidFill>
+                  <a:latin typeface="Arial"/>
+                </a:rPr>
+                <a:t>Fig. 2a — Node expansions per heuristic (cached graph, $10 k order)</a:t>
+              </a:r>
+            </a:p>
+          </p:txBody>
+        </p:sp>
+      </p:grpSp>
+      <p:grpSp>
+        <p:nvGrpSpPr>
+          <p:cNvPr id="10" name="Group 9">
+            <a:extLst>
+              <a:ext uri="{FF2B5EF4-FFF2-40B4-BE49-F238E27FC236}">
+                <a16:creationId xmlns:a16="http://schemas.microsoft.com/office/drawing/2014/main" id="{9C3AE06C-767C-D571-B1F3-6A17D7DAC668}"/>
+              </a:ext>
+            </a:extLst>
+          </p:cNvPr>
+          <p:cNvGrpSpPr/>
           <p:nvPr/>
-        </p:nvPicPr>
-        <p:blipFill>
-          <a:blip r:embed="rId6"/>
-          <a:stretch>
-            <a:fillRect/>
-          </a:stretch>
-        </p:blipFill>
-        <p:spPr>
+        </p:nvGrpSpPr>
+        <p:grpSpPr>
           <a:xfrm>
-            <a:off x="11350000" y="14420000"/>
-            <a:ext cx="9200000" cy="5431325"/>
+            <a:off x="29642389" y="17627121"/>
+            <a:ext cx="2475409" cy="2063658"/>
+            <a:chOff x="29906275" y="17910347"/>
+            <a:chExt cx="2475409" cy="2063658"/>
           </a:xfrm>
-          <a:prstGeom prst="rect">
-            <a:avLst/>
-          </a:prstGeom>
-        </p:spPr>
-      </p:pic>
-      <p:sp>
-        <p:nvSpPr>
-          <p:cNvPr id="309" name="Cap309"/>
-          <p:cNvSpPr txBox="1"/>
-          <p:nvPr/>
-        </p:nvSpPr>
-        <p:spPr>
-          <a:xfrm>
-            <a:off x="11350000" y="19886325"/>
-            <a:ext cx="9200000" cy="370000"/>
-          </a:xfrm>
-          <a:prstGeom prst="rect">
-            <a:avLst/>
-          </a:prstGeom>
-          <a:noFill/>
-          <a:ln>
+        </p:grpSpPr>
+        <p:pic>
+          <p:nvPicPr>
+            <p:cNvPr id="312" name="qr_github"/>
+            <p:cNvPicPr>
+              <a:picLocks/>
+            </p:cNvPicPr>
+            <p:nvPr/>
+          </p:nvPicPr>
+          <p:blipFill>
+            <a:blip r:embed="rId13"/>
+            <a:stretch>
+              <a:fillRect/>
+            </a:stretch>
+          </p:blipFill>
+          <p:spPr>
+            <a:xfrm>
+              <a:off x="30423980" y="17910347"/>
+              <a:ext cx="1440000" cy="1440000"/>
+            </a:xfrm>
+            <a:prstGeom prst="rect">
+              <a:avLst/>
+            </a:prstGeom>
+          </p:spPr>
+        </p:pic>
+        <p:sp>
+          <p:nvSpPr>
+            <p:cNvPr id="313" name="Cap313"/>
+            <p:cNvSpPr txBox="1"/>
+            <p:nvPr/>
+          </p:nvSpPr>
+          <p:spPr>
+            <a:xfrm>
+              <a:off x="29906275" y="19350347"/>
+              <a:ext cx="2475409" cy="623658"/>
+            </a:xfrm>
+            <a:prstGeom prst="rect">
+              <a:avLst/>
+            </a:prstGeom>
             <a:noFill/>
-          </a:ln>
-        </p:spPr>
-        <p:txBody>
-          <a:bodyPr wrap="square" anchor="ctr"/>
-          <a:lstStyle/>
-          <a:p>
-            <a:pPr algn="ctr">
-              <a:buNone/>
-            </a:pPr>
-            <a:r>
-              <a:rPr lang="en-US" sz="1700" i="1" dirty="0">
-                <a:solidFill>
-                  <a:srgbClr val="555555"/>
-                </a:solidFill>
-                <a:latin typeface="Arial"/>
-              </a:rPr>
-              <a:t>Fig. 1b - A profitable path: Kraken -&gt; KuCoin (USDT -&gt; TUSD)</a:t>
-            </a:r>
-          </a:p>
-        </p:txBody>
-      </p:sp>
-      <p:pic>
-        <p:nvPicPr>
-          <p:cNvPr id="310" name="fig01_node_expansion_bar"/>
-          <p:cNvPicPr/>
-          <p:nvPr/>
-        </p:nvPicPr>
-        <p:blipFill>
-          <a:blip r:embed="rId7"/>
-          <a:stretch>
-            <a:fillRect/>
-          </a:stretch>
-        </p:blipFill>
-        <p:spPr>
-          <a:xfrm>
-            <a:off x="24637755" y="7500000"/>
-            <a:ext cx="4324489" cy="3100000"/>
-          </a:xfrm>
-          <a:prstGeom prst="rect">
-            <a:avLst/>
-          </a:prstGeom>
-        </p:spPr>
-      </p:pic>
-      <p:sp>
-        <p:nvSpPr>
-          <p:cNvPr id="311" name="Cap311"/>
-          <p:cNvSpPr txBox="1"/>
-          <p:nvPr/>
-        </p:nvSpPr>
-        <p:spPr>
-          <a:xfrm>
-            <a:off x="24637755" y="10635000"/>
-            <a:ext cx="4324489" cy="370000"/>
-          </a:xfrm>
-          <a:prstGeom prst="rect">
-            <a:avLst/>
-          </a:prstGeom>
-          <a:noFill/>
-          <a:ln>
-            <a:noFill/>
-          </a:ln>
-        </p:spPr>
-        <p:txBody>
-          <a:bodyPr wrap="square" anchor="ctr"/>
-          <a:lstStyle/>
-          <a:p>
-            <a:pPr algn="ctr">
-              <a:buNone/>
-            </a:pPr>
-            <a:r>
-              <a:rPr lang="en-US" sz="1700" i="1" dirty="0">
-                <a:solidFill>
-                  <a:srgbClr val="555555"/>
-                </a:solidFill>
-                <a:latin typeface="Arial"/>
-              </a:rPr>
-              <a:t>Fig. 2a — Node expansions per heuristic (cached graph, $10 k order)</a:t>
-            </a:r>
-          </a:p>
-        </p:txBody>
-      </p:sp>
-      <p:pic>
-        <p:nvPicPr>
-          <p:cNvPr id="312" name="qr_github"/>
-          <p:cNvPicPr/>
-          <p:nvPr/>
-        </p:nvPicPr>
-        <p:blipFill>
-          <a:blip r:embed="rId8"/>
-          <a:stretch>
-            <a:fillRect/>
-          </a:stretch>
-        </p:blipFill>
-        <p:spPr>
-          <a:xfrm>
-            <a:off x="24400000" y="13891689"/>
-            <a:ext cx="4800000" cy="4800000"/>
-          </a:xfrm>
-          <a:prstGeom prst="rect">
-            <a:avLst/>
-          </a:prstGeom>
-        </p:spPr>
-      </p:pic>
-      <p:sp>
-        <p:nvSpPr>
-          <p:cNvPr id="313" name="Cap313"/>
-          <p:cNvSpPr txBox="1"/>
-          <p:nvPr/>
-        </p:nvSpPr>
-        <p:spPr>
-          <a:xfrm>
-            <a:off x="24400000" y="18726689"/>
-            <a:ext cx="4800000" cy="370000"/>
-          </a:xfrm>
-          <a:prstGeom prst="rect">
-            <a:avLst/>
-          </a:prstGeom>
-          <a:noFill/>
-          <a:ln>
-            <a:noFill/>
-          </a:ln>
-        </p:spPr>
-        <p:txBody>
-          <a:bodyPr wrap="square" anchor="ctr"/>
-          <a:lstStyle/>
-          <a:p>
-            <a:pPr algn="ctr">
-              <a:buNone/>
-            </a:pPr>
-            <a:r>
-              <a:rPr lang="en-US" sz="1700" i="1" dirty="0">
-                <a:solidFill>
-                  <a:srgbClr val="555555"/>
-                </a:solidFill>
-                <a:latin typeface="Arial"/>
-              </a:rPr>
-              <a:t>Scan for source code &amp; video demo</a:t>
-            </a:r>
-          </a:p>
-        </p:txBody>
-      </p:sp>
+            <a:ln>
+              <a:noFill/>
+            </a:ln>
+          </p:spPr>
+          <p:txBody>
+            <a:bodyPr wrap="square" anchor="ctr"/>
+            <a:lstStyle/>
+            <a:p>
+              <a:pPr algn="ctr">
+                <a:buNone/>
+              </a:pPr>
+              <a:r>
+                <a:rPr lang="en-US" sz="1700" i="1" dirty="0">
+                  <a:solidFill>
+                    <a:srgbClr val="555555"/>
+                  </a:solidFill>
+                  <a:latin typeface="Arial"/>
+                </a:rPr>
+                <a:t>Scan for source code &amp; video demo</a:t>
+              </a:r>
+            </a:p>
+          </p:txBody>
+        </p:sp>
+      </p:grpSp>
     </p:spTree>
   </p:cSld>
   <p:clrMapOvr>
